--- a/reports/presentation/wildfire_exposure_screening_capstone_final.pptx
+++ b/reports/presentation/wildfire_exposure_screening_capstone_final.pptx
@@ -1114,31 +1114,37 @@
           <a:lstStyle/>
           <a:p>
             <a:r>
-              <a:rPr dirty="0"/>
-              <a:t>This is the practical use of the project. The 2026 QGIS layer is a comparative, target-free model estimate. It helps narrow broad location-search areas for more detailed investigation. </a:t>
-            </a:r>
-            <a:r>
-              <a:t>The estimate is cell-level context and must be followed by local evidence.</a:t>
-            </a:r>
-          </a:p>
-          <a:p>
-            <a:endParaRPr/>
-          </a:p>
-          <a:p>
-            <a:r>
-              <a:rPr dirty="0"/>
+              <a:rPr lang="en-US" dirty="0"/>
+              <a:t>Use a simple scenario: a prospective buyer is considering several broad areas in mainland Portugal. Start with the 2026 comparative estimate, which ranks 1 km cells using 2025 predictor inputs. Then read the historical recurrence and official ICNF structural-hazard layers alongside it; these are separate evidence layers, not one combined score. The practical output is a shorter list of broad areas to visit and investigate first. Local planning, access, insurance, terrain and property-specific evidence still complete the decision.</a:t>
+            </a:r>
+          </a:p>
+          <a:p>
+            <a:endParaRPr lang="en-US" dirty="0"/>
+          </a:p>
+          <a:p>
+            <a:r>
+              <a:rPr lang="en-US" dirty="0"/>
               <a:t>[Sources]</a:t>
             </a:r>
           </a:p>
           <a:p>
             <a:r>
-              <a:rPr dirty="0" err="1"/>
+              <a:rPr lang="en-US" dirty="0" err="1"/>
               <a:t>qgis</a:t>
             </a:r>
             <a:r>
-              <a:rPr dirty="0"/>
-              <a:t>/wildfire_exposure_screening_portugal_2026.qgz; reports/validation/operational_forecast_2026_validation.md</a:t>
-            </a:r>
+              <a:rPr lang="en-US" dirty="0"/>
+              <a:t>/wildfire_exposure_screening_portugal_2026.qgz; </a:t>
+            </a:r>
+            <a:r>
+              <a:rPr lang="en-US" dirty="0" err="1"/>
+              <a:t>qgis</a:t>
+            </a:r>
+            <a:r>
+              <a:rPr lang="en-US"/>
+              <a:t>/README.md; reports/validation/operational_forecast_2026_validation.md</a:t>
+            </a:r>
+            <a:endParaRPr lang="en-US" dirty="0"/>
           </a:p>
         </p:txBody>
       </p:sp>
@@ -9906,10 +9912,10 @@
       </p:grpSpPr>
       <p:sp>
         <p:nvSpPr>
-          <p:cNvPr id="2" name="Shape 0">
-            <a:extLst>
-              <a:ext uri="{FF2B5EF4-FFF2-40B4-BE49-F238E27FC236}">
-                <a16:creationId xmlns:a16="http://schemas.microsoft.com/office/drawing/2014/main" id="{3A86A1C8-DB06-4DCE-9DAF-693B7C77942A}"/>
+          <p:cNvPr id="41" name="Shape 0">
+            <a:extLst>
+              <a:ext uri="{FF2B5EF4-FFF2-40B4-BE49-F238E27FC236}">
+                <a16:creationId xmlns:a16="http://schemas.microsoft.com/office/drawing/2014/main" id="{9E3B76F2-BCC7-BBF0-1273-7B2C877F93D3}"/>
               </a:ext>
             </a:extLst>
           </p:cNvPr>
@@ -9939,10 +9945,10 @@
       </p:sp>
       <p:sp>
         <p:nvSpPr>
-          <p:cNvPr id="3" name="Shape 1">
-            <a:extLst>
-              <a:ext uri="{FF2B5EF4-FFF2-40B4-BE49-F238E27FC236}">
-                <a16:creationId xmlns:a16="http://schemas.microsoft.com/office/drawing/2014/main" id="{D197F66D-6C57-4707-8514-4D78C9DEF865}"/>
+          <p:cNvPr id="42" name="Shape 1">
+            <a:extLst>
+              <a:ext uri="{FF2B5EF4-FFF2-40B4-BE49-F238E27FC236}">
+                <a16:creationId xmlns:a16="http://schemas.microsoft.com/office/drawing/2014/main" id="{4EF0D36C-C357-E332-9FBF-445832165DBE}"/>
               </a:ext>
             </a:extLst>
           </p:cNvPr>
@@ -9972,10 +9978,10 @@
       </p:sp>
       <p:sp>
         <p:nvSpPr>
-          <p:cNvPr id="4" name="Shape 2">
-            <a:extLst>
-              <a:ext uri="{FF2B5EF4-FFF2-40B4-BE49-F238E27FC236}">
-                <a16:creationId xmlns:a16="http://schemas.microsoft.com/office/drawing/2014/main" id="{BCC99481-8AFC-45E5-8E41-5D92798EEDD0}"/>
+          <p:cNvPr id="43" name="Shape 2">
+            <a:extLst>
+              <a:ext uri="{FF2B5EF4-FFF2-40B4-BE49-F238E27FC236}">
+                <a16:creationId xmlns:a16="http://schemas.microsoft.com/office/drawing/2014/main" id="{1CFE74E3-3462-A34A-4A20-31F9DE9FBFCB}"/>
               </a:ext>
             </a:extLst>
           </p:cNvPr>
@@ -10005,10 +10011,10 @@
       </p:sp>
       <p:sp>
         <p:nvSpPr>
-          <p:cNvPr id="5" name="Text 3">
-            <a:extLst>
-              <a:ext uri="{FF2B5EF4-FFF2-40B4-BE49-F238E27FC236}">
-                <a16:creationId xmlns:a16="http://schemas.microsoft.com/office/drawing/2014/main" id="{6BEB6717-FD6D-4B81-81A9-77D30FCEDB7F}"/>
+          <p:cNvPr id="44" name="Text 3">
+            <a:extLst>
+              <a:ext uri="{FF2B5EF4-FFF2-40B4-BE49-F238E27FC236}">
+                <a16:creationId xmlns:a16="http://schemas.microsoft.com/office/drawing/2014/main" id="{0D45B056-7786-F6DB-DB67-68872420F5BA}"/>
               </a:ext>
             </a:extLst>
           </p:cNvPr>
@@ -10040,7 +10046,7 @@
                   <a:srgbClr val="E8A020"/>
                 </a:solidFill>
               </a:rPr>
-              <a:t>RECOMMENDED USE</a:t>
+              <a:t>RECOMMENDED USE CASE</a:t>
             </a:r>
             <a:endParaRPr sz="1100"/>
           </a:p>
@@ -10048,10 +10054,10 @@
       </p:sp>
       <p:sp>
         <p:nvSpPr>
-          <p:cNvPr id="6" name="Text 4">
-            <a:extLst>
-              <a:ext uri="{FF2B5EF4-FFF2-40B4-BE49-F238E27FC236}">
-                <a16:creationId xmlns:a16="http://schemas.microsoft.com/office/drawing/2014/main" id="{6C101844-9940-49BE-8B17-716FB787513D}"/>
+          <p:cNvPr id="45" name="Text 4">
+            <a:extLst>
+              <a:ext uri="{FF2B5EF4-FFF2-40B4-BE49-F238E27FC236}">
+                <a16:creationId xmlns:a16="http://schemas.microsoft.com/office/drawing/2014/main" id="{41DC7F03-CAB9-6A42-265A-C46904C8AFD1}"/>
               </a:ext>
             </a:extLst>
           </p:cNvPr>
@@ -10091,10 +10097,10 @@
       </p:sp>
       <p:sp>
         <p:nvSpPr>
-          <p:cNvPr id="7" name="Text 5">
-            <a:extLst>
-              <a:ext uri="{FF2B5EF4-FFF2-40B4-BE49-F238E27FC236}">
-                <a16:creationId xmlns:a16="http://schemas.microsoft.com/office/drawing/2014/main" id="{0121B0D7-68D2-4F3B-B4D9-855405D8279A}"/>
+          <p:cNvPr id="46" name="Text 5">
+            <a:extLst>
+              <a:ext uri="{FF2B5EF4-FFF2-40B4-BE49-F238E27FC236}">
+                <a16:creationId xmlns:a16="http://schemas.microsoft.com/office/drawing/2014/main" id="{D847301C-C927-7FAC-A769-4C641A7B5D35}"/>
               </a:ext>
             </a:extLst>
           </p:cNvPr>
@@ -10126,7 +10132,7 @@
                   <a:srgbClr val="1A2638"/>
                 </a:solidFill>
               </a:rPr>
-              <a:t>Use the 2026 estimate to prioritise broad areas for further research</a:t>
+              <a:t>A prospective buyer narrows a national location search</a:t>
             </a:r>
             <a:endParaRPr sz="1600"/>
           </a:p>
@@ -10134,10 +10140,10 @@
       </p:sp>
       <p:sp>
         <p:nvSpPr>
-          <p:cNvPr id="8" name="Shape 6">
-            <a:extLst>
-              <a:ext uri="{FF2B5EF4-FFF2-40B4-BE49-F238E27FC236}">
-                <a16:creationId xmlns:a16="http://schemas.microsoft.com/office/drawing/2014/main" id="{6015B360-BBBA-4DE0-9795-57F031507AC6}"/>
+          <p:cNvPr id="47" name="Shape 6">
+            <a:extLst>
+              <a:ext uri="{FF2B5EF4-FFF2-40B4-BE49-F238E27FC236}">
+                <a16:creationId xmlns:a16="http://schemas.microsoft.com/office/drawing/2014/main" id="{F70699D7-5B53-2C77-0175-B3B78E7EF30C}"/>
               </a:ext>
             </a:extLst>
           </p:cNvPr>
@@ -10174,10 +10180,10 @@
       </p:sp>
       <p:sp>
         <p:nvSpPr>
-          <p:cNvPr id="9" name="Shape 7">
-            <a:extLst>
-              <a:ext uri="{FF2B5EF4-FFF2-40B4-BE49-F238E27FC236}">
-                <a16:creationId xmlns:a16="http://schemas.microsoft.com/office/drawing/2014/main" id="{5C07B9EA-88EE-49EE-B7D4-7BDB797C5482}"/>
+          <p:cNvPr id="48" name="Shape 7">
+            <a:extLst>
+              <a:ext uri="{FF2B5EF4-FFF2-40B4-BE49-F238E27FC236}">
+                <a16:creationId xmlns:a16="http://schemas.microsoft.com/office/drawing/2014/main" id="{111BE822-2C18-0A11-F129-F8D5751595BB}"/>
               </a:ext>
             </a:extLst>
           </p:cNvPr>
@@ -10207,10 +10213,10 @@
       </p:sp>
       <p:sp>
         <p:nvSpPr>
-          <p:cNvPr id="10" name="Text 8">
-            <a:extLst>
-              <a:ext uri="{FF2B5EF4-FFF2-40B4-BE49-F238E27FC236}">
-                <a16:creationId xmlns:a16="http://schemas.microsoft.com/office/drawing/2014/main" id="{D9484D15-B5B7-461A-BAA9-47327A4B2126}"/>
+          <p:cNvPr id="49" name="Text 8">
+            <a:extLst>
+              <a:ext uri="{FF2B5EF4-FFF2-40B4-BE49-F238E27FC236}">
+                <a16:creationId xmlns:a16="http://schemas.microsoft.com/office/drawing/2014/main" id="{F7C43176-6DA9-3BA7-4DE8-A4C84CEC076C}"/>
               </a:ext>
             </a:extLst>
           </p:cNvPr>
@@ -10250,10 +10256,10 @@
       </p:sp>
       <p:sp>
         <p:nvSpPr>
-          <p:cNvPr id="11" name="Text 9">
-            <a:extLst>
-              <a:ext uri="{FF2B5EF4-FFF2-40B4-BE49-F238E27FC236}">
-                <a16:creationId xmlns:a16="http://schemas.microsoft.com/office/drawing/2014/main" id="{67C6A5B0-CECC-4ACC-9832-24A59DDB136C}"/>
+          <p:cNvPr id="50" name="Text 9">
+            <a:extLst>
+              <a:ext uri="{FF2B5EF4-FFF2-40B4-BE49-F238E27FC236}">
+                <a16:creationId xmlns:a16="http://schemas.microsoft.com/office/drawing/2014/main" id="{25E0079F-7E52-BCD6-436F-A2013D60831A}"/>
               </a:ext>
             </a:extLst>
           </p:cNvPr>
@@ -10293,10 +10299,10 @@
       </p:sp>
       <p:sp>
         <p:nvSpPr>
-          <p:cNvPr id="12" name="Text 10">
-            <a:extLst>
-              <a:ext uri="{FF2B5EF4-FFF2-40B4-BE49-F238E27FC236}">
-                <a16:creationId xmlns:a16="http://schemas.microsoft.com/office/drawing/2014/main" id="{22DC359E-9E6E-4E9F-BF48-BEF9690E6A70}"/>
+          <p:cNvPr id="51" name="Text 10">
+            <a:extLst>
+              <a:ext uri="{FF2B5EF4-FFF2-40B4-BE49-F238E27FC236}">
+                <a16:creationId xmlns:a16="http://schemas.microsoft.com/office/drawing/2014/main" id="{35DCCB06-55A6-7118-8D80-0423179BFA58}"/>
               </a:ext>
             </a:extLst>
           </p:cNvPr>
@@ -10328,7 +10334,7 @@
                   <a:srgbClr val="1A2638"/>
                 </a:solidFill>
               </a:rPr>
-              <a:t>Target-free estimate from 2025 predictor inputs, shown as relative cell percentiles.</a:t>
+              <a:t>Rank broad 1 km areas using 2025 predictor inputs.</a:t>
             </a:r>
             <a:endParaRPr sz="850"/>
           </a:p>
@@ -10336,10 +10342,10 @@
       </p:sp>
       <p:sp>
         <p:nvSpPr>
-          <p:cNvPr id="13" name="Shape 11">
-            <a:extLst>
-              <a:ext uri="{FF2B5EF4-FFF2-40B4-BE49-F238E27FC236}">
-                <a16:creationId xmlns:a16="http://schemas.microsoft.com/office/drawing/2014/main" id="{1CD4E307-F1DC-41BD-A2A0-EF4229C67E73}"/>
+          <p:cNvPr id="52" name="Shape 11">
+            <a:extLst>
+              <a:ext uri="{FF2B5EF4-FFF2-40B4-BE49-F238E27FC236}">
+                <a16:creationId xmlns:a16="http://schemas.microsoft.com/office/drawing/2014/main" id="{48892306-CBC7-1476-476D-AF940872013E}"/>
               </a:ext>
             </a:extLst>
           </p:cNvPr>
@@ -10369,10 +10375,10 @@
       </p:sp>
       <p:sp>
         <p:nvSpPr>
-          <p:cNvPr id="14" name="Text 12">
-            <a:extLst>
-              <a:ext uri="{FF2B5EF4-FFF2-40B4-BE49-F238E27FC236}">
-                <a16:creationId xmlns:a16="http://schemas.microsoft.com/office/drawing/2014/main" id="{C2C8DE72-7721-45D6-B469-D1F7820E4A35}"/>
+          <p:cNvPr id="53" name="Text 12">
+            <a:extLst>
+              <a:ext uri="{FF2B5EF4-FFF2-40B4-BE49-F238E27FC236}">
+                <a16:creationId xmlns:a16="http://schemas.microsoft.com/office/drawing/2014/main" id="{524E6A7B-8390-A7C3-5810-F79BE56CA145}"/>
               </a:ext>
             </a:extLst>
           </p:cNvPr>
@@ -10404,7 +10410,7 @@
                   <a:srgbClr val="1A2638"/>
                 </a:solidFill>
               </a:rPr>
-              <a:t>Historical + official context</a:t>
+              <a:t>COMPARE CONTEXT</a:t>
             </a:r>
             <a:endParaRPr sz="800"/>
           </a:p>
@@ -10412,10 +10418,10 @@
       </p:sp>
       <p:sp>
         <p:nvSpPr>
-          <p:cNvPr id="15" name="Text 13">
-            <a:extLst>
-              <a:ext uri="{FF2B5EF4-FFF2-40B4-BE49-F238E27FC236}">
-                <a16:creationId xmlns:a16="http://schemas.microsoft.com/office/drawing/2014/main" id="{A0536C49-BFED-466A-8A4F-1AF9F8838334}"/>
+          <p:cNvPr id="54" name="Text 13">
+            <a:extLst>
+              <a:ext uri="{FF2B5EF4-FFF2-40B4-BE49-F238E27FC236}">
+                <a16:creationId xmlns:a16="http://schemas.microsoft.com/office/drawing/2014/main" id="{D813BEB0-AB29-1201-6C98-83ED8F0166C5}"/>
               </a:ext>
             </a:extLst>
           </p:cNvPr>
@@ -10447,7 +10453,7 @@
                   <a:srgbClr val="2A9D61"/>
                 </a:solidFill>
               </a:rPr>
-              <a:t>Read recurrence and the ICNF structural-hazard class beside the estimate.</a:t>
+              <a:t>Historical recurrence + official ICNF structural hazard</a:t>
             </a:r>
             <a:endParaRPr sz="750"/>
           </a:p>
@@ -10455,10 +10461,10 @@
       </p:sp>
       <p:sp>
         <p:nvSpPr>
-          <p:cNvPr id="16" name="Text 14">
-            <a:extLst>
-              <a:ext uri="{FF2B5EF4-FFF2-40B4-BE49-F238E27FC236}">
-                <a16:creationId xmlns:a16="http://schemas.microsoft.com/office/drawing/2014/main" id="{061C0752-DC49-4F35-AFC7-AB88C79FAF0D}"/>
+          <p:cNvPr id="55" name="Text 14">
+            <a:extLst>
+              <a:ext uri="{FF2B5EF4-FFF2-40B4-BE49-F238E27FC236}">
+                <a16:creationId xmlns:a16="http://schemas.microsoft.com/office/drawing/2014/main" id="{1640E6C2-2736-6C47-08A7-E76229CD60DE}"/>
               </a:ext>
             </a:extLst>
           </p:cNvPr>
@@ -10490,7 +10496,7 @@
                   <a:srgbClr val="C0392B"/>
                 </a:solidFill>
               </a:rPr>
-              <a:t>Then compare the patterns.</a:t>
+              <a:t>Read the three layers side by side before shortlisting areas.</a:t>
             </a:r>
             <a:endParaRPr sz="750"/>
           </a:p>
@@ -10498,10 +10504,10 @@
       </p:sp>
       <p:sp>
         <p:nvSpPr>
-          <p:cNvPr id="17" name="Text 15">
-            <a:extLst>
-              <a:ext uri="{FF2B5EF4-FFF2-40B4-BE49-F238E27FC236}">
-                <a16:creationId xmlns:a16="http://schemas.microsoft.com/office/drawing/2014/main" id="{E4724BAC-EE83-433E-87E5-BC0E996BDFFC}"/>
+          <p:cNvPr id="56" name="Text 15">
+            <a:extLst>
+              <a:ext uri="{FF2B5EF4-FFF2-40B4-BE49-F238E27FC236}">
+                <a16:creationId xmlns:a16="http://schemas.microsoft.com/office/drawing/2014/main" id="{E7998FAA-1292-DEE4-FBBA-DA72F51BBE8F}"/>
               </a:ext>
             </a:extLst>
           </p:cNvPr>
@@ -10541,10 +10547,10 @@
       </p:sp>
       <p:sp>
         <p:nvSpPr>
-          <p:cNvPr id="18" name="Shape 16">
-            <a:extLst>
-              <a:ext uri="{FF2B5EF4-FFF2-40B4-BE49-F238E27FC236}">
-                <a16:creationId xmlns:a16="http://schemas.microsoft.com/office/drawing/2014/main" id="{88BDC9BD-5FAD-4BBE-B51A-B021702F2F4D}"/>
+          <p:cNvPr id="57" name="Shape 16">
+            <a:extLst>
+              <a:ext uri="{FF2B5EF4-FFF2-40B4-BE49-F238E27FC236}">
+                <a16:creationId xmlns:a16="http://schemas.microsoft.com/office/drawing/2014/main" id="{AA16804A-52B3-003F-850D-E763525EBF82}"/>
               </a:ext>
             </a:extLst>
           </p:cNvPr>
@@ -10581,10 +10587,10 @@
       </p:sp>
       <p:sp>
         <p:nvSpPr>
-          <p:cNvPr id="19" name="Shape 17">
-            <a:extLst>
-              <a:ext uri="{FF2B5EF4-FFF2-40B4-BE49-F238E27FC236}">
-                <a16:creationId xmlns:a16="http://schemas.microsoft.com/office/drawing/2014/main" id="{8FE4F804-F3B6-4684-BFCD-653595482E22}"/>
+          <p:cNvPr id="58" name="Shape 17">
+            <a:extLst>
+              <a:ext uri="{FF2B5EF4-FFF2-40B4-BE49-F238E27FC236}">
+                <a16:creationId xmlns:a16="http://schemas.microsoft.com/office/drawing/2014/main" id="{A132002A-B816-4B27-A659-A2A2193BD4C4}"/>
               </a:ext>
             </a:extLst>
           </p:cNvPr>
@@ -10614,10 +10620,10 @@
       </p:sp>
       <p:sp>
         <p:nvSpPr>
-          <p:cNvPr id="20" name="Text 18">
-            <a:extLst>
-              <a:ext uri="{FF2B5EF4-FFF2-40B4-BE49-F238E27FC236}">
-                <a16:creationId xmlns:a16="http://schemas.microsoft.com/office/drawing/2014/main" id="{F823FAC1-C9B5-4631-81A0-0779D0A744E5}"/>
+          <p:cNvPr id="59" name="Text 18">
+            <a:extLst>
+              <a:ext uri="{FF2B5EF4-FFF2-40B4-BE49-F238E27FC236}">
+                <a16:creationId xmlns:a16="http://schemas.microsoft.com/office/drawing/2014/main" id="{E937C9EB-5EC4-4BED-DCC0-EEB4268C59F9}"/>
               </a:ext>
             </a:extLst>
           </p:cNvPr>
@@ -10649,7 +10655,7 @@
                   <a:srgbClr val="FFFFFF"/>
                 </a:solidFill>
               </a:rPr>
-              <a:t>NEXT ACTION</a:t>
+              <a:t>SHORTLIST AREAS</a:t>
             </a:r>
             <a:endParaRPr sz="1100"/>
           </a:p>
@@ -10657,10 +10663,10 @@
       </p:sp>
       <p:sp>
         <p:nvSpPr>
-          <p:cNvPr id="21" name="Text 19">
-            <a:extLst>
-              <a:ext uri="{FF2B5EF4-FFF2-40B4-BE49-F238E27FC236}">
-                <a16:creationId xmlns:a16="http://schemas.microsoft.com/office/drawing/2014/main" id="{CDF192D1-D9B3-4618-B786-9A11E17D0DE9}"/>
+          <p:cNvPr id="60" name="Text 19">
+            <a:extLst>
+              <a:ext uri="{FF2B5EF4-FFF2-40B4-BE49-F238E27FC236}">
+                <a16:creationId xmlns:a16="http://schemas.microsoft.com/office/drawing/2014/main" id="{922D1C3D-92F4-7A52-D254-13F805D6760C}"/>
               </a:ext>
             </a:extLst>
           </p:cNvPr>
@@ -10692,7 +10698,7 @@
                   <a:srgbClr val="E67E22"/>
                 </a:solidFill>
               </a:rPr>
-              <a:t>Investigate locally</a:t>
+              <a:t>Focus the search</a:t>
             </a:r>
             <a:endParaRPr sz="800"/>
           </a:p>
@@ -10700,10 +10706,10 @@
       </p:sp>
       <p:sp>
         <p:nvSpPr>
-          <p:cNvPr id="22" name="Text 20">
-            <a:extLst>
-              <a:ext uri="{FF2B5EF4-FFF2-40B4-BE49-F238E27FC236}">
-                <a16:creationId xmlns:a16="http://schemas.microsoft.com/office/drawing/2014/main" id="{35B99BF9-D34E-45F7-A42A-E1EE7420E18A}"/>
+          <p:cNvPr id="61" name="Text 20">
+            <a:extLst>
+              <a:ext uri="{FF2B5EF4-FFF2-40B4-BE49-F238E27FC236}">
+                <a16:creationId xmlns:a16="http://schemas.microsoft.com/office/drawing/2014/main" id="{DD31154A-7340-6BA1-B58C-EB0C128FA94A}"/>
               </a:ext>
             </a:extLst>
           </p:cNvPr>
@@ -10735,7 +10741,7 @@
                   <a:srgbClr val="1A2638"/>
                 </a:solidFill>
               </a:rPr>
-              <a:t>Use planning, access, insurance, terrain and property evidence next.</a:t>
+              <a:t>Prioritise broad areas for visits and deeper research.</a:t>
             </a:r>
             <a:endParaRPr sz="850"/>
           </a:p>
@@ -10743,10 +10749,10 @@
       </p:sp>
       <p:sp>
         <p:nvSpPr>
-          <p:cNvPr id="23" name="Shape 21">
-            <a:extLst>
-              <a:ext uri="{FF2B5EF4-FFF2-40B4-BE49-F238E27FC236}">
-                <a16:creationId xmlns:a16="http://schemas.microsoft.com/office/drawing/2014/main" id="{6F886BEF-D149-4B22-AB28-BF3F16160D69}"/>
+          <p:cNvPr id="62" name="Shape 21">
+            <a:extLst>
+              <a:ext uri="{FF2B5EF4-FFF2-40B4-BE49-F238E27FC236}">
+                <a16:creationId xmlns:a16="http://schemas.microsoft.com/office/drawing/2014/main" id="{E3A1950C-3E98-2A41-9F7B-763C1A1EFE02}"/>
               </a:ext>
             </a:extLst>
           </p:cNvPr>
@@ -10776,10 +10782,10 @@
       </p:sp>
       <p:sp>
         <p:nvSpPr>
-          <p:cNvPr id="24" name="Text 22">
-            <a:extLst>
-              <a:ext uri="{FF2B5EF4-FFF2-40B4-BE49-F238E27FC236}">
-                <a16:creationId xmlns:a16="http://schemas.microsoft.com/office/drawing/2014/main" id="{80A0214D-E33A-4BF0-8D70-726CFE0375AB}"/>
+          <p:cNvPr id="63" name="Text 22">
+            <a:extLst>
+              <a:ext uri="{FF2B5EF4-FFF2-40B4-BE49-F238E27FC236}">
+                <a16:creationId xmlns:a16="http://schemas.microsoft.com/office/drawing/2014/main" id="{E3161D18-B8A1-E487-12AB-44CC4A732529}"/>
               </a:ext>
             </a:extLst>
           </p:cNvPr>
@@ -10811,7 +10817,7 @@
                   <a:srgbClr val="1A2638"/>
                 </a:solidFill>
               </a:rPr>
-              <a:t>NEXT STEPS</a:t>
+              <a:t>LOCAL VERIFICATION</a:t>
             </a:r>
             <a:endParaRPr sz="800"/>
           </a:p>
@@ -10819,10 +10825,10 @@
       </p:sp>
       <p:sp>
         <p:nvSpPr>
-          <p:cNvPr id="25" name="Text 23">
-            <a:extLst>
-              <a:ext uri="{FF2B5EF4-FFF2-40B4-BE49-F238E27FC236}">
-                <a16:creationId xmlns:a16="http://schemas.microsoft.com/office/drawing/2014/main" id="{EDB0DD6E-990A-42DB-9875-F090FBA9738B}"/>
+          <p:cNvPr id="64" name="Text 23">
+            <a:extLst>
+              <a:ext uri="{FF2B5EF4-FFF2-40B4-BE49-F238E27FC236}">
+                <a16:creationId xmlns:a16="http://schemas.microsoft.com/office/drawing/2014/main" id="{5C353123-8232-42F8-D273-5CB954BA4BBD}"/>
               </a:ext>
             </a:extLst>
           </p:cNvPr>
@@ -10854,7 +10860,7 @@
                   <a:srgbClr val="2A9D61"/>
                 </a:solidFill>
               </a:rPr>
-              <a:t>Refresh, rebuild, validate</a:t>
+              <a:t>Check local evidence</a:t>
             </a:r>
             <a:endParaRPr sz="750"/>
           </a:p>
@@ -10862,10 +10868,10 @@
       </p:sp>
       <p:sp>
         <p:nvSpPr>
-          <p:cNvPr id="26" name="Text 24">
-            <a:extLst>
-              <a:ext uri="{FF2B5EF4-FFF2-40B4-BE49-F238E27FC236}">
-                <a16:creationId xmlns:a16="http://schemas.microsoft.com/office/drawing/2014/main" id="{C7AC1FC5-9639-4DA9-B51C-80DD5E469942}"/>
+          <p:cNvPr id="65" name="Text 24">
+            <a:extLst>
+              <a:ext uri="{FF2B5EF4-FFF2-40B4-BE49-F238E27FC236}">
+                <a16:creationId xmlns:a16="http://schemas.microsoft.com/office/drawing/2014/main" id="{825EE7D9-0624-FD50-1A14-73D146D6F995}"/>
               </a:ext>
             </a:extLst>
           </p:cNvPr>
@@ -10897,7 +10903,7 @@
                   <a:srgbClr val="C0392B"/>
                 </a:solidFill>
               </a:rPr>
-              <a:t>Add completed-year sources, rebuild the QGIS layer, then evaluate the estimate after its observed outcome arrives.</a:t>
+              <a:t>Review planning, access, insurance, terrain and site conditions.</a:t>
             </a:r>
             <a:endParaRPr sz="750"/>
           </a:p>
@@ -10905,10 +10911,10 @@
       </p:sp>
       <p:sp>
         <p:nvSpPr>
-          <p:cNvPr id="27" name="Text 25">
-            <a:extLst>
-              <a:ext uri="{FF2B5EF4-FFF2-40B4-BE49-F238E27FC236}">
-                <a16:creationId xmlns:a16="http://schemas.microsoft.com/office/drawing/2014/main" id="{44357DB5-05F8-4CF5-8D21-E89F0DFA12F8}"/>
+          <p:cNvPr id="66" name="Text 25">
+            <a:extLst>
+              <a:ext uri="{FF2B5EF4-FFF2-40B4-BE49-F238E27FC236}">
+                <a16:creationId xmlns:a16="http://schemas.microsoft.com/office/drawing/2014/main" id="{2A24E586-B737-43CD-9410-9B7B599DB5E6}"/>
               </a:ext>
             </a:extLst>
           </p:cNvPr>
@@ -10948,10 +10954,10 @@
       </p:sp>
       <p:sp>
         <p:nvSpPr>
-          <p:cNvPr id="28" name="Shape 26">
-            <a:extLst>
-              <a:ext uri="{FF2B5EF4-FFF2-40B4-BE49-F238E27FC236}">
-                <a16:creationId xmlns:a16="http://schemas.microsoft.com/office/drawing/2014/main" id="{C1EB402B-5D07-41FD-A88B-C668B30929ED}"/>
+          <p:cNvPr id="67" name="Shape 26">
+            <a:extLst>
+              <a:ext uri="{FF2B5EF4-FFF2-40B4-BE49-F238E27FC236}">
+                <a16:creationId xmlns:a16="http://schemas.microsoft.com/office/drawing/2014/main" id="{E767105C-FE7D-D361-1E75-7B266D4ED118}"/>
               </a:ext>
             </a:extLst>
           </p:cNvPr>
@@ -10988,10 +10994,10 @@
       </p:sp>
       <p:sp>
         <p:nvSpPr>
-          <p:cNvPr id="29" name="Shape 27">
-            <a:extLst>
-              <a:ext uri="{FF2B5EF4-FFF2-40B4-BE49-F238E27FC236}">
-                <a16:creationId xmlns:a16="http://schemas.microsoft.com/office/drawing/2014/main" id="{CB31566B-19C9-48AC-A726-E822C5985068}"/>
+          <p:cNvPr id="68" name="Shape 27">
+            <a:extLst>
+              <a:ext uri="{FF2B5EF4-FFF2-40B4-BE49-F238E27FC236}">
+                <a16:creationId xmlns:a16="http://schemas.microsoft.com/office/drawing/2014/main" id="{B5487368-1117-220F-0E2A-5055BCFA807D}"/>
               </a:ext>
             </a:extLst>
           </p:cNvPr>
@@ -11021,10 +11027,10 @@
       </p:sp>
       <p:sp>
         <p:nvSpPr>
-          <p:cNvPr id="30" name="Text 28">
-            <a:extLst>
-              <a:ext uri="{FF2B5EF4-FFF2-40B4-BE49-F238E27FC236}">
-                <a16:creationId xmlns:a16="http://schemas.microsoft.com/office/drawing/2014/main" id="{576FE3D7-10A4-4179-9328-3F34C913B9ED}"/>
+          <p:cNvPr id="69" name="Text 28">
+            <a:extLst>
+              <a:ext uri="{FF2B5EF4-FFF2-40B4-BE49-F238E27FC236}">
+                <a16:creationId xmlns:a16="http://schemas.microsoft.com/office/drawing/2014/main" id="{018CC755-0E76-B3F1-F302-F5429326FAFF}"/>
               </a:ext>
             </a:extLst>
           </p:cNvPr>
@@ -11056,7 +11062,7 @@
                   <a:srgbClr val="FFFFFF"/>
                 </a:solidFill>
               </a:rPr>
-              <a:t>HOW TO USE THE OUTPUTS</a:t>
+              <a:t>USE CASE OUTCOME</a:t>
             </a:r>
             <a:endParaRPr sz="1100"/>
           </a:p>
@@ -11064,10 +11070,10 @@
       </p:sp>
       <p:sp>
         <p:nvSpPr>
-          <p:cNvPr id="31" name="Text 29">
-            <a:extLst>
-              <a:ext uri="{FF2B5EF4-FFF2-40B4-BE49-F238E27FC236}">
-                <a16:creationId xmlns:a16="http://schemas.microsoft.com/office/drawing/2014/main" id="{088C263C-A0CB-4982-A338-F3A1BB2F9F95}"/>
+          <p:cNvPr id="70" name="Text 29">
+            <a:extLst>
+              <a:ext uri="{FF2B5EF4-FFF2-40B4-BE49-F238E27FC236}">
+                <a16:creationId xmlns:a16="http://schemas.microsoft.com/office/drawing/2014/main" id="{7D4F3FEA-36B1-CD37-33EC-8AFF9A2B185B}"/>
               </a:ext>
             </a:extLst>
           </p:cNvPr>
@@ -11099,7 +11105,7 @@
                   <a:srgbClr val="2A9D61"/>
                 </a:solidFill>
               </a:rPr>
-              <a:t>Narrow broad areas first</a:t>
+              <a:t>A smaller search area</a:t>
             </a:r>
             <a:endParaRPr sz="800"/>
           </a:p>
@@ -11107,10 +11113,10 @@
       </p:sp>
       <p:sp>
         <p:nvSpPr>
-          <p:cNvPr id="32" name="Text 30">
-            <a:extLst>
-              <a:ext uri="{FF2B5EF4-FFF2-40B4-BE49-F238E27FC236}">
-                <a16:creationId xmlns:a16="http://schemas.microsoft.com/office/drawing/2014/main" id="{3591A679-B15E-406C-86A0-00F6CAE7220A}"/>
+          <p:cNvPr id="71" name="Text 30">
+            <a:extLst>
+              <a:ext uri="{FF2B5EF4-FFF2-40B4-BE49-F238E27FC236}">
+                <a16:creationId xmlns:a16="http://schemas.microsoft.com/office/drawing/2014/main" id="{AEF56BD3-A919-2AB3-B917-DDF115F5DA1D}"/>
               </a:ext>
             </a:extLst>
           </p:cNvPr>
@@ -11142,7 +11148,7 @@
                   <a:srgbClr val="1A2638"/>
                 </a:solidFill>
               </a:rPr>
-              <a:t>Use the maps to focus local research; the estimate compares cells, not individual properties.</a:t>
+              <a:t>The QGIS layers help decide where to investigate first.</a:t>
             </a:r>
             <a:endParaRPr sz="850"/>
           </a:p>
@@ -11150,10 +11156,10 @@
       </p:sp>
       <p:sp>
         <p:nvSpPr>
-          <p:cNvPr id="33" name="Shape 31">
-            <a:extLst>
-              <a:ext uri="{FF2B5EF4-FFF2-40B4-BE49-F238E27FC236}">
-                <a16:creationId xmlns:a16="http://schemas.microsoft.com/office/drawing/2014/main" id="{21F582AF-C78B-4E58-9B57-6833B74F7712}"/>
+          <p:cNvPr id="72" name="Shape 31">
+            <a:extLst>
+              <a:ext uri="{FF2B5EF4-FFF2-40B4-BE49-F238E27FC236}">
+                <a16:creationId xmlns:a16="http://schemas.microsoft.com/office/drawing/2014/main" id="{B21EFAC5-18BF-7EC7-FCA7-6D5743FCEF9F}"/>
               </a:ext>
             </a:extLst>
           </p:cNvPr>
@@ -11183,10 +11189,10 @@
       </p:sp>
       <p:sp>
         <p:nvSpPr>
-          <p:cNvPr id="34" name="Text 32">
-            <a:extLst>
-              <a:ext uri="{FF2B5EF4-FFF2-40B4-BE49-F238E27FC236}">
-                <a16:creationId xmlns:a16="http://schemas.microsoft.com/office/drawing/2014/main" id="{131D7657-5536-4C80-9B52-926E19C32495}"/>
+          <p:cNvPr id="73" name="Text 32">
+            <a:extLst>
+              <a:ext uri="{FF2B5EF4-FFF2-40B4-BE49-F238E27FC236}">
+                <a16:creationId xmlns:a16="http://schemas.microsoft.com/office/drawing/2014/main" id="{B56BD828-01DF-272F-8543-67D8E7206C89}"/>
               </a:ext>
             </a:extLst>
           </p:cNvPr>
@@ -11218,7 +11224,7 @@
                   <a:srgbClr val="1A2638"/>
                 </a:solidFill>
               </a:rPr>
-              <a:t>EVIDENCE STATUS</a:t>
+              <a:t>NOT A FINAL DECISION</a:t>
             </a:r>
             <a:endParaRPr sz="800"/>
           </a:p>
@@ -11226,10 +11232,10 @@
       </p:sp>
       <p:sp>
         <p:nvSpPr>
-          <p:cNvPr id="35" name="Text 33">
-            <a:extLst>
-              <a:ext uri="{FF2B5EF4-FFF2-40B4-BE49-F238E27FC236}">
-                <a16:creationId xmlns:a16="http://schemas.microsoft.com/office/drawing/2014/main" id="{555C2D91-F1C0-4C81-A522-273CE805D265}"/>
+          <p:cNvPr id="74" name="Text 33">
+            <a:extLst>
+              <a:ext uri="{FF2B5EF4-FFF2-40B4-BE49-F238E27FC236}">
+                <a16:creationId xmlns:a16="http://schemas.microsoft.com/office/drawing/2014/main" id="{7C7E5895-F34D-DA1E-E30A-C36D5D6775D9}"/>
               </a:ext>
             </a:extLst>
           </p:cNvPr>
@@ -11261,7 +11267,7 @@
                   <a:srgbClr val="2A9D61"/>
                 </a:solidFill>
               </a:rPr>
-              <a:t>2026 target-free estimate</a:t>
+              <a:t>Continue locally</a:t>
             </a:r>
             <a:endParaRPr sz="750"/>
           </a:p>
@@ -11269,10 +11275,10 @@
       </p:sp>
       <p:sp>
         <p:nvSpPr>
-          <p:cNvPr id="36" name="Text 34">
-            <a:extLst>
-              <a:ext uri="{FF2B5EF4-FFF2-40B4-BE49-F238E27FC236}">
-                <a16:creationId xmlns:a16="http://schemas.microsoft.com/office/drawing/2014/main" id="{348B69A9-A889-4CDD-892E-2DD982669C0A}"/>
+          <p:cNvPr id="75" name="Text 34">
+            <a:extLst>
+              <a:ext uri="{FF2B5EF4-FFF2-40B4-BE49-F238E27FC236}">
+                <a16:creationId xmlns:a16="http://schemas.microsoft.com/office/drawing/2014/main" id="{91730462-287D-DD99-AC73-8CDB97A5A7BD}"/>
               </a:ext>
             </a:extLst>
           </p:cNvPr>
@@ -11304,7 +11310,7 @@
                   <a:srgbClr val="C0392B"/>
                 </a:solidFill>
               </a:rPr>
-              <a:t>Evaluate it when the next ICNF outcome arrives.</a:t>
+              <a:t>The 1 km estimate cannot replace property-specific checks.</a:t>
             </a:r>
             <a:endParaRPr sz="750"/>
           </a:p>
@@ -11312,10 +11318,10 @@
       </p:sp>
       <p:sp>
         <p:nvSpPr>
-          <p:cNvPr id="37" name="Shape 35">
-            <a:extLst>
-              <a:ext uri="{FF2B5EF4-FFF2-40B4-BE49-F238E27FC236}">
-                <a16:creationId xmlns:a16="http://schemas.microsoft.com/office/drawing/2014/main" id="{1CF7DD12-EEE0-44CF-90BD-A5A6555384C9}"/>
+          <p:cNvPr id="76" name="Shape 35">
+            <a:extLst>
+              <a:ext uri="{FF2B5EF4-FFF2-40B4-BE49-F238E27FC236}">
+                <a16:creationId xmlns:a16="http://schemas.microsoft.com/office/drawing/2014/main" id="{EE052AFC-8FB4-ECF7-88CC-4487AE42F56C}"/>
               </a:ext>
             </a:extLst>
           </p:cNvPr>
@@ -11345,10 +11351,10 @@
       </p:sp>
       <p:sp>
         <p:nvSpPr>
-          <p:cNvPr id="38" name="Text 36">
-            <a:extLst>
-              <a:ext uri="{FF2B5EF4-FFF2-40B4-BE49-F238E27FC236}">
-                <a16:creationId xmlns:a16="http://schemas.microsoft.com/office/drawing/2014/main" id="{437652F4-0A68-4E8D-8FB1-0D1F3BBDF796}"/>
+          <p:cNvPr id="77" name="Text 36">
+            <a:extLst>
+              <a:ext uri="{FF2B5EF4-FFF2-40B4-BE49-F238E27FC236}">
+                <a16:creationId xmlns:a16="http://schemas.microsoft.com/office/drawing/2014/main" id="{C306DBE1-591D-91A0-2800-8563622FC938}"/>
               </a:ext>
             </a:extLst>
           </p:cNvPr>
@@ -11380,7 +11386,7 @@
                   <a:srgbClr val="E8A020"/>
                 </a:solidFill>
               </a:rPr>
-              <a:t>The project narrows the search area; local evidence completes the decision.</a:t>
+              <a:t>The model guides the research order; local evidence supports the final choice.</a:t>
             </a:r>
             <a:endParaRPr sz="850"/>
           </a:p>
@@ -11388,10 +11394,10 @@
       </p:sp>
       <p:sp>
         <p:nvSpPr>
-          <p:cNvPr id="39" name="Shape 37">
-            <a:extLst>
-              <a:ext uri="{FF2B5EF4-FFF2-40B4-BE49-F238E27FC236}">
-                <a16:creationId xmlns:a16="http://schemas.microsoft.com/office/drawing/2014/main" id="{49A759C5-57AB-43DF-B3F0-A2B8CCABD533}"/>
+          <p:cNvPr id="78" name="Shape 37">
+            <a:extLst>
+              <a:ext uri="{FF2B5EF4-FFF2-40B4-BE49-F238E27FC236}">
+                <a16:creationId xmlns:a16="http://schemas.microsoft.com/office/drawing/2014/main" id="{453F1B67-702E-243E-FB47-4CA2B5119EA1}"/>
               </a:ext>
             </a:extLst>
           </p:cNvPr>
@@ -11421,10 +11427,10 @@
       </p:sp>
       <p:sp>
         <p:nvSpPr>
-          <p:cNvPr id="40" name="Text 38">
-            <a:extLst>
-              <a:ext uri="{FF2B5EF4-FFF2-40B4-BE49-F238E27FC236}">
-                <a16:creationId xmlns:a16="http://schemas.microsoft.com/office/drawing/2014/main" id="{D0C3C7AC-0669-4B0F-BD8F-AB88AC487A35}"/>
+          <p:cNvPr id="79" name="Text 38">
+            <a:extLst>
+              <a:ext uri="{FF2B5EF4-FFF2-40B4-BE49-F238E27FC236}">
+                <a16:creationId xmlns:a16="http://schemas.microsoft.com/office/drawing/2014/main" id="{A5F23304-A068-58EC-920B-B28883DF7C8D}"/>
               </a:ext>
             </a:extLst>
           </p:cNvPr>

--- a/reports/presentation/wildfire_exposure_screening_capstone_final.pptx
+++ b/reports/presentation/wildfire_exposure_screening_capstone_final.pptx
@@ -339,16 +339,29 @@
           <a:p>
             <a:r>
               <a:rPr lang="en-US" dirty="0"/>
-              <a:t>“This project asks a practical location-research question: how can we compare broad areas of mainland Portugal using consistent wildfire evidence, rather than relying only on isolated past events or subjective impressions?</a:t>
-            </a:r>
-          </a:p>
-          <a:p>
+              <a:t>This project combines validated wildfire history, landscape, terrain, climate, GIS, and machine learning to compare broad areas of mainland Portugal, helping a user narrow a location search before conducting local and property-specific checks.</a:t>
+            </a:r>
+            <a:br>
+              <a:rPr lang="en-US" dirty="0"/>
+            </a:br>
             <a:endParaRPr lang="en-US" dirty="0"/>
           </a:p>
           <a:p>
             <a:r>
+              <a:rPr lang="en-US" b="1" dirty="0"/>
+              <a:t>Main message:</a:t>
+            </a:r>
+            <a:r>
               <a:rPr lang="en-US" dirty="0"/>
-              <a:t>I built a reproducible data-science workflow that combines GIS and machine learning. GIS provides the geographical structure: mainland Portugal is represented as consistent 1 km cells. Machine learning uses observed burned-area history together with landscape, terrain, and climate context to estimate the expected burned share for the following year.</a:t>
+              <a:t> The project helps </a:t>
+            </a:r>
+            <a:r>
+              <a:rPr lang="en-US" dirty="0" err="1"/>
+              <a:t>organise</a:t>
+            </a:r>
+            <a:r>
+              <a:rPr lang="en-US" dirty="0"/>
+              <a:t> broad location research; it does not decide whether to buy a property.</a:t>
             </a:r>
           </a:p>
           <a:p>
@@ -356,12 +369,27 @@
           </a:p>
           <a:p>
             <a:r>
+              <a:rPr lang="en-US" b="1" dirty="0"/>
+              <a:t>What to say:</a:t>
+            </a:r>
+            <a:endParaRPr lang="en-US" dirty="0"/>
+          </a:p>
+          <a:p>
+            <a:r>
               <a:rPr lang="en-US" dirty="0"/>
-              <a:t>The purpose is not to declare any location safe or unsafe, and it is not a property-level buying recommendation. Instead, it helps narrow a very broad search area into a smaller set of places that deserve more detailed local </a:t>
-            </a:r>
-            <a:r>
-              <a:rPr lang="en-US"/>
-              <a:t>investigation.</a:t>
+              <a:t>“People considering locations across mainland Portugal face a very broad search problem. Wildfire exposure is one factor that may matter, but it is difficult to compare areas fairly using isolated past fire events.</a:t>
+            </a:r>
+          </a:p>
+          <a:p>
+            <a:r>
+              <a:rPr lang="en-US" dirty="0"/>
+              <a:t>This capstone creates a reproducible GIS and machine-learning workflow for that first screening stage. It combines observed wildfire history, landscape, terrain, and climate information to compare 1 km areas across mainland Portugal.</a:t>
+            </a:r>
+          </a:p>
+          <a:p>
+            <a:r>
+              <a:rPr lang="en-US" dirty="0"/>
+              <a:t>The output is not a statement that an area is safe or unsafe, and it is not a buy-or-do-not-buy recommendation. Its purpose is to narrow a national search to areas that deserve more detailed local investigation.”</a:t>
             </a:r>
           </a:p>
           <a:p>
@@ -369,8 +397,12 @@
           </a:p>
           <a:p>
             <a:r>
+              <a:rPr lang="en-US" b="1" dirty="0"/>
+              <a:t>Transition:</a:t>
+            </a:r>
+            <a:r>
               <a:rPr lang="en-US" dirty="0"/>
-              <a:t>The project produces three complementary kinds of evidence: observed historical fire recurrence, landscape and official structural-hazard context, and a comparative 2026 estimate based on data available through 2025. After this broad screening step, a user should still investigate local planning rules, access, insurance, vegetation management, terrain, and the individual property itself.”</a:t>
+              <a:t> “To make those comparisons fair, I first needed one consistent unit of analysis and clearly defined source roles.”</a:t>
             </a:r>
           </a:p>
           <a:p>
@@ -462,31 +494,77 @@
           <a:lstStyle/>
           <a:p>
             <a:r>
-              <a:t>Each record represents one mainland Portugal 1 km × 1 km cell in predictor year T. Its target is the burned share observed in T+1—the proportion of the cell’s land area covered by burned-area polygons.</a:t>
-            </a:r>
-            <a:br/>
-            <a:endParaRPr/>
-          </a:p>
-          <a:p>
-            <a:r>
-              <a:t>ICNF supplies observed fire history and outcomes. Copernicus CLC and DEM provide land-cover and terrain context. ERA5-Land supplies T-only warm-season climate context.</a:t>
-            </a:r>
-            <a:br/>
-            <a:endParaRPr/>
-          </a:p>
-          <a:p>
-            <a:r>
-              <a:t>The 2 km area is an outward context buffer around each 1 km cell, not a second grid. ERA5-Land values come from the coarse climate grid without interpolation or downscaling.</a:t>
-            </a:r>
-            <a:br/>
-            <a:endParaRPr/>
-          </a:p>
-          <a:p>
-            <a:r>
+              <a:rPr lang="en-US" b="1" dirty="0"/>
+              <a:t>Main message:</a:t>
+            </a:r>
+            <a:r>
+              <a:rPr lang="en-US" dirty="0"/>
+              <a:t> Every record has the same geographical meaning: one 1 km mainland cell in one predictor year.</a:t>
+            </a:r>
+            <a:br>
+              <a:rPr lang="en-US" dirty="0"/>
+            </a:br>
+            <a:endParaRPr lang="en-US" dirty="0"/>
+          </a:p>
+          <a:p>
+            <a:r>
+              <a:rPr lang="en-US" b="1" dirty="0"/>
+              <a:t>What to say:</a:t>
+            </a:r>
+            <a:endParaRPr lang="en-US" dirty="0"/>
+          </a:p>
+          <a:p>
+            <a:r>
+              <a:rPr lang="en-US" dirty="0"/>
+              <a:t>“Each row in the analytical dataset represents one 1 km by 1 km mainland Portugal cell in a predictor year, T. This makes it possible to compare the same geographical unit over time.</a:t>
+            </a:r>
+          </a:p>
+          <a:p>
+            <a:r>
+              <a:rPr lang="en-US" dirty="0"/>
+              <a:t>ICNF annual burned-area data provides two roles: historical fire recurrence and the observed next-year outcome. The outcome is continuous burned share: the proportion of the cell’s land area that burned in the following year.</a:t>
+            </a:r>
+          </a:p>
+          <a:p>
+            <a:r>
+              <a:rPr lang="en-US" dirty="0"/>
+              <a:t>CLC land cover and Copernicus DEM provide landscape and terrain context. ERA5-Land provides warm-season temperature, precipitation, and shallow soil-water conditions from the predictor year only.</a:t>
+            </a:r>
+          </a:p>
+          <a:p>
+            <a:r>
+              <a:rPr lang="en-US" dirty="0"/>
+              <a:t>The 2 km area is not a second grid. It is an outward context buffer around each 1 km cell, used to measure nearby forest/shrub, slope, and historical fire recurrence.”</a:t>
+            </a:r>
+            <a:br>
+              <a:rPr lang="en-US" dirty="0"/>
+            </a:br>
+            <a:endParaRPr lang="en-US" dirty="0"/>
+          </a:p>
+          <a:p>
+            <a:r>
+              <a:rPr lang="en-US" b="1" dirty="0"/>
+              <a:t>Transition:</a:t>
+            </a:r>
+            <a:r>
+              <a:rPr lang="en-US" dirty="0"/>
+              <a:t> “With that common structure, the first result is that wildfire history is not evenly distributed across the country.”</a:t>
+            </a:r>
+            <a:br>
+              <a:rPr lang="en-US" dirty="0"/>
+            </a:br>
+            <a:endParaRPr lang="en-US" dirty="0"/>
+          </a:p>
+          <a:p>
+            <a:r>
+              <a:rPr dirty="0"/>
               <a:t>[Sources]</a:t>
             </a:r>
-            <a:br/>
-            <a:r>
+            <a:br>
+              <a:rPr dirty="0"/>
+            </a:br>
+            <a:r>
+              <a:rPr dirty="0"/>
               <a:t>docs/data_dictionary.md; reports/validation/canonical_full_scope_readiness.md</a:t>
             </a:r>
           </a:p>
@@ -564,83 +642,98 @@
           <a:lstStyle/>
           <a:p>
             <a:r>
-              <a:t>This slode shows observed historical evidence, official ICNF planning of burns and 2026 prediction.</a:t>
-            </a:r>
-          </a:p>
-          <a:p>
-            <a:r>
-              <a:t>Each 1 km cell is coloured by the number of distinct burned years from 2016–2025 within its mainland-masked 2 km context.</a:t>
-            </a:r>
-          </a:p>
-          <a:p>
-            <a:endParaRPr/>
-          </a:p>
-          <a:p>
-            <a:r>
-              <a:t>The three comparison layers should be read separately:</a:t>
-            </a:r>
-          </a:p>
-          <a:p>
-            <a:pPr>
-              <a:buFont typeface="Arial"/>
-              <a:buChar char="•"/>
-            </a:pPr>
-            <a:r>
-              <a:rPr b="1"/>
-              <a:t>Historical recurrence:</a:t>
-            </a:r>
-            <a:r>
-              <a:t> what was observed to burn.</a:t>
-            </a:r>
-          </a:p>
-          <a:p>
-            <a:pPr>
-              <a:buFont typeface="Arial"/>
-              <a:buChar char="•"/>
-            </a:pPr>
-            <a:r>
-              <a:rPr b="1"/>
-              <a:t>Official ICNF structural hazard:</a:t>
-            </a:r>
-            <a:r>
-              <a:t> an independent classification of underlying landscape hazard conditions.</a:t>
-            </a:r>
-          </a:p>
-          <a:p>
-            <a:pPr>
-              <a:buFont typeface="Arial"/>
-              <a:buChar char="•"/>
-            </a:pPr>
-            <a:r>
-              <a:rPr b="1"/>
-              <a:t>2026 estimated comparative exposure:</a:t>
-            </a:r>
-            <a:r>
-              <a:t> the model’s target-free cell-level estimate based on predictor data.</a:t>
-            </a:r>
-          </a:p>
-          <a:p>
-            <a:pPr>
-              <a:buFont typeface="Arial"/>
-              <a:buChar char="•"/>
-            </a:pPr>
-            <a:endParaRPr/>
-          </a:p>
-          <a:p>
-            <a:r>
+              <a:rPr lang="en-US" b="1" dirty="0"/>
+              <a:t>Main message:</a:t>
+            </a:r>
+            <a:r>
+              <a:rPr lang="en-US" dirty="0"/>
+              <a:t> Wildfire exposure patterns vary geographically, so a national location search can be narrowed using comparative evidence.</a:t>
+            </a:r>
+            <a:endParaRPr dirty="0"/>
+          </a:p>
+          <a:p>
+            <a:r>
+              <a:rPr dirty="0"/>
               <a:t>These layers provide different types of evidence and should not be added together or interpreted as one score. The comparison helps identify broad areas for further investigation; it does not certify a location.</a:t>
             </a:r>
-          </a:p>
-          <a:p>
-            <a:endParaRPr/>
-          </a:p>
-          <a:p>
-            <a:r>
+            <a:br>
+              <a:rPr lang="en-US" dirty="0"/>
+            </a:br>
+            <a:br>
+              <a:rPr lang="en-US" dirty="0"/>
+            </a:br>
+            <a:r>
+              <a:rPr lang="en-US" b="1" dirty="0"/>
+              <a:t>What to say:</a:t>
+            </a:r>
+            <a:endParaRPr lang="en-US" dirty="0"/>
+          </a:p>
+          <a:p>
+            <a:r>
+              <a:rPr lang="en-US" dirty="0"/>
+              <a:t>“This slide shows three different views of the same national geography.</a:t>
+            </a:r>
+          </a:p>
+          <a:p>
+            <a:r>
+              <a:rPr lang="en-US" dirty="0"/>
+              <a:t>The first map shows observed historical recurrence: how many distinct years had burned-area evidence between 2016 and 2025 within the 2 km context around each 1 km cell.</a:t>
+            </a:r>
+          </a:p>
+          <a:p>
+            <a:r>
+              <a:rPr lang="en-US" dirty="0"/>
+              <a:t>The second map is the ICNF and official Portuguese government map showing where the landscape has more or less underlying potential to support severe wildfire conditions. It describes persistent landscape hazard conditions rather than what burned in one particular year.</a:t>
+            </a:r>
+          </a:p>
+          <a:p>
+            <a:r>
+              <a:rPr lang="en-US" dirty="0"/>
+              <a:t>The third map is the project’s 2026 comparative estimate. It uses information available through 2025 to rank 1 km cells by estimated next-year burned share.</a:t>
+            </a:r>
+          </a:p>
+          <a:p>
+            <a:r>
+              <a:rPr lang="en-US" dirty="0"/>
+              <a:t>These maps should not be added together into one score. They provide different evidence for comparing broad areas and deciding where additional research is worthwhile.”</a:t>
+            </a:r>
+          </a:p>
+          <a:p>
+            <a:endParaRPr lang="en-US" dirty="0"/>
+          </a:p>
+          <a:p>
+            <a:r>
+              <a:rPr lang="en-US" b="1" dirty="0"/>
+              <a:t>Transition:</a:t>
+            </a:r>
+            <a:r>
+              <a:rPr lang="en-US" dirty="0"/>
+              <a:t> “Because historical recurrence and official structural hazard measure different things, the next question is why it is useful to compare them.”</a:t>
+            </a:r>
+            <a:endParaRPr dirty="0"/>
+          </a:p>
+          <a:p>
+            <a:endParaRPr dirty="0"/>
+          </a:p>
+          <a:p>
+            <a:r>
+              <a:rPr dirty="0"/>
               <a:t>[Sources]</a:t>
             </a:r>
-            <a:br/>
-            <a:r>
-              <a:t>reports/figures/historical_wildfire_exposure_screening_mainland_portugal.png; reports/validation/historical_exposure_screening_and_icnf_comparison.md; qgis/README.md; reports/validation/operational_forecast_2026_validation.md</a:t>
+            <a:br>
+              <a:rPr dirty="0"/>
+            </a:br>
+            <a:r>
+              <a:rPr dirty="0"/>
+              <a:t>reports/figures/historical_wildfire_exposure_screening_mainland_portugal.png; reports/validation/historical_exposure_screening_and_icnf_comparison.md; </a:t>
+            </a:r>
+            <a:r>
+              <a:rPr dirty="0" err="1"/>
+              <a:t>qgis</a:t>
+            </a:r>
+            <a:r>
+              <a:rPr dirty="0"/>
+              <a:t>/README.md; reports/validation/operational_forecast_2026_validation.md</a:t>
             </a:r>
           </a:p>
         </p:txBody>
@@ -717,44 +810,79 @@
           <a:lstStyle/>
           <a:p>
             <a:r>
-              <a:t>Use these speaker notes for Slide 4:</a:t>
-            </a:r>
-          </a:p>
-          <a:p>
-            <a:r>
-              <a:t>This slide compares two different types of wildfire evidence. Historical recurrence records what actually burned during 2016–2025, counting distinct burned years within the 2 km context around each 1 km cell.</a:t>
-            </a:r>
-            <a:br/>
-            <a:endParaRPr/>
-          </a:p>
-          <a:p>
-            <a:r>
-              <a:t>The official ICNF structural-hazard layer describes relatively persistent landscape conditions associated with wildfire hazard. Its original 25 m classes were summarised to the predominant class in each 1 km cell. It is an official reference layer, not a forecast and not the project’s ML output.</a:t>
-            </a:r>
-            <a:br/>
-            <a:endParaRPr/>
-          </a:p>
-          <a:p>
-            <a:r>
-              <a:t>The story is not that one layer is correct and the other is wrong. They answer different questions and use different methods. Areas where they agree provide consistent context; areas where they differ show where further investigation may be useful.</a:t>
-            </a:r>
-            <a:br/>
-            <a:endParaRPr/>
-          </a:p>
-          <a:p>
-            <a:r>
-              <a:t>The comparison is descriptive only. It is not a model-accuracy test, a buyer threshold or a certification of any location.</a:t>
-            </a:r>
-            <a:br/>
-            <a:endParaRPr/>
-          </a:p>
-          <a:p>
-            <a:r>
+              <a:rPr lang="en-US" b="1" dirty="0"/>
+              <a:t>Main message:</a:t>
+            </a:r>
+            <a:r>
+              <a:rPr lang="en-US" dirty="0"/>
+              <a:t> Observed recurrence and official structural hazard are complementary, not competing, evidence layers.</a:t>
+            </a:r>
+          </a:p>
+          <a:p>
+            <a:endParaRPr lang="en-US" dirty="0"/>
+          </a:p>
+          <a:p>
+            <a:r>
+              <a:rPr lang="en-US" b="1" dirty="0"/>
+              <a:t>What to say:</a:t>
+            </a:r>
+            <a:endParaRPr lang="en-US" dirty="0"/>
+          </a:p>
+          <a:p>
+            <a:r>
+              <a:rPr lang="en-US" dirty="0"/>
+              <a:t>“Historical recurrence answers: ‘What burned repeatedly in the observed 2016–2025 period?’ It is based on annual burned-area records.</a:t>
+            </a:r>
+          </a:p>
+          <a:p>
+            <a:r>
+              <a:rPr lang="en-US" dirty="0"/>
+              <a:t>Official ICNF structural hazard answers a different question: ‘What persistent landscape conditions are associated with wildfire hazard?’ Its source is an official 25 m classification, summarized here to the predominant class for each 1 km cell.</a:t>
+            </a:r>
+          </a:p>
+          <a:p>
+            <a:r>
+              <a:rPr lang="en-US" dirty="0"/>
+              <a:t>Where the layers agree, they provide consistent broad-area context. Where they differ, they identify areas where the historical record and structural landscape conditions tell a more nuanced story.</a:t>
+            </a:r>
+          </a:p>
+          <a:p>
+            <a:r>
+              <a:rPr lang="en-US" dirty="0"/>
+              <a:t>This comparison is descriptive. It is not a model-accuracy test, and neither layer is a threshold for deciding whether a particular property is acceptable.”</a:t>
+            </a:r>
+          </a:p>
+          <a:p>
+            <a:endParaRPr lang="en-US" dirty="0"/>
+          </a:p>
+          <a:p>
+            <a:r>
+              <a:rPr lang="en-US" b="1" dirty="0"/>
+              <a:t>Transition:</a:t>
+            </a:r>
+            <a:r>
+              <a:rPr lang="en-US" dirty="0"/>
+              <a:t> “Historical context is useful, but I also tested whether a data-driven model could improve next-year comparative estimates.”</a:t>
+            </a:r>
+          </a:p>
+          <a:p>
+            <a:endParaRPr dirty="0"/>
+          </a:p>
+          <a:p>
+            <a:r>
+              <a:rPr dirty="0"/>
               <a:t>[Sources]</a:t>
             </a:r>
-            <a:br/>
-            <a:r>
-              <a:t>qgis/README.md; docs/data_dictionary.md; reports/figures/historical_exposure_by_icnf_structural_hazard_crosstab.png</a:t>
+            <a:br>
+              <a:rPr dirty="0"/>
+            </a:br>
+            <a:r>
+              <a:rPr dirty="0" err="1"/>
+              <a:t>qgis</a:t>
+            </a:r>
+            <a:r>
+              <a:rPr dirty="0"/>
+              <a:t>/README.md; docs/data_dictionary.md; reports/figures/historical_exposure_by_icnf_structural_hazard_crosstab.png</a:t>
             </a:r>
           </a:p>
         </p:txBody>
@@ -831,131 +959,194 @@
           <a:lstStyle/>
           <a:p>
             <a:r>
-              <a:t>This slide compares the transparent historical-recurrence baseline with the nine-feature two-part regression model.</a:t>
-            </a:r>
-          </a:p>
-          <a:p>
-            <a:r>
-              <a:t>The baseline is a project-specific benchmark, not a library model. It groups training records by the number of previously burned years in the 2 km context and calculates the average next-year burned share for each group.</a:t>
-            </a:r>
-          </a:p>
-          <a:p>
-            <a:endParaRPr/>
-          </a:p>
-          <a:p>
-            <a:r>
-              <a:t>The nine-feature model uses scikit-learn’s HistGradientBoosting algorithms. One component handles whether burning is expected; the other estimates how much of the cell may burn when burning occurs. Together, they produce one continuous burned-share estimate for the following year.</a:t>
-            </a:r>
-          </a:p>
-          <a:p>
-            <a:r>
-              <a:t>The table shows the frozen final temporal comparison. The arrows run from the historical baseline to the nine-feature model. MAE measures average burned-share error; RMSE gives more weight to larger errors.</a:t>
-            </a:r>
-          </a:p>
-          <a:p>
-            <a:endParaRPr/>
-          </a:p>
-          <a:p>
-            <a:r>
-              <a:t>Yes, that makes sense. Use explicit predictor and outcome years:</a:t>
-            </a:r>
-          </a:p>
-          <a:p>
-            <a:r>
-              <a:rPr b="1"/>
+              <a:rPr lang="en-US" b="1" dirty="0"/>
+              <a:t>Main message:</a:t>
+            </a:r>
+            <a:r>
+              <a:rPr lang="en-US" dirty="0"/>
+              <a:t> The nine-feature two-stage regression modestly improves useful comparative diagnostics over historical recurrence alone, while extreme events remain difficult.</a:t>
+            </a:r>
+          </a:p>
+          <a:p>
+            <a:endParaRPr lang="en-US" dirty="0"/>
+          </a:p>
+          <a:p>
+            <a:r>
+              <a:rPr lang="en-US" b="1" dirty="0"/>
+              <a:t>What to say:</a:t>
+            </a:r>
+            <a:endParaRPr lang="en-US" dirty="0"/>
+          </a:p>
+          <a:p>
+            <a:r>
+              <a:rPr lang="en-US" dirty="0"/>
+              <a:t>“This slide compares two approaches using the held-out final period: predictor years 2022–2024 and observed outcomes 2023–2025.</a:t>
+            </a:r>
+          </a:p>
+          <a:p>
+            <a:r>
+              <a:rPr lang="en-US" dirty="0"/>
+              <a:t>The historical-recurrence baseline is a transparent project benchmark. It groups training records by the number of previously burned years in the 2 km context and uses the training-period average next-year burned share for each group. It is not a library model.</a:t>
+            </a:r>
+          </a:p>
+          <a:p>
+            <a:r>
+              <a:rPr lang="en-US" dirty="0"/>
+              <a:t>The nine-feature two-stage regression uses </a:t>
+            </a:r>
+            <a:r>
+              <a:rPr lang="en-US" dirty="0" err="1"/>
+              <a:t>HistGradientBoosting</a:t>
+            </a:r>
+            <a:r>
+              <a:rPr lang="en-US" dirty="0"/>
+              <a:t>. First, it estimates whether burning is expected in a cell. Second, when burning is expected, it estimates how much of the cell’s land area may burn. The two parts are combined into one continuous estimated burned share.</a:t>
+            </a:r>
+          </a:p>
+          <a:p>
+            <a:r>
+              <a:rPr lang="en-US" dirty="0"/>
+              <a:t>The model lowers MAE from 0.029 to 0.021 and improves Capture@20% from 0.482 to 0.500. RMSE remains approximately the same, at 0.111, which tells us that larger and more extreme fire outcomes are still difficult to estimate accurately.</a:t>
+            </a:r>
+          </a:p>
+          <a:p>
+            <a:endParaRPr lang="en-US" dirty="0"/>
+          </a:p>
+          <a:p>
+            <a:r>
+              <a:rPr lang="en-US" dirty="0"/>
+              <a:t>Capture@20% is not a buyer threshold. For example, using 2024 data, the model ranks cells for expected 2025 burned share. We then check how much of the actual 2025 burned area occurred within the 20% highest-ranked cells. It measures ranking usefulness, not the proportion of land that burned.”</a:t>
+            </a:r>
+          </a:p>
+          <a:p>
+            <a:endParaRPr lang="en-US" dirty="0"/>
+          </a:p>
+          <a:p>
+            <a:r>
+              <a:rPr lang="en-US" b="1" dirty="0"/>
+              <a:t>Transition:</a:t>
+            </a:r>
+            <a:r>
+              <a:rPr lang="en-US" dirty="0"/>
+              <a:t> “So the practical question becomes: how should someone use this evidence responsibly?”</a:t>
+            </a:r>
+          </a:p>
+          <a:p>
+            <a:br>
+              <a:rPr lang="en-US" b="1" dirty="0"/>
+            </a:br>
+            <a:r>
+              <a:rPr b="1" dirty="0"/>
               <a:t>Capture@20% is a validation test of the ranking.</a:t>
             </a:r>
             <a:r>
+              <a:rPr dirty="0"/>
               <a:t> For each predictor year, the model ranks cells using data from year </a:t>
             </a:r>
             <a:r>
-              <a:rPr b="1"/>
+              <a:rPr b="1" dirty="0"/>
               <a:t>T</a:t>
             </a:r>
             <a:r>
+              <a:rPr dirty="0"/>
               <a:t> and estimates burned share for </a:t>
             </a:r>
             <a:r>
-              <a:rPr b="1"/>
+              <a:rPr b="1" dirty="0"/>
               <a:t>T+1</a:t>
             </a:r>
             <a:r>
+              <a:rPr dirty="0"/>
               <a:t>. For example, for </a:t>
             </a:r>
             <a:r>
-              <a:rPr b="1"/>
+              <a:rPr b="1" dirty="0"/>
               <a:t>T = 2024</a:t>
             </a:r>
             <a:r>
+              <a:rPr dirty="0"/>
               <a:t>, it ranks cells using 2024 predictor data and is later checked against the actual ICNF burned areas observed in </a:t>
             </a:r>
             <a:r>
-              <a:rPr b="1"/>
+              <a:rPr b="1" dirty="0"/>
               <a:t>2025</a:t>
             </a:r>
             <a:r>
+              <a:rPr dirty="0"/>
               <a:t>.</a:t>
             </a:r>
           </a:p>
           <a:p>
             <a:r>
+              <a:rPr dirty="0"/>
               <a:t>The final evaluation covers the year pairs </a:t>
             </a:r>
             <a:r>
-              <a:rPr b="1"/>
+              <a:rPr b="1" dirty="0"/>
               <a:t>2022→2023, 2023→2024 and 2024→2025</a:t>
             </a:r>
             <a:r>
+              <a:rPr dirty="0"/>
               <a:t>. For each pair, we select the highest-scored 20% of cells and measure how much of the burned share observed in </a:t>
             </a:r>
             <a:r>
-              <a:rPr b="1"/>
+              <a:rPr b="1" dirty="0"/>
               <a:t>T+1</a:t>
             </a:r>
             <a:r>
+              <a:rPr dirty="0"/>
               <a:t> occurred in those cells.</a:t>
             </a:r>
           </a:p>
           <a:p>
             <a:r>
+              <a:rPr dirty="0"/>
               <a:t>Across the final test, the historical baseline captured </a:t>
             </a:r>
             <a:r>
-              <a:rPr b="1"/>
+              <a:rPr b="1" dirty="0"/>
               <a:t>48.2%</a:t>
             </a:r>
             <a:r>
+              <a:rPr dirty="0"/>
               <a:t> of observed burned share in its top-ranked 20% of cells. The nine-feature model captured </a:t>
             </a:r>
             <a:r>
-              <a:rPr b="1"/>
+              <a:rPr b="1" dirty="0"/>
               <a:t>50.0%</a:t>
             </a:r>
             <a:r>
+              <a:rPr dirty="0"/>
               <a:t>.</a:t>
             </a:r>
           </a:p>
           <a:p>
             <a:r>
+              <a:rPr dirty="0"/>
               <a:t>This does not mean that 20% of the land burned. It is only a retrospective ranking diagnostic. In a future cycle, the same logic would apply to </a:t>
             </a:r>
             <a:r>
-              <a:rPr b="1"/>
+              <a:rPr b="1" dirty="0"/>
               <a:t>2035→2036</a:t>
             </a:r>
             <a:r>
+              <a:rPr dirty="0"/>
               <a:t>, but only after the 2036 outcome data became available.</a:t>
             </a:r>
           </a:p>
           <a:p>
-            <a:endParaRPr/>
-          </a:p>
-          <a:p>
-            <a:r>
+            <a:endParaRPr dirty="0"/>
+          </a:p>
+          <a:p>
+            <a:r>
+              <a:rPr dirty="0"/>
               <a:t>[Sources]</a:t>
             </a:r>
-            <a:br/>
-            <a:r>
+            <a:br>
+              <a:rPr dirty="0"/>
+            </a:br>
+            <a:r>
+              <a:rPr dirty="0"/>
               <a:t>reports/validation/model_final_decision.md; reports/figures/model_final_test_metric_comparison.png</a:t>
             </a:r>
           </a:p>
@@ -1033,20 +1224,80 @@
           <a:lstStyle/>
           <a:p>
             <a:r>
-              <a:t>Use a simple scenario: a prospective buyer is considering several broad areas in mainland Portugal. Start with the 2026 comparative estimate, which compares 1 km cells using 2025 predictor inputs. Then read historical recurrence and the official ICNF structural-hazard layer alongside it; the three layers provide separate context rather than one combined score. The result is a shorter list of broad areas to visit and investigate. Local planning, access, insurance, terrain and property-specific evidence still support the final choice.</a:t>
-            </a:r>
-          </a:p>
-          <a:p>
-            <a:endParaRPr/>
-          </a:p>
-          <a:p>
-            <a:r>
+              <a:rPr lang="en-US" b="1" dirty="0"/>
+              <a:t>Main message:</a:t>
+            </a:r>
+            <a:r>
+              <a:rPr lang="en-US" dirty="0"/>
+              <a:t> The output supports shortlisting broad areas, not choosing a property.</a:t>
+            </a:r>
+          </a:p>
+          <a:p>
+            <a:endParaRPr lang="en-US" dirty="0"/>
+          </a:p>
+          <a:p>
+            <a:r>
+              <a:rPr lang="en-US" b="1" dirty="0"/>
+              <a:t>What to say:</a:t>
+            </a:r>
+            <a:endParaRPr lang="en-US" dirty="0"/>
+          </a:p>
+          <a:p>
+            <a:r>
+              <a:rPr lang="en-US" dirty="0"/>
+              <a:t>“Imagine a buyer considering multiple regions across mainland Portugal.</a:t>
+            </a:r>
+          </a:p>
+          <a:p>
+            <a:r>
+              <a:rPr lang="en-US" dirty="0"/>
+              <a:t>They begin with the 2026 comparative estimate to compare broad 1 km areas using 2025 predictor inputs. They then look alongside it at observed historical recurrence and the official ICNF structural-hazard layer.</a:t>
+            </a:r>
+          </a:p>
+          <a:p>
+            <a:r>
+              <a:rPr lang="en-US" dirty="0"/>
+              <a:t>The result is not a chosen property. It is a smaller, more structured set of broad areas for further research, site visits, and local checks.”</a:t>
+            </a:r>
+          </a:p>
+          <a:p>
+            <a:endParaRPr lang="en-US" dirty="0"/>
+          </a:p>
+          <a:p>
+            <a:r>
+              <a:rPr lang="en-US" b="1" dirty="0"/>
+              <a:t>Transition:</a:t>
+            </a:r>
+            <a:r>
+              <a:rPr lang="en-US" dirty="0"/>
+              <a:t> “The next slide explains the two safeguards that keep this use case responsible.”</a:t>
+            </a:r>
+          </a:p>
+          <a:p>
+            <a:endParaRPr dirty="0"/>
+          </a:p>
+          <a:p>
+            <a:r>
+              <a:rPr dirty="0"/>
               <a:t>[Sources]</a:t>
             </a:r>
           </a:p>
           <a:p>
             <a:r>
-              <a:t>qgis/wildfire_exposure_screening_portugal_2026.qgz; qgis/README.md; reports/validation/operational_forecast_2026_validation.md</a:t>
+              <a:rPr dirty="0" err="1"/>
+              <a:t>qgis</a:t>
+            </a:r>
+            <a:r>
+              <a:rPr dirty="0"/>
+              <a:t>/wildfire_exposure_screening_portugal_2026.qgz; </a:t>
+            </a:r>
+            <a:r>
+              <a:rPr dirty="0" err="1"/>
+              <a:t>qgis</a:t>
+            </a:r>
+            <a:r>
+              <a:rPr dirty="0"/>
+              <a:t>/README.md; reports/validation/operational_forecast_2026_validation.md</a:t>
             </a:r>
           </a:p>
         </p:txBody>
@@ -1123,20 +1374,72 @@
           <a:lstStyle/>
           <a:p>
             <a:r>
-              <a:t>This slide gives the two recommendations that follow the use case. First, compare the three separate layers before shortlisting: the 2026 comparative estimate, observed recurrence and the official structural-hazard reference. Second, once broad areas are shortlisted, verify them with local and property-specific evidence. The annual update cycle belongs on the conclusion slide, so this slide stays focused on responsible use.</a:t>
-            </a:r>
-          </a:p>
-          <a:p>
-            <a:endParaRPr/>
-          </a:p>
-          <a:p>
-            <a:r>
+              <a:rPr lang="en-US" b="1" dirty="0"/>
+              <a:t>Main message:</a:t>
+            </a:r>
+            <a:r>
+              <a:rPr lang="en-US" dirty="0"/>
+              <a:t> Compare layers first; then replace broad evidence with local evidence.</a:t>
+            </a:r>
+          </a:p>
+          <a:p>
+            <a:endParaRPr lang="en-US" dirty="0"/>
+          </a:p>
+          <a:p>
+            <a:r>
+              <a:rPr lang="en-US" b="1" dirty="0"/>
+              <a:t>What to say:</a:t>
+            </a:r>
+            <a:endParaRPr lang="en-US" dirty="0"/>
+          </a:p>
+          <a:p>
+            <a:r>
+              <a:rPr lang="en-US" dirty="0"/>
+              <a:t>“The first recommendation is to compare the three layers separately: the 2026 comparative estimate, observed historical recurrence, and official ICNF structural hazard. They answer different questions, so they should not be merged into a single score.</a:t>
+            </a:r>
+          </a:p>
+          <a:p>
+            <a:r>
+              <a:rPr lang="en-US" dirty="0"/>
+              <a:t>The second recommendation is local verification. Once an area is shortlisted, the decision should use planning restrictions, access and evacuation conditions, insurance, vegetation management, terrain, infrastructure, and property-specific information.</a:t>
+            </a:r>
+          </a:p>
+          <a:p>
+            <a:r>
+              <a:rPr lang="en-US" dirty="0"/>
+              <a:t>The model helps direct research effort. It does not replace local investigation or certify a location.”</a:t>
+            </a:r>
+          </a:p>
+          <a:p>
+            <a:endParaRPr lang="en-US" dirty="0"/>
+          </a:p>
+          <a:p>
+            <a:r>
+              <a:rPr lang="en-US" b="1" dirty="0"/>
+              <a:t>Transition:</a:t>
+            </a:r>
+            <a:r>
+              <a:rPr lang="en-US" dirty="0"/>
+              <a:t> “Finally, the value of the project is not only one 2026 map -it is a repeatable annual workflow.”</a:t>
+            </a:r>
+          </a:p>
+          <a:p>
+            <a:endParaRPr dirty="0"/>
+          </a:p>
+          <a:p>
+            <a:r>
+              <a:rPr dirty="0"/>
               <a:t>[Sources]</a:t>
             </a:r>
           </a:p>
           <a:p>
             <a:r>
-              <a:t>qgis/README.md; docs/data_dictionary.md; reports/validation/historical_exposure_screening_and_icnf_comparison.md</a:t>
+              <a:rPr dirty="0" err="1"/>
+              <a:t>qgis</a:t>
+            </a:r>
+            <a:r>
+              <a:rPr dirty="0"/>
+              <a:t>/README.md; docs/data_dictionary.md; reports/validation/historical_exposure_screening_and_icnf_comparison.md</a:t>
             </a:r>
           </a:p>
         </p:txBody>
@@ -1213,19 +1516,60 @@
           <a:lstStyle/>
           <a:p>
             <a:r>
-              <a:t>Close with three points. First, the project delivers a reproducible national workflow that combines data science, machine learning and GIS. Second, historical recurrence, official structural hazard and the model each contribute different evidence; the model gives a modest improvement over the historical baseline but extreme years remain difficult. Third, the practical use is to narrow broad location-search areas before detailed local research. The next project step is an annual refresh: once new completed-year inputs and the observed 2026 outcome are available, rerun the fixed workflow and evaluate the 2026 estimate.</a:t>
-            </a:r>
-          </a:p>
-          <a:p>
-            <a:endParaRPr/>
-          </a:p>
-          <a:p>
-            <a:r>
+              <a:rPr lang="en-US" b="1" dirty="0"/>
+              <a:t>Main message:</a:t>
+            </a:r>
+            <a:r>
+              <a:rPr lang="en-US" dirty="0"/>
+              <a:t> The project is successful as a reproducible comparative screening workflow with explicit limitations and an annual refresh path.</a:t>
+            </a:r>
+          </a:p>
+          <a:p>
+            <a:endParaRPr lang="en-US" dirty="0"/>
+          </a:p>
+          <a:p>
+            <a:r>
+              <a:rPr lang="en-US" b="1" dirty="0"/>
+              <a:t>What to say:</a:t>
+            </a:r>
+            <a:endParaRPr lang="en-US" dirty="0"/>
+          </a:p>
+          <a:p>
+            <a:r>
+              <a:rPr lang="en-US" dirty="0"/>
+              <a:t>“This project delivered a reproducible national workflow: validated source data, a consistent 1 km grid, GIS outputs, historical evidence layers, and a tested nine-feature machine-learning model.</a:t>
+            </a:r>
+          </a:p>
+          <a:p>
+            <a:r>
+              <a:rPr lang="en-US" dirty="0"/>
+              <a:t>The model provides a modest improvement over historical recurrence alone for selected comparative diagnostics. At the same time, the evaluation shows that extreme fire outcomes remain difficult, so the output must remain a cautious broad-area estimate.</a:t>
+            </a:r>
+          </a:p>
+          <a:p>
+            <a:r>
+              <a:rPr lang="en-US" dirty="0"/>
+              <a:t>The practical result is a more focused location search. The annual next step is straightforward: when completed-year source data and the observed outcome for the prior estimate become available, rerun the fixed workflow, evaluate that estimate, and produce the next annual comparative layer.</a:t>
+            </a:r>
+          </a:p>
+          <a:p>
+            <a:r>
+              <a:rPr lang="en-US" dirty="0"/>
+              <a:t>The project therefore provides a repeatable evidence process—not a final property decision.”</a:t>
+            </a:r>
+          </a:p>
+          <a:p>
+            <a:endParaRPr dirty="0"/>
+          </a:p>
+          <a:p>
+            <a:r>
+              <a:rPr dirty="0"/>
               <a:t>[Sources]</a:t>
             </a:r>
           </a:p>
           <a:p>
             <a:r>
+              <a:rPr dirty="0"/>
               <a:t>README.md; reports/validation/model_final_decision.md; reports/validation/operational_forecast_readiness.md</a:t>
             </a:r>
           </a:p>
@@ -4212,14 +4556,52 @@
               <a:buNone/>
             </a:pPr>
             <a:r>
-              <a:rPr sz="1100" b="1">
+              <a:rPr sz="1100" b="1" dirty="0">
                 <a:solidFill>
                   <a:srgbClr val="E8A020"/>
                 </a:solidFill>
               </a:rPr>
-              <a:t>KEY FINDING 1</a:t>
-            </a:r>
-            <a:endParaRPr sz="1100"/>
+              <a:t>KEY </a:t>
+            </a:r>
+            <a:r>
+              <a:rPr lang="en-US" sz="1100" b="1" dirty="0">
+                <a:solidFill>
+                  <a:srgbClr val="E8A020"/>
+                </a:solidFill>
+              </a:rPr>
+              <a:t>FINDING</a:t>
+            </a:r>
+            <a:r>
+              <a:rPr sz="1100" b="1" dirty="0">
+                <a:solidFill>
+                  <a:srgbClr val="E8A020"/>
+                </a:solidFill>
+              </a:rPr>
+              <a:t> 1</a:t>
+            </a:r>
+            <a:endParaRPr lang="en-US" sz="1100" b="1" dirty="0">
+              <a:solidFill>
+                <a:srgbClr val="E8A020"/>
+              </a:solidFill>
+            </a:endParaRPr>
+          </a:p>
+          <a:p>
+            <a:pPr marL="0" indent="0">
+              <a:buNone/>
+            </a:pPr>
+            <a:r>
+              <a:rPr lang="en-US" sz="1000" dirty="0">
+                <a:solidFill>
+                  <a:schemeClr val="accent6"/>
+                </a:solidFill>
+              </a:rPr>
+              <a:t>observed history and 2026 comparative estimate</a:t>
+            </a:r>
+            <a:endParaRPr sz="1000" dirty="0">
+              <a:solidFill>
+                <a:schemeClr val="accent6"/>
+              </a:solidFill>
+            </a:endParaRPr>
           </a:p>
         </p:txBody>
       </p:sp>
@@ -4306,955 +4688,6 @@
               <a:t>Historical wildfire recurrence is uneven across mainland Portugal (left map)</a:t>
             </a:r>
             <a:endParaRPr sz="1600"/>
-          </a:p>
-        </p:txBody>
-      </p:sp>
-      <p:sp>
-        <p:nvSpPr>
-          <p:cNvPr id="8" name="Shape 6">
-            <a:extLst>
-              <a:ext uri="{FF2B5EF4-FFF2-40B4-BE49-F238E27FC236}">
-                <a16:creationId xmlns:a16="http://schemas.microsoft.com/office/drawing/2014/main" id="{021BB8D3-723F-4991-A475-17320C3772BC}"/>
-              </a:ext>
-            </a:extLst>
-          </p:cNvPr>
-          <p:cNvSpPr>
-            <a:spLocks noGrp="1"/>
-          </p:cNvSpPr>
-          <p:nvPr/>
-        </p:nvSpPr>
-        <p:spPr>
-          <a:xfrm>
-            <a:off x="274320" y="1298448"/>
-            <a:ext cx="8595360" cy="749808"/>
-          </a:xfrm>
-          <a:prstGeom prst="rect">
-            <a:avLst/>
-          </a:prstGeom>
-          <a:solidFill>
-            <a:srgbClr val="FDE8E8"/>
-          </a:solidFill>
-          <a:ln w="12700">
-            <a:solidFill>
-              <a:srgbClr val="C0392B"/>
-            </a:solidFill>
-            <a:prstDash val="solid"/>
-          </a:ln>
-        </p:spPr>
-      </p:sp>
-      <p:sp>
-        <p:nvSpPr>
-          <p:cNvPr id="9" name="Shape 7">
-            <a:extLst>
-              <a:ext uri="{FF2B5EF4-FFF2-40B4-BE49-F238E27FC236}">
-                <a16:creationId xmlns:a16="http://schemas.microsoft.com/office/drawing/2014/main" id="{B4EBC4C6-D447-4B5F-9E95-5E50F6C0F1DC}"/>
-              </a:ext>
-            </a:extLst>
-          </p:cNvPr>
-          <p:cNvSpPr>
-            <a:spLocks noGrp="1"/>
-          </p:cNvSpPr>
-          <p:nvPr/>
-        </p:nvSpPr>
-        <p:spPr>
-          <a:xfrm>
-            <a:off x="274320" y="1298448"/>
-            <a:ext cx="128016" cy="749808"/>
-          </a:xfrm>
-          <a:prstGeom prst="rect">
-            <a:avLst/>
-          </a:prstGeom>
-          <a:solidFill>
-            <a:srgbClr val="C0392B"/>
-          </a:solidFill>
-          <a:ln w="12700">
-            <a:solidFill>
-              <a:srgbClr val="C0392B"/>
-            </a:solidFill>
-            <a:prstDash val="solid"/>
-          </a:ln>
-        </p:spPr>
-      </p:sp>
-      <p:sp>
-        <p:nvSpPr>
-          <p:cNvPr id="10" name="Text 8">
-            <a:extLst>
-              <a:ext uri="{FF2B5EF4-FFF2-40B4-BE49-F238E27FC236}">
-                <a16:creationId xmlns:a16="http://schemas.microsoft.com/office/drawing/2014/main" id="{AF3F9A90-A64A-44E4-8B61-269E127D3AC6}"/>
-              </a:ext>
-            </a:extLst>
-          </p:cNvPr>
-          <p:cNvSpPr>
-            <a:spLocks noGrp="1"/>
-          </p:cNvSpPr>
-          <p:nvPr/>
-        </p:nvSpPr>
-        <p:spPr>
-          <a:xfrm>
-            <a:off x="475488" y="1298448"/>
-            <a:ext cx="411480" cy="749808"/>
-          </a:xfrm>
-          <a:prstGeom prst="rect">
-            <a:avLst/>
-          </a:prstGeom>
-          <a:noFill/>
-        </p:spPr>
-        <p:txBody>
-          <a:bodyPr wrap="square" lIns="0" tIns="0" rIns="0" bIns="0" anchor="ctr"/>
-          <a:lstStyle/>
-          <a:p>
-            <a:pPr marL="0" indent="0" algn="ctr">
-              <a:buNone/>
-            </a:pPr>
-            <a:r>
-              <a:rPr sz="1800" b="1">
-                <a:solidFill>
-                  <a:srgbClr val="C0392B"/>
-                </a:solidFill>
-              </a:rPr>
-              <a:t>01</a:t>
-            </a:r>
-            <a:endParaRPr sz="1800"/>
-          </a:p>
-        </p:txBody>
-      </p:sp>
-      <p:sp>
-        <p:nvSpPr>
-          <p:cNvPr id="11" name="Text 9">
-            <a:extLst>
-              <a:ext uri="{FF2B5EF4-FFF2-40B4-BE49-F238E27FC236}">
-                <a16:creationId xmlns:a16="http://schemas.microsoft.com/office/drawing/2014/main" id="{EECD7901-FF1F-4AD5-BD05-D2EAF149B834}"/>
-              </a:ext>
-            </a:extLst>
-          </p:cNvPr>
-          <p:cNvSpPr>
-            <a:spLocks noGrp="1"/>
-          </p:cNvSpPr>
-          <p:nvPr/>
-        </p:nvSpPr>
-        <p:spPr>
-          <a:xfrm>
-            <a:off x="932688" y="1353312"/>
-            <a:ext cx="4114800" cy="310896"/>
-          </a:xfrm>
-          <a:prstGeom prst="rect">
-            <a:avLst/>
-          </a:prstGeom>
-          <a:noFill/>
-        </p:spPr>
-        <p:txBody>
-          <a:bodyPr wrap="square" lIns="0" tIns="0" rIns="0" bIns="0" anchor="ctr"/>
-          <a:lstStyle/>
-          <a:p>
-            <a:pPr marL="0" indent="0">
-              <a:buNone/>
-            </a:pPr>
-            <a:r>
-              <a:rPr sz="1000" b="1">
-                <a:solidFill>
-                  <a:srgbClr val="1A2638"/>
-                </a:solidFill>
-              </a:rPr>
-              <a:t>Reading the slides out loud</a:t>
-            </a:r>
-            <a:endParaRPr sz="1000"/>
-          </a:p>
-        </p:txBody>
-      </p:sp>
-      <p:sp>
-        <p:nvSpPr>
-          <p:cNvPr id="12" name="Text 10">
-            <a:extLst>
-              <a:ext uri="{FF2B5EF4-FFF2-40B4-BE49-F238E27FC236}">
-                <a16:creationId xmlns:a16="http://schemas.microsoft.com/office/drawing/2014/main" id="{99D47A8B-8774-4620-BDFB-D07CF55F8ABB}"/>
-              </a:ext>
-            </a:extLst>
-          </p:cNvPr>
-          <p:cNvSpPr>
-            <a:spLocks noGrp="1"/>
-          </p:cNvSpPr>
-          <p:nvPr/>
-        </p:nvSpPr>
-        <p:spPr>
-          <a:xfrm>
-            <a:off x="932688" y="1664208"/>
-            <a:ext cx="7772400" cy="347472"/>
-          </a:xfrm>
-          <a:prstGeom prst="rect">
-            <a:avLst/>
-          </a:prstGeom>
-          <a:noFill/>
-        </p:spPr>
-        <p:txBody>
-          <a:bodyPr wrap="square" lIns="0" tIns="0" rIns="0" bIns="0" anchor="t"/>
-          <a:lstStyle/>
-          <a:p>
-            <a:pPr marL="0" indent="0">
-              <a:buNone/>
-            </a:pPr>
-            <a:r>
-              <a:rPr sz="850" b="1">
-                <a:solidFill>
-                  <a:srgbClr val="C0392B"/>
-                </a:solidFill>
-              </a:rPr>
-              <a:t>Fix: </a:t>
-            </a:r>
-            <a:r>
-              <a:rPr sz="850">
-                <a:solidFill>
-                  <a:srgbClr val="1A2638"/>
-                </a:solidFill>
-              </a:rPr>
-              <a:t>Your slides show the chart. You explain what it means. Script: "This chart shows X — what's interesting is Y, because Z."</a:t>
-            </a:r>
-            <a:endParaRPr sz="850"/>
-          </a:p>
-        </p:txBody>
-      </p:sp>
-      <p:sp>
-        <p:nvSpPr>
-          <p:cNvPr id="13" name="Shape 11">
-            <a:extLst>
-              <a:ext uri="{FF2B5EF4-FFF2-40B4-BE49-F238E27FC236}">
-                <a16:creationId xmlns:a16="http://schemas.microsoft.com/office/drawing/2014/main" id="{9AF904D4-1953-4361-98CD-B6C1318DAD13}"/>
-              </a:ext>
-            </a:extLst>
-          </p:cNvPr>
-          <p:cNvSpPr>
-            <a:spLocks noGrp="1"/>
-          </p:cNvSpPr>
-          <p:nvPr/>
-        </p:nvSpPr>
-        <p:spPr>
-          <a:xfrm>
-            <a:off x="274320" y="2121408"/>
-            <a:ext cx="8595360" cy="749808"/>
-          </a:xfrm>
-          <a:prstGeom prst="rect">
-            <a:avLst/>
-          </a:prstGeom>
-          <a:solidFill>
-            <a:srgbClr val="FEF3E2"/>
-          </a:solidFill>
-          <a:ln w="12700">
-            <a:solidFill>
-              <a:srgbClr val="E67E22"/>
-            </a:solidFill>
-            <a:prstDash val="solid"/>
-          </a:ln>
-        </p:spPr>
-      </p:sp>
-      <p:sp>
-        <p:nvSpPr>
-          <p:cNvPr id="14" name="Shape 12">
-            <a:extLst>
-              <a:ext uri="{FF2B5EF4-FFF2-40B4-BE49-F238E27FC236}">
-                <a16:creationId xmlns:a16="http://schemas.microsoft.com/office/drawing/2014/main" id="{26F18261-0B59-40F2-909D-5E0D887A7F2D}"/>
-              </a:ext>
-            </a:extLst>
-          </p:cNvPr>
-          <p:cNvSpPr>
-            <a:spLocks noGrp="1"/>
-          </p:cNvSpPr>
-          <p:nvPr/>
-        </p:nvSpPr>
-        <p:spPr>
-          <a:xfrm>
-            <a:off x="274320" y="2121408"/>
-            <a:ext cx="128016" cy="749808"/>
-          </a:xfrm>
-          <a:prstGeom prst="rect">
-            <a:avLst/>
-          </a:prstGeom>
-          <a:solidFill>
-            <a:srgbClr val="E67E22"/>
-          </a:solidFill>
-          <a:ln w="12700">
-            <a:solidFill>
-              <a:srgbClr val="E67E22"/>
-            </a:solidFill>
-            <a:prstDash val="solid"/>
-          </a:ln>
-        </p:spPr>
-      </p:sp>
-      <p:sp>
-        <p:nvSpPr>
-          <p:cNvPr id="15" name="Text 13">
-            <a:extLst>
-              <a:ext uri="{FF2B5EF4-FFF2-40B4-BE49-F238E27FC236}">
-                <a16:creationId xmlns:a16="http://schemas.microsoft.com/office/drawing/2014/main" id="{324C7072-A5D1-41E5-AF09-50C809B5F6AC}"/>
-              </a:ext>
-            </a:extLst>
-          </p:cNvPr>
-          <p:cNvSpPr>
-            <a:spLocks noGrp="1"/>
-          </p:cNvSpPr>
-          <p:nvPr/>
-        </p:nvSpPr>
-        <p:spPr>
-          <a:xfrm>
-            <a:off x="475488" y="2121408"/>
-            <a:ext cx="411480" cy="749808"/>
-          </a:xfrm>
-          <a:prstGeom prst="rect">
-            <a:avLst/>
-          </a:prstGeom>
-          <a:noFill/>
-        </p:spPr>
-        <p:txBody>
-          <a:bodyPr wrap="square" lIns="0" tIns="0" rIns="0" bIns="0" anchor="ctr"/>
-          <a:lstStyle/>
-          <a:p>
-            <a:pPr marL="0" indent="0" algn="ctr">
-              <a:buNone/>
-            </a:pPr>
-            <a:r>
-              <a:rPr sz="1800" b="1">
-                <a:solidFill>
-                  <a:srgbClr val="E67E22"/>
-                </a:solidFill>
-              </a:rPr>
-              <a:t>02</a:t>
-            </a:r>
-            <a:endParaRPr sz="1800"/>
-          </a:p>
-        </p:txBody>
-      </p:sp>
-      <p:sp>
-        <p:nvSpPr>
-          <p:cNvPr id="16" name="Text 14">
-            <a:extLst>
-              <a:ext uri="{FF2B5EF4-FFF2-40B4-BE49-F238E27FC236}">
-                <a16:creationId xmlns:a16="http://schemas.microsoft.com/office/drawing/2014/main" id="{A194C2BB-26D7-41F8-99E2-0E08561EB4B3}"/>
-              </a:ext>
-            </a:extLst>
-          </p:cNvPr>
-          <p:cNvSpPr>
-            <a:spLocks noGrp="1"/>
-          </p:cNvSpPr>
-          <p:nvPr/>
-        </p:nvSpPr>
-        <p:spPr>
-          <a:xfrm>
-            <a:off x="932688" y="2176272"/>
-            <a:ext cx="4114800" cy="310896"/>
-          </a:xfrm>
-          <a:prstGeom prst="rect">
-            <a:avLst/>
-          </a:prstGeom>
-          <a:noFill/>
-        </p:spPr>
-        <p:txBody>
-          <a:bodyPr wrap="square" lIns="0" tIns="0" rIns="0" bIns="0" anchor="ctr"/>
-          <a:lstStyle/>
-          <a:p>
-            <a:pPr marL="0" indent="0">
-              <a:buNone/>
-            </a:pPr>
-            <a:r>
-              <a:rPr sz="1000" b="1">
-                <a:solidFill>
-                  <a:srgbClr val="1A2638"/>
-                </a:solidFill>
-              </a:rPr>
-              <a:t>Too many charts, not enough story</a:t>
-            </a:r>
-            <a:endParaRPr sz="1000"/>
-          </a:p>
-        </p:txBody>
-      </p:sp>
-      <p:sp>
-        <p:nvSpPr>
-          <p:cNvPr id="17" name="Text 15">
-            <a:extLst>
-              <a:ext uri="{FF2B5EF4-FFF2-40B4-BE49-F238E27FC236}">
-                <a16:creationId xmlns:a16="http://schemas.microsoft.com/office/drawing/2014/main" id="{E04F7CD5-4B32-4EC8-B1FA-B54C12F261F5}"/>
-              </a:ext>
-            </a:extLst>
-          </p:cNvPr>
-          <p:cNvSpPr>
-            <a:spLocks noGrp="1"/>
-          </p:cNvSpPr>
-          <p:nvPr/>
-        </p:nvSpPr>
-        <p:spPr>
-          <a:xfrm>
-            <a:off x="932688" y="2487168"/>
-            <a:ext cx="7772400" cy="347472"/>
-          </a:xfrm>
-          <a:prstGeom prst="rect">
-            <a:avLst/>
-          </a:prstGeom>
-          <a:noFill/>
-        </p:spPr>
-        <p:txBody>
-          <a:bodyPr wrap="square" lIns="0" tIns="0" rIns="0" bIns="0" anchor="t"/>
-          <a:lstStyle/>
-          <a:p>
-            <a:pPr marL="0" indent="0">
-              <a:buNone/>
-            </a:pPr>
-            <a:r>
-              <a:rPr sz="850" b="1">
-                <a:solidFill>
-                  <a:srgbClr val="E67E22"/>
-                </a:solidFill>
-              </a:rPr>
-              <a:t>Fix: </a:t>
-            </a:r>
-            <a:r>
-              <a:rPr sz="850">
-                <a:solidFill>
-                  <a:srgbClr val="1A2638"/>
-                </a:solidFill>
-              </a:rPr>
-              <a:t>Max 1 chart per slide. Ask: does removing this chart break the argument? If not, cut it.</a:t>
-            </a:r>
-            <a:endParaRPr sz="850"/>
-          </a:p>
-        </p:txBody>
-      </p:sp>
-      <p:sp>
-        <p:nvSpPr>
-          <p:cNvPr id="18" name="Shape 16">
-            <a:extLst>
-              <a:ext uri="{FF2B5EF4-FFF2-40B4-BE49-F238E27FC236}">
-                <a16:creationId xmlns:a16="http://schemas.microsoft.com/office/drawing/2014/main" id="{35666D60-5174-46D3-A3BC-CBDD5C36493C}"/>
-              </a:ext>
-            </a:extLst>
-          </p:cNvPr>
-          <p:cNvSpPr>
-            <a:spLocks noGrp="1"/>
-          </p:cNvSpPr>
-          <p:nvPr/>
-        </p:nvSpPr>
-        <p:spPr>
-          <a:xfrm>
-            <a:off x="274320" y="2944368"/>
-            <a:ext cx="8595360" cy="749808"/>
-          </a:xfrm>
-          <a:prstGeom prst="rect">
-            <a:avLst/>
-          </a:prstGeom>
-          <a:solidFill>
-            <a:srgbClr val="EBF0FD"/>
-          </a:solidFill>
-          <a:ln w="12700">
-            <a:solidFill>
-              <a:srgbClr val="2E6DB4"/>
-            </a:solidFill>
-            <a:prstDash val="solid"/>
-          </a:ln>
-        </p:spPr>
-      </p:sp>
-      <p:sp>
-        <p:nvSpPr>
-          <p:cNvPr id="19" name="Shape 17">
-            <a:extLst>
-              <a:ext uri="{FF2B5EF4-FFF2-40B4-BE49-F238E27FC236}">
-                <a16:creationId xmlns:a16="http://schemas.microsoft.com/office/drawing/2014/main" id="{4CEC4C53-0577-45FB-8EDC-DA224AD08FAD}"/>
-              </a:ext>
-            </a:extLst>
-          </p:cNvPr>
-          <p:cNvSpPr>
-            <a:spLocks noGrp="1"/>
-          </p:cNvSpPr>
-          <p:nvPr/>
-        </p:nvSpPr>
-        <p:spPr>
-          <a:xfrm>
-            <a:off x="274320" y="2944368"/>
-            <a:ext cx="128016" cy="749808"/>
-          </a:xfrm>
-          <a:prstGeom prst="rect">
-            <a:avLst/>
-          </a:prstGeom>
-          <a:solidFill>
-            <a:srgbClr val="2E6DB4"/>
-          </a:solidFill>
-          <a:ln w="12700">
-            <a:solidFill>
-              <a:srgbClr val="2E6DB4"/>
-            </a:solidFill>
-            <a:prstDash val="solid"/>
-          </a:ln>
-        </p:spPr>
-      </p:sp>
-      <p:sp>
-        <p:nvSpPr>
-          <p:cNvPr id="20" name="Text 18">
-            <a:extLst>
-              <a:ext uri="{FF2B5EF4-FFF2-40B4-BE49-F238E27FC236}">
-                <a16:creationId xmlns:a16="http://schemas.microsoft.com/office/drawing/2014/main" id="{59F80E8F-8BB5-41D6-83D6-61200F38318E}"/>
-              </a:ext>
-            </a:extLst>
-          </p:cNvPr>
-          <p:cNvSpPr>
-            <a:spLocks noGrp="1"/>
-          </p:cNvSpPr>
-          <p:nvPr/>
-        </p:nvSpPr>
-        <p:spPr>
-          <a:xfrm>
-            <a:off x="475488" y="2944368"/>
-            <a:ext cx="411480" cy="749808"/>
-          </a:xfrm>
-          <a:prstGeom prst="rect">
-            <a:avLst/>
-          </a:prstGeom>
-          <a:noFill/>
-        </p:spPr>
-        <p:txBody>
-          <a:bodyPr wrap="square" lIns="0" tIns="0" rIns="0" bIns="0" anchor="ctr"/>
-          <a:lstStyle/>
-          <a:p>
-            <a:pPr marL="0" indent="0" algn="ctr">
-              <a:buNone/>
-            </a:pPr>
-            <a:r>
-              <a:rPr sz="1800" b="1">
-                <a:solidFill>
-                  <a:srgbClr val="2E6DB4"/>
-                </a:solidFill>
-              </a:rPr>
-              <a:t>03</a:t>
-            </a:r>
-            <a:endParaRPr sz="1800"/>
-          </a:p>
-        </p:txBody>
-      </p:sp>
-      <p:sp>
-        <p:nvSpPr>
-          <p:cNvPr id="21" name="Text 19">
-            <a:extLst>
-              <a:ext uri="{FF2B5EF4-FFF2-40B4-BE49-F238E27FC236}">
-                <a16:creationId xmlns:a16="http://schemas.microsoft.com/office/drawing/2014/main" id="{96F4D743-7166-4C64-ACF2-234AB2EC7C8C}"/>
-              </a:ext>
-            </a:extLst>
-          </p:cNvPr>
-          <p:cNvSpPr>
-            <a:spLocks noGrp="1"/>
-          </p:cNvSpPr>
-          <p:nvPr/>
-        </p:nvSpPr>
-        <p:spPr>
-          <a:xfrm>
-            <a:off x="932688" y="2999232"/>
-            <a:ext cx="4114800" cy="310896"/>
-          </a:xfrm>
-          <a:prstGeom prst="rect">
-            <a:avLst/>
-          </a:prstGeom>
-          <a:noFill/>
-        </p:spPr>
-        <p:txBody>
-          <a:bodyPr wrap="square" lIns="0" tIns="0" rIns="0" bIns="0" anchor="ctr"/>
-          <a:lstStyle/>
-          <a:p>
-            <a:pPr marL="0" indent="0">
-              <a:buNone/>
-            </a:pPr>
-            <a:r>
-              <a:rPr sz="1000" b="1">
-                <a:solidFill>
-                  <a:srgbClr val="1A2638"/>
-                </a:solidFill>
-              </a:rPr>
-              <a:t>Data without context</a:t>
-            </a:r>
-            <a:endParaRPr sz="1000"/>
-          </a:p>
-        </p:txBody>
-      </p:sp>
-      <p:sp>
-        <p:nvSpPr>
-          <p:cNvPr id="22" name="Text 20">
-            <a:extLst>
-              <a:ext uri="{FF2B5EF4-FFF2-40B4-BE49-F238E27FC236}">
-                <a16:creationId xmlns:a16="http://schemas.microsoft.com/office/drawing/2014/main" id="{3D3590A5-0038-4FF2-9E08-71324661CCA1}"/>
-              </a:ext>
-            </a:extLst>
-          </p:cNvPr>
-          <p:cNvSpPr>
-            <a:spLocks noGrp="1"/>
-          </p:cNvSpPr>
-          <p:nvPr/>
-        </p:nvSpPr>
-        <p:spPr>
-          <a:xfrm>
-            <a:off x="932688" y="3310128"/>
-            <a:ext cx="7772400" cy="347472"/>
-          </a:xfrm>
-          <a:prstGeom prst="rect">
-            <a:avLst/>
-          </a:prstGeom>
-          <a:noFill/>
-        </p:spPr>
-        <p:txBody>
-          <a:bodyPr wrap="square" lIns="0" tIns="0" rIns="0" bIns="0" anchor="t"/>
-          <a:lstStyle/>
-          <a:p>
-            <a:pPr marL="0" indent="0">
-              <a:buNone/>
-            </a:pPr>
-            <a:r>
-              <a:rPr sz="850" b="1">
-                <a:solidFill>
-                  <a:srgbClr val="2E6DB4"/>
-                </a:solidFill>
-              </a:rPr>
-              <a:t>Fix: </a:t>
-            </a:r>
-            <a:r>
-              <a:rPr sz="850">
-                <a:solidFill>
-                  <a:srgbClr val="1A2638"/>
-                </a:solidFill>
-              </a:rPr>
-              <a:t>Always say what the number means relative to something. "€1,847 average" means nothing. "€1,847 — 3x higher than online courses" means something.</a:t>
-            </a:r>
-            <a:endParaRPr sz="850"/>
-          </a:p>
-        </p:txBody>
-      </p:sp>
-      <p:sp>
-        <p:nvSpPr>
-          <p:cNvPr id="23" name="Shape 21">
-            <a:extLst>
-              <a:ext uri="{FF2B5EF4-FFF2-40B4-BE49-F238E27FC236}">
-                <a16:creationId xmlns:a16="http://schemas.microsoft.com/office/drawing/2014/main" id="{DF6DDFBC-DA0D-4E16-8419-87C24D8B083F}"/>
-              </a:ext>
-            </a:extLst>
-          </p:cNvPr>
-          <p:cNvSpPr>
-            <a:spLocks noGrp="1"/>
-          </p:cNvSpPr>
-          <p:nvPr/>
-        </p:nvSpPr>
-        <p:spPr>
-          <a:xfrm>
-            <a:off x="274320" y="3767328"/>
-            <a:ext cx="8595360" cy="749808"/>
-          </a:xfrm>
-          <a:prstGeom prst="rect">
-            <a:avLst/>
-          </a:prstGeom>
-          <a:solidFill>
-            <a:srgbClr val="F3E8F7"/>
-          </a:solidFill>
-          <a:ln w="12700">
-            <a:solidFill>
-              <a:srgbClr val="7B2D8B"/>
-            </a:solidFill>
-            <a:prstDash val="solid"/>
-          </a:ln>
-        </p:spPr>
-      </p:sp>
-      <p:sp>
-        <p:nvSpPr>
-          <p:cNvPr id="24" name="Shape 22">
-            <a:extLst>
-              <a:ext uri="{FF2B5EF4-FFF2-40B4-BE49-F238E27FC236}">
-                <a16:creationId xmlns:a16="http://schemas.microsoft.com/office/drawing/2014/main" id="{4B71F646-FDF1-472F-894C-B09E4E53D18F}"/>
-              </a:ext>
-            </a:extLst>
-          </p:cNvPr>
-          <p:cNvSpPr>
-            <a:spLocks noGrp="1"/>
-          </p:cNvSpPr>
-          <p:nvPr/>
-        </p:nvSpPr>
-        <p:spPr>
-          <a:xfrm>
-            <a:off x="274320" y="3767328"/>
-            <a:ext cx="128016" cy="749808"/>
-          </a:xfrm>
-          <a:prstGeom prst="rect">
-            <a:avLst/>
-          </a:prstGeom>
-          <a:solidFill>
-            <a:srgbClr val="7B2D8B"/>
-          </a:solidFill>
-          <a:ln w="12700">
-            <a:solidFill>
-              <a:srgbClr val="7B2D8B"/>
-            </a:solidFill>
-            <a:prstDash val="solid"/>
-          </a:ln>
-        </p:spPr>
-      </p:sp>
-      <p:sp>
-        <p:nvSpPr>
-          <p:cNvPr id="25" name="Text 23">
-            <a:extLst>
-              <a:ext uri="{FF2B5EF4-FFF2-40B4-BE49-F238E27FC236}">
-                <a16:creationId xmlns:a16="http://schemas.microsoft.com/office/drawing/2014/main" id="{3001E16E-E869-4684-B29F-D534238B7E05}"/>
-              </a:ext>
-            </a:extLst>
-          </p:cNvPr>
-          <p:cNvSpPr>
-            <a:spLocks noGrp="1"/>
-          </p:cNvSpPr>
-          <p:nvPr/>
-        </p:nvSpPr>
-        <p:spPr>
-          <a:xfrm>
-            <a:off x="475488" y="3767328"/>
-            <a:ext cx="411480" cy="749808"/>
-          </a:xfrm>
-          <a:prstGeom prst="rect">
-            <a:avLst/>
-          </a:prstGeom>
-          <a:noFill/>
-        </p:spPr>
-        <p:txBody>
-          <a:bodyPr wrap="square" lIns="0" tIns="0" rIns="0" bIns="0" anchor="ctr"/>
-          <a:lstStyle/>
-          <a:p>
-            <a:pPr marL="0" indent="0" algn="ctr">
-              <a:buNone/>
-            </a:pPr>
-            <a:r>
-              <a:rPr sz="1800" b="1">
-                <a:solidFill>
-                  <a:srgbClr val="7B2D8B"/>
-                </a:solidFill>
-              </a:rPr>
-              <a:t>04</a:t>
-            </a:r>
-            <a:endParaRPr sz="1800"/>
-          </a:p>
-        </p:txBody>
-      </p:sp>
-      <p:sp>
-        <p:nvSpPr>
-          <p:cNvPr id="26" name="Text 24">
-            <a:extLst>
-              <a:ext uri="{FF2B5EF4-FFF2-40B4-BE49-F238E27FC236}">
-                <a16:creationId xmlns:a16="http://schemas.microsoft.com/office/drawing/2014/main" id="{142521F6-A952-4571-99D0-D1B95A87A2CF}"/>
-              </a:ext>
-            </a:extLst>
-          </p:cNvPr>
-          <p:cNvSpPr>
-            <a:spLocks noGrp="1"/>
-          </p:cNvSpPr>
-          <p:nvPr/>
-        </p:nvSpPr>
-        <p:spPr>
-          <a:xfrm>
-            <a:off x="932688" y="3822192"/>
-            <a:ext cx="4114800" cy="310896"/>
-          </a:xfrm>
-          <a:prstGeom prst="rect">
-            <a:avLst/>
-          </a:prstGeom>
-          <a:noFill/>
-        </p:spPr>
-        <p:txBody>
-          <a:bodyPr wrap="square" lIns="0" tIns="0" rIns="0" bIns="0" anchor="ctr"/>
-          <a:lstStyle/>
-          <a:p>
-            <a:pPr marL="0" indent="0">
-              <a:buNone/>
-            </a:pPr>
-            <a:r>
-              <a:rPr sz="1000" b="1">
-                <a:solidFill>
-                  <a:srgbClr val="1A2638"/>
-                </a:solidFill>
-              </a:rPr>
-              <a:t>Weak conclusions</a:t>
-            </a:r>
-            <a:endParaRPr sz="1000"/>
-          </a:p>
-        </p:txBody>
-      </p:sp>
-      <p:sp>
-        <p:nvSpPr>
-          <p:cNvPr id="27" name="Text 25">
-            <a:extLst>
-              <a:ext uri="{FF2B5EF4-FFF2-40B4-BE49-F238E27FC236}">
-                <a16:creationId xmlns:a16="http://schemas.microsoft.com/office/drawing/2014/main" id="{1DE35A4F-5401-4E71-BF6E-CE246A9E00A6}"/>
-              </a:ext>
-            </a:extLst>
-          </p:cNvPr>
-          <p:cNvSpPr>
-            <a:spLocks noGrp="1"/>
-          </p:cNvSpPr>
-          <p:nvPr/>
-        </p:nvSpPr>
-        <p:spPr>
-          <a:xfrm>
-            <a:off x="932688" y="4133088"/>
-            <a:ext cx="7772400" cy="347472"/>
-          </a:xfrm>
-          <a:prstGeom prst="rect">
-            <a:avLst/>
-          </a:prstGeom>
-          <a:noFill/>
-        </p:spPr>
-        <p:txBody>
-          <a:bodyPr wrap="square" lIns="0" tIns="0" rIns="0" bIns="0" anchor="t"/>
-          <a:lstStyle/>
-          <a:p>
-            <a:pPr marL="0" indent="0">
-              <a:buNone/>
-            </a:pPr>
-            <a:r>
-              <a:rPr sz="850" b="1">
-                <a:solidFill>
-                  <a:srgbClr val="7B2D8B"/>
-                </a:solidFill>
-              </a:rPr>
-              <a:t>Fix: </a:t>
-            </a:r>
-            <a:r>
-              <a:rPr sz="850">
-                <a:solidFill>
-                  <a:srgbClr val="1A2638"/>
-                </a:solidFill>
-              </a:rPr>
-              <a:t>Ban "in conclusion, more research may be needed." Replace with: "We recommend X. The data supports this because Y."</a:t>
-            </a:r>
-            <a:endParaRPr sz="850"/>
-          </a:p>
-        </p:txBody>
-      </p:sp>
-      <p:sp>
-        <p:nvSpPr>
-          <p:cNvPr id="30" name="Text 28">
-            <a:extLst>
-              <a:ext uri="{FF2B5EF4-FFF2-40B4-BE49-F238E27FC236}">
-                <a16:creationId xmlns:a16="http://schemas.microsoft.com/office/drawing/2014/main" id="{57800076-1163-4370-A185-DB36BF86952B}"/>
-              </a:ext>
-            </a:extLst>
-          </p:cNvPr>
-          <p:cNvSpPr>
-            <a:spLocks noGrp="1"/>
-          </p:cNvSpPr>
-          <p:nvPr/>
-        </p:nvSpPr>
-        <p:spPr>
-          <a:xfrm>
-            <a:off x="475488" y="4590288"/>
-            <a:ext cx="411480" cy="749808"/>
-          </a:xfrm>
-          <a:prstGeom prst="rect">
-            <a:avLst/>
-          </a:prstGeom>
-          <a:noFill/>
-        </p:spPr>
-        <p:txBody>
-          <a:bodyPr wrap="square" lIns="0" tIns="0" rIns="0" bIns="0" anchor="ctr"/>
-          <a:lstStyle/>
-          <a:p>
-            <a:pPr marL="0" indent="0" algn="ctr">
-              <a:buNone/>
-            </a:pPr>
-            <a:r>
-              <a:rPr sz="1800" b="1">
-                <a:solidFill>
-                  <a:srgbClr val="2A9D61"/>
-                </a:solidFill>
-              </a:rPr>
-              <a:t>05</a:t>
-            </a:r>
-            <a:endParaRPr sz="1800"/>
-          </a:p>
-        </p:txBody>
-      </p:sp>
-      <p:sp>
-        <p:nvSpPr>
-          <p:cNvPr id="31" name="Text 29">
-            <a:extLst>
-              <a:ext uri="{FF2B5EF4-FFF2-40B4-BE49-F238E27FC236}">
-                <a16:creationId xmlns:a16="http://schemas.microsoft.com/office/drawing/2014/main" id="{7228FE94-2214-4A82-AFE2-3F267A1D4424}"/>
-              </a:ext>
-            </a:extLst>
-          </p:cNvPr>
-          <p:cNvSpPr>
-            <a:spLocks noGrp="1"/>
-          </p:cNvSpPr>
-          <p:nvPr/>
-        </p:nvSpPr>
-        <p:spPr>
-          <a:xfrm>
-            <a:off x="932688" y="4645152"/>
-            <a:ext cx="4114800" cy="310896"/>
-          </a:xfrm>
-          <a:prstGeom prst="rect">
-            <a:avLst/>
-          </a:prstGeom>
-          <a:noFill/>
-        </p:spPr>
-        <p:txBody>
-          <a:bodyPr wrap="square" lIns="0" tIns="0" rIns="0" bIns="0" anchor="ctr"/>
-          <a:lstStyle/>
-          <a:p>
-            <a:pPr marL="0" indent="0">
-              <a:buNone/>
-            </a:pPr>
-            <a:r>
-              <a:rPr sz="1000" b="1">
-                <a:solidFill>
-                  <a:srgbClr val="1A2638"/>
-                </a:solidFill>
-              </a:rPr>
-              <a:t>Going over time</a:t>
-            </a:r>
-            <a:endParaRPr sz="1000"/>
-          </a:p>
-        </p:txBody>
-      </p:sp>
-      <p:sp>
-        <p:nvSpPr>
-          <p:cNvPr id="32" name="Text 30">
-            <a:extLst>
-              <a:ext uri="{FF2B5EF4-FFF2-40B4-BE49-F238E27FC236}">
-                <a16:creationId xmlns:a16="http://schemas.microsoft.com/office/drawing/2014/main" id="{BD7EEF37-68F4-4EDC-BFAF-6B828C194374}"/>
-              </a:ext>
-            </a:extLst>
-          </p:cNvPr>
-          <p:cNvSpPr>
-            <a:spLocks noGrp="1"/>
-          </p:cNvSpPr>
-          <p:nvPr/>
-        </p:nvSpPr>
-        <p:spPr>
-          <a:xfrm>
-            <a:off x="932688" y="4956048"/>
-            <a:ext cx="7772400" cy="347472"/>
-          </a:xfrm>
-          <a:prstGeom prst="rect">
-            <a:avLst/>
-          </a:prstGeom>
-          <a:noFill/>
-        </p:spPr>
-        <p:txBody>
-          <a:bodyPr wrap="square" lIns="0" tIns="0" rIns="0" bIns="0" anchor="t"/>
-          <a:lstStyle/>
-          <a:p>
-            <a:pPr marL="0" indent="0">
-              <a:buNone/>
-            </a:pPr>
-            <a:r>
-              <a:rPr sz="850" b="1">
-                <a:solidFill>
-                  <a:srgbClr val="2A9D61"/>
-                </a:solidFill>
-              </a:rPr>
-              <a:t>Fix: </a:t>
-            </a:r>
-            <a:r>
-              <a:rPr sz="850">
-                <a:solidFill>
-                  <a:srgbClr val="1A2638"/>
-                </a:solidFill>
-              </a:rPr>
-              <a:t>Practice out loud with a timer. 8 slides x 1.5 min = 12 min. That's your target.</a:t>
-            </a:r>
-            <a:endParaRPr sz="850"/>
           </a:p>
         </p:txBody>
       </p:sp>
@@ -5334,37 +4767,6 @@
           </a:p>
         </p:txBody>
       </p:sp>
-      <p:sp>
-        <p:nvSpPr>
-          <p:cNvPr id="35" name="Rectangle 34">
-            <a:extLst>
-              <a:ext uri="{FF2B5EF4-FFF2-40B4-BE49-F238E27FC236}">
-                <a16:creationId xmlns:a16="http://schemas.microsoft.com/office/drawing/2014/main" id="{D9F4B17D-4C76-48E1-9681-BAFF543DC330}"/>
-              </a:ext>
-            </a:extLst>
-          </p:cNvPr>
-          <p:cNvSpPr>
-            <a:spLocks noGrp="1"/>
-          </p:cNvSpPr>
-          <p:nvPr/>
-        </p:nvSpPr>
-        <p:spPr>
-          <a:xfrm>
-            <a:off x="266700" y="1200150"/>
-            <a:ext cx="8610600" cy="3695700"/>
-          </a:xfrm>
-          <a:prstGeom prst="rect">
-            <a:avLst/>
-          </a:prstGeom>
-          <a:solidFill>
-            <a:srgbClr val="FFFFFF"/>
-          </a:solidFill>
-          <a:ln w="0">
-            <a:noFill/>
-            <a:prstDash val="solid"/>
-          </a:ln>
-        </p:spPr>
-      </p:sp>
       <p:pic>
         <p:nvPicPr>
           <p:cNvPr id="69" name="Picture 36"/>
@@ -5381,8 +4783,8 @@
         </p:blipFill>
         <p:spPr>
           <a:xfrm>
-            <a:off x="886968" y="1200150"/>
-            <a:ext cx="7318584" cy="3628257"/>
+            <a:off x="774375" y="1111192"/>
+            <a:ext cx="7595250" cy="3765417"/>
           </a:xfrm>
           <a:prstGeom prst="rect">
             <a:avLst/>
@@ -5517,6 +4919,13 @@
             <a:prstDash val="solid"/>
           </a:ln>
         </p:spPr>
+        <p:txBody>
+          <a:bodyPr/>
+          <a:lstStyle/>
+          <a:p>
+            <a:endParaRPr lang="en-US" dirty="0"/>
+          </a:p>
+        </p:txBody>
       </p:sp>
       <p:sp>
         <p:nvSpPr>
@@ -5550,14 +4959,36 @@
               <a:buNone/>
             </a:pPr>
             <a:r>
-              <a:rPr sz="1100" b="1">
+              <a:rPr sz="1100" b="1" dirty="0">
                 <a:solidFill>
                   <a:srgbClr val="E8A020"/>
                 </a:solidFill>
               </a:rPr>
               <a:t>KEY FINDING 2</a:t>
             </a:r>
-            <a:endParaRPr sz="1100"/>
+            <a:endParaRPr lang="en-US" sz="1100" b="1" dirty="0">
+              <a:solidFill>
+                <a:srgbClr val="E8A020"/>
+              </a:solidFill>
+            </a:endParaRPr>
+          </a:p>
+          <a:p>
+            <a:pPr marL="0" indent="0">
+              <a:buNone/>
+            </a:pPr>
+            <a:r>
+              <a:rPr lang="en-US" sz="1000" dirty="0">
+                <a:solidFill>
+                  <a:schemeClr val="accent6"/>
+                </a:solidFill>
+              </a:rPr>
+              <a:t>complementary context</a:t>
+            </a:r>
+            <a:endParaRPr sz="1000" dirty="0">
+              <a:solidFill>
+                <a:schemeClr val="accent6"/>
+              </a:solidFill>
+            </a:endParaRPr>
           </a:p>
         </p:txBody>
       </p:sp>
@@ -6659,7 +6090,7 @@
         </p:nvSpPr>
         <p:spPr>
           <a:xfrm>
-            <a:off x="4709160" y="1298448"/>
+            <a:off x="4764024" y="1280160"/>
             <a:ext cx="4160520" cy="384048"/>
           </a:xfrm>
           <a:prstGeom prst="rect">
@@ -7682,14 +7113,36 @@
               <a:buNone/>
             </a:pPr>
             <a:r>
-              <a:rPr sz="1100" b="1">
+              <a:rPr sz="1100" b="1" dirty="0">
                 <a:solidFill>
                   <a:srgbClr val="E8A020"/>
                 </a:solidFill>
               </a:rPr>
               <a:t>KEY FINDING 3 — MODEL</a:t>
             </a:r>
-            <a:endParaRPr sz="1100"/>
+            <a:endParaRPr lang="en-US" sz="1100" b="1" dirty="0">
+              <a:solidFill>
+                <a:srgbClr val="E8A020"/>
+              </a:solidFill>
+            </a:endParaRPr>
+          </a:p>
+          <a:p>
+            <a:pPr marL="0" indent="0">
+              <a:buNone/>
+            </a:pPr>
+            <a:r>
+              <a:rPr lang="en-US" sz="1000" dirty="0">
+                <a:solidFill>
+                  <a:schemeClr val="accent6"/>
+                </a:solidFill>
+              </a:rPr>
+              <a:t>model comparison</a:t>
+            </a:r>
+            <a:endParaRPr sz="1000" dirty="0">
+              <a:solidFill>
+                <a:schemeClr val="accent6"/>
+              </a:solidFill>
+            </a:endParaRPr>
           </a:p>
         </p:txBody>
       </p:sp>
@@ -8268,22 +7721,38 @@
               <a:buNone/>
             </a:pPr>
             <a:r>
-              <a:rPr sz="850">
+              <a:rPr sz="850" dirty="0">
                 <a:solidFill>
                   <a:srgbClr val="1A2638"/>
                 </a:solidFill>
               </a:rPr>
-              <a:t>Nine-feature hurdle model - </a:t>
-            </a:r>
-            <a:r>
-              <a:rPr sz="850" b="1">
+              <a:t>Nine-feature </a:t>
+            </a:r>
+            <a:r>
+              <a:rPr lang="en-US" sz="850" dirty="0">
                 <a:solidFill>
                   <a:srgbClr val="1A2638"/>
                 </a:solidFill>
               </a:rPr>
+              <a:t>two-stage regression</a:t>
+            </a:r>
+            <a:r>
+              <a:rPr sz="850" dirty="0">
+                <a:solidFill>
+                  <a:srgbClr val="1A2638"/>
+                </a:solidFill>
+              </a:rPr>
+              <a:t> model - </a:t>
+            </a:r>
+            <a:r>
+              <a:rPr sz="850" b="1" dirty="0" err="1">
+                <a:solidFill>
+                  <a:srgbClr val="1A2638"/>
+                </a:solidFill>
+              </a:rPr>
               <a:t>HistGradientBoosting</a:t>
             </a:r>
-            <a:endParaRPr sz="850" b="1"/>
+            <a:endParaRPr sz="850" b="1" dirty="0"/>
           </a:p>
         </p:txBody>
       </p:sp>

--- a/reports/presentation/wildfire_exposure_screening_capstone_final.pptx
+++ b/reports/presentation/wildfire_exposure_screening_capstone_final.pptx
@@ -973,7 +973,11 @@
           <a:p>
             <a:r>
               <a:rPr lang="en-US" b="1" dirty="0"/>
-              <a:t>What to say:</a:t>
+              <a:t>What to </a:t>
+            </a:r>
+            <a:r>
+              <a:rPr lang="en-US" b="1" dirty="0" err="1"/>
+              <a:t>say:s</a:t>
             </a:r>
             <a:endParaRPr lang="en-US" dirty="0"/>
           </a:p>
@@ -1083,7 +1087,31 @@
             </a:r>
             <a:r>
               <a:rPr b="1" dirty="0"/>
-              <a:t>2022→2023, 2023→2024 and 2024→2025</a:t>
+              <a:t>2022</a:t>
+            </a:r>
+            <a:r>
+              <a:rPr lang="en-US" b="1" dirty="0"/>
+              <a:t>-&gt;</a:t>
+            </a:r>
+            <a:r>
+              <a:rPr b="1" dirty="0"/>
+              <a:t>2023, 2023</a:t>
+            </a:r>
+            <a:r>
+              <a:rPr lang="en-US" b="1" dirty="0"/>
+              <a:t>-&gt;</a:t>
+            </a:r>
+            <a:r>
+              <a:rPr b="1" dirty="0"/>
+              <a:t>2024 and 2024</a:t>
+            </a:r>
+            <a:r>
+              <a:rPr lang="en-US" b="1" dirty="0"/>
+              <a:t>-&gt;</a:t>
+            </a:r>
+            <a:r>
+              <a:rPr b="1" dirty="0"/>
+              <a:t>2025</a:t>
             </a:r>
             <a:r>
               <a:rPr dirty="0"/>
@@ -1127,7 +1155,15 @@
             </a:r>
             <a:r>
               <a:rPr b="1" dirty="0"/>
-              <a:t>2035→2036</a:t>
+              <a:t>2035</a:t>
+            </a:r>
+            <a:r>
+              <a:rPr lang="en-US" b="1" dirty="0"/>
+              <a:t>-&gt;</a:t>
+            </a:r>
+            <a:r>
+              <a:rPr b="1" dirty="0"/>
+              <a:t>2036</a:t>
             </a:r>
             <a:r>
               <a:rPr dirty="0"/>

--- a/reports/presentation/wildfire_exposure_screening_capstone_final.pptx
+++ b/reports/presentation/wildfire_exposure_screening_capstone_final.pptx
@@ -968,7 +968,7 @@
             </a:r>
           </a:p>
           <a:p>
-            <a:endParaRPr lang="en-US" dirty="0"/>
+            <a:endParaRPr lang="en-US" b="1" dirty="0"/>
           </a:p>
           <a:p>
             <a:r>
@@ -7311,7 +7311,7 @@
           <a:bodyPr/>
           <a:lstStyle/>
           <a:p>
-            <a:endParaRPr/>
+            <a:endParaRPr dirty="0"/>
           </a:p>
         </p:txBody>
       </p:sp>
@@ -7742,52 +7742,82 @@
         <p:spPr>
           <a:xfrm>
             <a:off x="713232" y="2578608"/>
-            <a:ext cx="3611880" cy="347472"/>
-          </a:xfrm>
-          <a:prstGeom prst="rect">
-            <a:avLst/>
-          </a:prstGeom>
-          <a:noFill/>
-        </p:spPr>
-        <p:txBody>
-          <a:bodyPr wrap="square" lIns="0" tIns="0" rIns="0" bIns="0" anchor="ctr"/>
-          <a:lstStyle/>
+            <a:ext cx="3611880" cy="466344"/>
+          </a:xfrm>
+          <a:prstGeom prst="rect">
+            <a:avLst/>
+          </a:prstGeom>
+          <a:noFill/>
+        </p:spPr>
+        <p:txBody>
+          <a:bodyPr wrap="square" lIns="0" tIns="0" rIns="0" bIns="0" anchor="ctr"/>
+          <a:lstStyle/>
+          <a:p>
+            <a:r>
+              <a:rPr sz="850" dirty="0">
+                <a:solidFill>
+                  <a:srgbClr val="1A2638"/>
+                </a:solidFill>
+              </a:rPr>
+              <a:t>Nine-feature </a:t>
+            </a:r>
+            <a:r>
+              <a:rPr lang="en-US" sz="850" dirty="0">
+                <a:solidFill>
+                  <a:srgbClr val="1A2638"/>
+                </a:solidFill>
+              </a:rPr>
+              <a:t>two-stage regression</a:t>
+            </a:r>
+            <a:r>
+              <a:rPr sz="850" dirty="0">
+                <a:solidFill>
+                  <a:srgbClr val="1A2638"/>
+                </a:solidFill>
+              </a:rPr>
+              <a:t> model</a:t>
+            </a:r>
+            <a:r>
+              <a:rPr lang="en-US" sz="850" dirty="0">
+                <a:solidFill>
+                  <a:srgbClr val="1A2638"/>
+                </a:solidFill>
+              </a:rPr>
+              <a:t>:</a:t>
+            </a:r>
+          </a:p>
+          <a:p>
+            <a:pPr marL="171450" indent="-171450">
+              <a:buFont typeface="Arial" panose="020B0604020202020204" pitchFamily="34" charset="0"/>
+              <a:buChar char="•"/>
+            </a:pPr>
+            <a:r>
+              <a:rPr lang="en-US" sz="800" b="1" dirty="0" err="1"/>
+              <a:t>HistGradientBoostingClassifier</a:t>
+            </a:r>
+            <a:r>
+              <a:rPr lang="en-US" sz="800" dirty="0"/>
+              <a:t> for occurrence</a:t>
+            </a:r>
+          </a:p>
+          <a:p>
+            <a:pPr marL="171450" indent="-171450">
+              <a:buFont typeface="Arial" panose="020B0604020202020204" pitchFamily="34" charset="0"/>
+              <a:buChar char="•"/>
+            </a:pPr>
+            <a:r>
+              <a:rPr lang="en-US" sz="800" b="1" dirty="0" err="1"/>
+              <a:t>HistGradientBoostingRegressor</a:t>
+            </a:r>
+            <a:r>
+              <a:rPr lang="en-US" sz="800" dirty="0"/>
+              <a:t> for positive burned share</a:t>
+            </a:r>
+          </a:p>
           <a:p>
             <a:pPr marL="0" indent="0">
               <a:buNone/>
             </a:pPr>
-            <a:r>
-              <a:rPr sz="850" dirty="0">
-                <a:solidFill>
-                  <a:srgbClr val="1A2638"/>
-                </a:solidFill>
-              </a:rPr>
-              <a:t>Nine-feature </a:t>
-            </a:r>
-            <a:r>
-              <a:rPr lang="en-US" sz="850" dirty="0">
-                <a:solidFill>
-                  <a:srgbClr val="1A2638"/>
-                </a:solidFill>
-              </a:rPr>
-              <a:t>two-stage regression</a:t>
-            </a:r>
-            <a:r>
-              <a:rPr sz="850" dirty="0">
-                <a:solidFill>
-                  <a:srgbClr val="1A2638"/>
-                </a:solidFill>
-              </a:rPr>
-              <a:t> model - </a:t>
-            </a:r>
-            <a:r>
-              <a:rPr sz="850" b="1" dirty="0" err="1">
-                <a:solidFill>
-                  <a:srgbClr val="1A2638"/>
-                </a:solidFill>
-              </a:rPr>
-              <a:t>HistGradientBoosting</a:t>
-            </a:r>
             <a:endParaRPr sz="850" b="1" dirty="0"/>
           </a:p>
         </p:txBody>

--- a/reports/presentation/wildfire_exposure_screening_capstone_final.pptx
+++ b/reports/presentation/wildfire_exposure_screening_capstone_final.pptx
@@ -4805,22 +4805,34 @@
       </p:sp>
       <p:pic>
         <p:nvPicPr>
-          <p:cNvPr id="69" name="Picture 36"/>
+          <p:cNvPr id="9" name="Picture 8">
+            <a:extLst>
+              <a:ext uri="{FF2B5EF4-FFF2-40B4-BE49-F238E27FC236}">
+                <a16:creationId xmlns:a16="http://schemas.microsoft.com/office/drawing/2014/main" id="{8DB38B7C-228F-B2AA-92AC-419C3B16224E}"/>
+              </a:ext>
+            </a:extLst>
+          </p:cNvPr>
           <p:cNvPicPr>
             <a:picLocks noChangeAspect="1"/>
           </p:cNvPicPr>
           <p:nvPr/>
         </p:nvPicPr>
         <p:blipFill>
-          <a:blip r:embed="rId3"/>
+          <a:blip r:embed="rId3">
+            <a:extLst>
+              <a:ext uri="{28A0092B-C50C-407E-A947-70E740481C1C}">
+                <a14:useLocalDpi xmlns:a14="http://schemas.microsoft.com/office/drawing/2010/main" val="0"/>
+              </a:ext>
+            </a:extLst>
+          </a:blip>
           <a:stretch>
             <a:fillRect/>
           </a:stretch>
         </p:blipFill>
         <p:spPr>
           <a:xfrm>
-            <a:off x="774375" y="1111192"/>
-            <a:ext cx="7595250" cy="3765417"/>
+            <a:off x="742950" y="1107383"/>
+            <a:ext cx="7581900" cy="3810525"/>
           </a:xfrm>
           <a:prstGeom prst="rect">
             <a:avLst/>

--- a/reports/presentation/wildfire_exposure_screening_capstone_final.pptx
+++ b/reports/presentation/wildfire_exposure_screening_capstone_final.pptx
@@ -964,7 +964,7 @@
             </a:r>
             <a:r>
               <a:rPr lang="en-US" dirty="0"/>
-              <a:t> The nine-feature two-stage regression modestly improves useful comparative diagnostics over historical recurrence alone, while extreme events remain difficult.</a:t>
+              <a:t> The nine-feature two-stage regression improves average comparative error and burned-share ranking over historical recurrence alone, while extreme fire outcomes remain difficult.</a:t>
             </a:r>
           </a:p>
           <a:p>
@@ -973,30 +973,58 @@
           <a:p>
             <a:r>
               <a:rPr lang="en-US" b="1" dirty="0"/>
-              <a:t>What to </a:t>
-            </a:r>
-            <a:r>
-              <a:rPr lang="en-US" b="1" dirty="0" err="1"/>
-              <a:t>say:s</a:t>
-            </a:r>
-            <a:endParaRPr lang="en-US" dirty="0"/>
-          </a:p>
-          <a:p>
-            <a:r>
+              <a:t>What to say:</a:t>
+            </a:r>
+            <a:br>
               <a:rPr lang="en-US" dirty="0"/>
-              <a:t>“This slide compares two approaches using the held-out final period: predictor years 2022–2024 and observed outcomes 2023–2025.</a:t>
-            </a:r>
-          </a:p>
-          <a:p>
+            </a:br>
             <a:r>
               <a:rPr lang="en-US" dirty="0"/>
-              <a:t>The historical-recurrence baseline is a transparent project benchmark. It groups training records by the number of previously burned years in the 2 km context and uses the training-period average next-year burned share for each group. It is not a library model.</a:t>
-            </a:r>
-          </a:p>
-          <a:p>
+              <a:t>“This slide compares two approaches using the held-out final period: predictor </a:t>
+            </a:r>
+            <a:r>
+              <a:rPr lang="en-US"/>
+              <a:t>years </a:t>
+            </a:r>
+            <a:r>
+              <a:rPr lang="en-US" b="1"/>
+              <a:t>2022 - 2024</a:t>
+            </a:r>
+            <a:r>
+              <a:rPr lang="en-US"/>
+              <a:t> </a:t>
+            </a:r>
             <a:r>
               <a:rPr lang="en-US" dirty="0"/>
-              <a:t>The nine-feature two-stage regression uses </a:t>
+              <a:t>and observed outcomes </a:t>
+            </a:r>
+            <a:r>
+              <a:rPr lang="en-US" b="1" dirty="0"/>
+              <a:t>2023</a:t>
+            </a:r>
+            <a:r>
+              <a:rPr lang="ru-RU" b="1" dirty="0"/>
+              <a:t> - </a:t>
+            </a:r>
+            <a:r>
+              <a:rPr lang="en-US" b="1" dirty="0"/>
+              <a:t>2025</a:t>
+            </a:r>
+            <a:r>
+              <a:rPr lang="en-US" dirty="0"/>
+              <a:t>.</a:t>
+            </a:r>
+          </a:p>
+          <a:p>
+            <a:r>
+              <a:rPr lang="en-US" dirty="0"/>
+              <a:t>The historical-recurrence baseline is a transparent project benchmark. It groups training records by the number of previously burned years in the 2 km context and uses the training-period average next-year burned share for each group. It is an empirical project benchmark, not a library model.</a:t>
+            </a:r>
+          </a:p>
+          <a:p>
+            <a:r>
+              <a:rPr lang="en-US" dirty="0"/>
+              <a:t>The nine-feature Model V2 uses two </a:t>
             </a:r>
             <a:r>
               <a:rPr lang="en-US" dirty="0" err="1"/>
@@ -1004,13 +1032,29 @@
             </a:r>
             <a:r>
               <a:rPr lang="en-US" dirty="0"/>
-              <a:t>. First, it estimates whether burning is expected in a cell. Second, when burning is expected, it estimates how much of the cell’s land area may burn. The two parts are combined into one continuous estimated burned share.</a:t>
+              <a:t> components. The first estimates whether burning is likely in a cell. The second estimates how much of the cell’s land area may burn when burning occurs. These two parts are combined into one continuous estimated burned share.</a:t>
             </a:r>
           </a:p>
           <a:p>
             <a:r>
               <a:rPr lang="en-US" dirty="0"/>
-              <a:t>The model lowers MAE from 0.029 to 0.021 and improves Capture@20% from 0.482 to 0.500. RMSE remains approximately the same, at 0.111, which tells us that larger and more extreme fire outcomes are still difficult to estimate accurately.</a:t>
+              <a:t>On the final test, Model V2 lowers MAE from </a:t>
+            </a:r>
+            <a:r>
+              <a:rPr lang="en-US" b="1" dirty="0"/>
+              <a:t>0.0292 to 0.0209</a:t>
+            </a:r>
+            <a:r>
+              <a:rPr lang="en-US" dirty="0"/>
+              <a:t>. RMSE is almost unchanged but slightly higher, from </a:t>
+            </a:r>
+            <a:r>
+              <a:rPr lang="en-US" b="1" dirty="0"/>
+              <a:t>0.1106 to 0.1110</a:t>
+            </a:r>
+            <a:r>
+              <a:rPr lang="en-US" dirty="0"/>
+              <a:t>, showing that larger and more extreme fire outcomes remain difficult.”</a:t>
             </a:r>
           </a:p>
           <a:p>
@@ -1018,8 +1062,86 @@
           </a:p>
           <a:p>
             <a:r>
+              <a:rPr lang="en-US" b="1" dirty="0"/>
+              <a:t>Capture@20% is a validation test of the ranking.</a:t>
+            </a:r>
+            <a:r>
               <a:rPr lang="en-US" dirty="0"/>
-              <a:t>Capture@20% is not a buyer threshold. For example, using 2024 data, the model ranks cells for expected 2025 burned share. We then check how much of the actual 2025 burned area occurred within the 20% highest-ranked cells. It measures ranking usefulness, not the proportion of land that burned.”</a:t>
+              <a:t> For each predictor year, the model ranks cells using information from year </a:t>
+            </a:r>
+            <a:r>
+              <a:rPr lang="en-US" b="1" dirty="0"/>
+              <a:t>T</a:t>
+            </a:r>
+            <a:r>
+              <a:rPr lang="en-US" dirty="0"/>
+              <a:t> and estimates burned share for </a:t>
+            </a:r>
+            <a:r>
+              <a:rPr lang="en-US" b="1" dirty="0"/>
+              <a:t>T+1</a:t>
+            </a:r>
+            <a:r>
+              <a:rPr lang="en-US" dirty="0"/>
+              <a:t>. For example, for </a:t>
+            </a:r>
+            <a:r>
+              <a:rPr lang="en-US" b="1" dirty="0"/>
+              <a:t>2024 -&gt; 2025</a:t>
+            </a:r>
+            <a:r>
+              <a:rPr lang="en-US" dirty="0"/>
+              <a:t>, it ranks cells using 2024 predictor data and is later checked against observed ICNF burned areas from 2025.</a:t>
+            </a:r>
+          </a:p>
+          <a:p>
+            <a:r>
+              <a:rPr lang="en-US" dirty="0"/>
+              <a:t>The final evaluation covers </a:t>
+            </a:r>
+            <a:r>
+              <a:rPr lang="en-US" b="1" dirty="0"/>
+              <a:t>2022 -&gt; 2023, 2023 -&gt; 2024, and 2024 -&gt; 2025</a:t>
+            </a:r>
+            <a:r>
+              <a:rPr lang="en-US" dirty="0"/>
+              <a:t>. We select the highest-scored 20% of cells and measure how much of the total observed burned-share mass occurred within those cells.</a:t>
+            </a:r>
+          </a:p>
+          <a:p>
+            <a:r>
+              <a:rPr lang="en-US" dirty="0"/>
+              <a:t>Across the final test, the historical baseline captured </a:t>
+            </a:r>
+            <a:r>
+              <a:rPr lang="en-US" b="1" dirty="0"/>
+              <a:t>40.2%</a:t>
+            </a:r>
+            <a:r>
+              <a:rPr lang="en-US" dirty="0"/>
+              <a:t> of observed burned-share mass in its top-ranked 20% of cells. Model V2 captured </a:t>
+            </a:r>
+            <a:r>
+              <a:rPr lang="en-US" b="1" dirty="0"/>
+              <a:t>57.2%</a:t>
+            </a:r>
+            <a:r>
+              <a:rPr lang="en-US" dirty="0"/>
+              <a:t>.</a:t>
+            </a:r>
+          </a:p>
+          <a:p>
+            <a:r>
+              <a:rPr lang="en-US" dirty="0"/>
+              <a:t>This does not mean that 20% of the land burned. It is a retrospective ranking diagnostic, not a buyer threshold or a property-level forecast. The same logic could later be applied to </a:t>
+            </a:r>
+            <a:r>
+              <a:rPr lang="en-US" b="1" dirty="0"/>
+              <a:t>2035 -&gt; 2036</a:t>
+            </a:r>
+            <a:r>
+              <a:rPr lang="en-US" dirty="0"/>
+              <a:t>, but only after the 2036 outcome data become available.”</a:t>
             </a:r>
           </a:p>
           <a:p>
@@ -1032,158 +1154,37 @@
             </a:r>
             <a:r>
               <a:rPr lang="en-US" dirty="0"/>
-              <a:t> “So the practical question becomes: how should someone use this evidence responsibly?”</a:t>
-            </a:r>
-          </a:p>
-          <a:p>
+              <a:t> “The practical question is whether the model provides a useful ranking for broad-area screening.”</a:t>
+            </a:r>
+          </a:p>
+          <a:p>
+            <a:endParaRPr lang="en-US" b="1" dirty="0"/>
+          </a:p>
+          <a:p>
+            <a:r>
+              <a:rPr lang="en-US" b="1" dirty="0"/>
+              <a:t>[Sources]</a:t>
+            </a:r>
             <a:br>
-              <a:rPr lang="en-US" b="1" dirty="0"/>
+              <a:rPr lang="en-US" dirty="0"/>
             </a:br>
             <a:r>
-              <a:rPr b="1" dirty="0"/>
-              <a:t>Capture@20% is a validation test of the ranking.</a:t>
-            </a:r>
-            <a:r>
-              <a:rPr dirty="0"/>
-              <a:t> For each predictor year, the model ranks cells using data from year </a:t>
-            </a:r>
-            <a:r>
-              <a:rPr b="1" dirty="0"/>
-              <a:t>T</a:t>
-            </a:r>
-            <a:r>
-              <a:rPr dirty="0"/>
-              <a:t> and estimates burned share for </a:t>
-            </a:r>
-            <a:r>
-              <a:rPr b="1" dirty="0"/>
-              <a:t>T+1</a:t>
-            </a:r>
-            <a:r>
-              <a:rPr dirty="0"/>
-              <a:t>. For example, for </a:t>
-            </a:r>
-            <a:r>
-              <a:rPr b="1" dirty="0"/>
-              <a:t>T = 2024</a:t>
-            </a:r>
-            <a:r>
-              <a:rPr dirty="0"/>
-              <a:t>, it ranks cells using 2024 predictor data and is later checked against the actual ICNF burned areas observed in </a:t>
-            </a:r>
-            <a:r>
-              <a:rPr b="1" dirty="0"/>
-              <a:t>2025</a:t>
-            </a:r>
-            <a:r>
-              <a:rPr dirty="0"/>
-              <a:t>.</a:t>
-            </a:r>
-          </a:p>
-          <a:p>
-            <a:r>
-              <a:rPr dirty="0"/>
-              <a:t>The final evaluation covers the year pairs </a:t>
-            </a:r>
-            <a:r>
-              <a:rPr b="1" dirty="0"/>
-              <a:t>2022</a:t>
-            </a:r>
-            <a:r>
-              <a:rPr lang="en-US" b="1" dirty="0"/>
-              <a:t>-&gt;</a:t>
-            </a:r>
-            <a:r>
-              <a:rPr b="1" dirty="0"/>
-              <a:t>2023, 2023</a:t>
-            </a:r>
-            <a:r>
-              <a:rPr lang="en-US" b="1" dirty="0"/>
-              <a:t>-&gt;</a:t>
-            </a:r>
-            <a:r>
-              <a:rPr b="1" dirty="0"/>
-              <a:t>2024 and 2024</a:t>
-            </a:r>
-            <a:r>
-              <a:rPr lang="en-US" b="1" dirty="0"/>
-              <a:t>-&gt;</a:t>
-            </a:r>
-            <a:r>
-              <a:rPr b="1" dirty="0"/>
-              <a:t>2025</a:t>
-            </a:r>
-            <a:r>
-              <a:rPr dirty="0"/>
-              <a:t>. For each pair, we select the highest-scored 20% of cells and measure how much of the burned share observed in </a:t>
-            </a:r>
-            <a:r>
-              <a:rPr b="1" dirty="0"/>
-              <a:t>T+1</a:t>
-            </a:r>
-            <a:r>
-              <a:rPr dirty="0"/>
-              <a:t> occurred in those cells.</a:t>
-            </a:r>
-          </a:p>
-          <a:p>
-            <a:r>
-              <a:rPr dirty="0"/>
-              <a:t>Across the final test, the historical baseline captured </a:t>
-            </a:r>
-            <a:r>
-              <a:rPr b="1" dirty="0"/>
-              <a:t>48.2%</a:t>
-            </a:r>
-            <a:r>
-              <a:rPr dirty="0"/>
-              <a:t> of observed burned share in its top-ranked 20% of cells. The nine-feature model captured </a:t>
-            </a:r>
-            <a:r>
-              <a:rPr b="1" dirty="0"/>
-              <a:t>50.0%</a:t>
-            </a:r>
-            <a:r>
-              <a:rPr dirty="0"/>
-              <a:t>.</a:t>
-            </a:r>
-          </a:p>
-          <a:p>
-            <a:r>
-              <a:rPr dirty="0"/>
-              <a:t>This does not mean that 20% of the land burned. It is only a retrospective ranking diagnostic. In a future cycle, the same logic would apply to </a:t>
-            </a:r>
-            <a:r>
-              <a:rPr b="1" dirty="0"/>
-              <a:t>2035</a:t>
-            </a:r>
-            <a:r>
-              <a:rPr lang="en-US" b="1" dirty="0"/>
-              <a:t>-&gt;</a:t>
-            </a:r>
-            <a:r>
-              <a:rPr b="1" dirty="0"/>
-              <a:t>2036</a:t>
-            </a:r>
-            <a:r>
-              <a:rPr dirty="0"/>
-              <a:t>, but only after the 2036 outcome data became available.</a:t>
-            </a:r>
-          </a:p>
-          <a:p>
-            <a:endParaRPr dirty="0"/>
-          </a:p>
-          <a:p>
-            <a:r>
-              <a:rPr dirty="0"/>
-              <a:t>[Sources]</a:t>
+              <a:rPr lang="en-US" dirty="0"/>
+              <a:t>reports/validation/model_final_decision.md</a:t>
             </a:r>
             <a:br>
-              <a:rPr dirty="0"/>
+              <a:rPr lang="en-US" dirty="0"/>
             </a:br>
             <a:r>
-              <a:rPr dirty="0"/>
-              <a:t>reports/validation/model_final_decision.md; reports/figures/model_final_test_metric_comparison.png</a:t>
+              <a:rPr lang="en-US" dirty="0"/>
+              <a:t>reports/validation/final_temporal_test_2022_2024.md</a:t>
+            </a:r>
+            <a:br>
+              <a:rPr lang="en-US" dirty="0"/>
+            </a:br>
+            <a:r>
+              <a:rPr lang="en-US" dirty="0"/>
+              <a:t>reports/figures/model_final_test_metric_comparison.png</a:t>
             </a:r>
           </a:p>
         </p:txBody>
@@ -3497,14 +3498,14 @@
               <a:buNone/>
             </a:pPr>
             <a:r>
-              <a:rPr sz="2000" b="1">
+              <a:rPr lang="en-US" sz="2000" b="1" dirty="0">
                 <a:solidFill>
                   <a:srgbClr val="E8A020"/>
                 </a:solidFill>
               </a:rPr>
-              <a:t>→</a:t>
-            </a:r>
-            <a:endParaRPr sz="2000"/>
+              <a:t>-&gt;</a:t>
+            </a:r>
+            <a:endParaRPr sz="2000" dirty="0"/>
           </a:p>
         </p:txBody>
       </p:sp>
@@ -3904,14 +3905,14 @@
               <a:buNone/>
             </a:pPr>
             <a:r>
-              <a:rPr sz="2000" b="1">
+              <a:rPr lang="en-US" sz="2000" b="1" dirty="0">
                 <a:solidFill>
                   <a:srgbClr val="E8A020"/>
                 </a:solidFill>
               </a:rPr>
-              <a:t>→</a:t>
-            </a:r>
-            <a:endParaRPr sz="2000"/>
+              <a:t>-&gt;</a:t>
+            </a:r>
+            <a:endParaRPr sz="2000" dirty="0"/>
           </a:p>
         </p:txBody>
       </p:sp>
@@ -7495,30 +7496,46 @@
         </p:nvSpPr>
         <p:spPr>
           <a:xfrm>
-            <a:off x="713232" y="1773936"/>
-            <a:ext cx="3611880" cy="347472"/>
-          </a:xfrm>
-          <a:prstGeom prst="rect">
-            <a:avLst/>
-          </a:prstGeom>
-          <a:noFill/>
-        </p:spPr>
-        <p:txBody>
-          <a:bodyPr wrap="square" lIns="0" tIns="0" rIns="0" bIns="0" anchor="ctr"/>
-          <a:lstStyle/>
-          <a:p>
-            <a:pPr marL="0" indent="0">
-              <a:buNone/>
-            </a:pPr>
-            <a:r>
-              <a:rPr sz="850">
+            <a:off x="713232" y="1801368"/>
+            <a:ext cx="3611880" cy="246888"/>
+          </a:xfrm>
+          <a:prstGeom prst="rect">
+            <a:avLst/>
+          </a:prstGeom>
+          <a:noFill/>
+        </p:spPr>
+        <p:txBody>
+          <a:bodyPr wrap="square" lIns="0" tIns="0" rIns="0" bIns="0" anchor="ctr"/>
+          <a:lstStyle/>
+          <a:p>
+            <a:r>
+              <a:rPr lang="en-US" sz="800" dirty="0"/>
+              <a:t>Historical </a:t>
+            </a:r>
+            <a:r>
+              <a:rPr lang="en-US" sz="800" b="1" dirty="0"/>
+              <a:t>recurrence</a:t>
+            </a:r>
+            <a:r>
+              <a:rPr lang="en-US" sz="800" dirty="0"/>
+              <a:t> benchmark </a:t>
+            </a:r>
+            <a:r>
+              <a:rPr sz="850" dirty="0">
                 <a:solidFill>
                   <a:srgbClr val="1A2638"/>
                 </a:solidFill>
               </a:rPr>
-              <a:t>Baseline -&gt; nine-feature model</a:t>
-            </a:r>
-            <a:endParaRPr sz="850"/>
+              <a:t> -&gt; </a:t>
+            </a:r>
+            <a:r>
+              <a:rPr lang="en-US" sz="800" b="1" dirty="0"/>
+              <a:t>Nine-feature</a:t>
+            </a:r>
+            <a:r>
+              <a:rPr lang="en-US" sz="800" dirty="0"/>
+              <a:t> Model</a:t>
+            </a:r>
           </a:p>
         </p:txBody>
       </p:sp>
@@ -7630,34 +7647,31 @@
               <a:buNone/>
             </a:pPr>
             <a:r>
-              <a:rPr sz="850">
+              <a:rPr sz="850" dirty="0">
                 <a:solidFill>
                   <a:srgbClr val="1A2638"/>
                 </a:solidFill>
               </a:rPr>
-              <a:t>Historical recurrence baseline </a:t>
-            </a:r>
-            <a:r>
-              <a:rPr sz="800" b="1">
-                <a:solidFill>
-                  <a:srgbClr val="1A2638"/>
-                </a:solidFill>
-              </a:rPr>
-              <a:t>- </a:t>
-            </a:r>
-            <a:r>
-              <a:rPr sz="800" b="1"/>
-              <a:t>groups training records by the number of previously burned years </a:t>
-            </a:r>
-            <a:r>
-              <a:rPr sz="800" b="1">
-                <a:solidFill>
-                  <a:srgbClr val="1A2638"/>
-                </a:solidFill>
-              </a:rPr>
-              <a:t> </a:t>
-            </a:r>
-            <a:endParaRPr sz="800" b="1"/>
+              <a:t>Historical recurrence baseline</a:t>
+            </a:r>
+            <a:endParaRPr lang="en-US" sz="850" dirty="0">
+              <a:solidFill>
+                <a:srgbClr val="1A2638"/>
+              </a:solidFill>
+            </a:endParaRPr>
+          </a:p>
+          <a:p>
+            <a:r>
+              <a:rPr lang="en-US" sz="700" i="1" dirty="0">
+                <a:solidFill>
+                  <a:schemeClr val="tx1">
+                    <a:lumMod val="50000"/>
+                    <a:lumOff val="50000"/>
+                  </a:schemeClr>
+                </a:solidFill>
+              </a:rPr>
+              <a:t>a simple reference based only on previous burned-year counts</a:t>
+            </a:r>
           </a:p>
         </p:txBody>
       </p:sp>
@@ -7754,7 +7768,7 @@
         <p:spPr>
           <a:xfrm>
             <a:off x="713232" y="2578608"/>
-            <a:ext cx="3611880" cy="466344"/>
+            <a:ext cx="3611880" cy="548640"/>
           </a:xfrm>
           <a:prstGeom prst="rect">
             <a:avLst/>
@@ -7804,11 +7818,25 @@
               <a:buChar char="•"/>
             </a:pPr>
             <a:r>
-              <a:rPr lang="en-US" sz="800" b="1" dirty="0" err="1"/>
+              <a:rPr lang="en-US" sz="700" b="1" i="1" dirty="0" err="1">
+                <a:solidFill>
+                  <a:schemeClr val="tx1">
+                    <a:lumMod val="50000"/>
+                    <a:lumOff val="50000"/>
+                  </a:schemeClr>
+                </a:solidFill>
+              </a:rPr>
               <a:t>HistGradientBoostingClassifier</a:t>
             </a:r>
             <a:r>
-              <a:rPr lang="en-US" sz="800" dirty="0"/>
+              <a:rPr lang="en-US" sz="700" i="1" dirty="0">
+                <a:solidFill>
+                  <a:schemeClr val="tx1">
+                    <a:lumMod val="50000"/>
+                    <a:lumOff val="50000"/>
+                  </a:schemeClr>
+                </a:solidFill>
+              </a:rPr>
               <a:t> for occurrence</a:t>
             </a:r>
           </a:p>
@@ -7818,13 +7846,41 @@
               <a:buChar char="•"/>
             </a:pPr>
             <a:r>
-              <a:rPr lang="en-US" sz="800" b="1" dirty="0" err="1"/>
+              <a:rPr lang="en-US" sz="700" b="1" i="1" dirty="0" err="1">
+                <a:solidFill>
+                  <a:schemeClr val="tx1">
+                    <a:lumMod val="50000"/>
+                    <a:lumOff val="50000"/>
+                  </a:schemeClr>
+                </a:solidFill>
+              </a:rPr>
               <a:t>HistGradientBoostingRegressor</a:t>
             </a:r>
             <a:r>
-              <a:rPr lang="en-US" sz="800" dirty="0"/>
+              <a:rPr lang="en-US" sz="700" i="1" dirty="0">
+                <a:solidFill>
+                  <a:schemeClr val="tx1">
+                    <a:lumMod val="50000"/>
+                    <a:lumOff val="50000"/>
+                  </a:schemeClr>
+                </a:solidFill>
+              </a:rPr>
               <a:t> for positive burned share</a:t>
             </a:r>
+          </a:p>
+          <a:p>
+            <a:r>
+              <a:rPr lang="en-US" sz="700" i="1" dirty="0">
+                <a:solidFill>
+                  <a:schemeClr val="tx1">
+                    <a:lumMod val="50000"/>
+                    <a:lumOff val="50000"/>
+                  </a:schemeClr>
+                </a:solidFill>
+              </a:rPr>
+              <a:t>the accepted model using fire history, land cover, terrain, and climate predictors</a:t>
+            </a:r>
+            <a:endParaRPr lang="en-US" sz="800" dirty="0"/>
           </a:p>
           <a:p>
             <a:pPr marL="0" indent="0">
@@ -7942,14 +7998,38 @@
               <a:buNone/>
             </a:pPr>
             <a:r>
-              <a:rPr sz="850">
+              <a:rPr sz="850" dirty="0">
                 <a:solidFill>
                   <a:srgbClr val="1A2638"/>
                 </a:solidFill>
               </a:rPr>
-              <a:t>MAE: 0.029  -&gt;  0.021</a:t>
-            </a:r>
-            <a:endParaRPr sz="850"/>
+              <a:t>MAE: 0.029</a:t>
+            </a:r>
+            <a:r>
+              <a:rPr lang="en-US" sz="850" dirty="0">
+                <a:solidFill>
+                  <a:srgbClr val="1A2638"/>
+                </a:solidFill>
+              </a:rPr>
+              <a:t>2</a:t>
+            </a:r>
+            <a:r>
+              <a:rPr sz="850" dirty="0">
+                <a:solidFill>
+                  <a:srgbClr val="1A2638"/>
+                </a:solidFill>
+              </a:rPr>
+              <a:t>  -&gt;  0.02</a:t>
+            </a:r>
+            <a:r>
+              <a:rPr lang="en-US" sz="850" dirty="0">
+                <a:solidFill>
+                  <a:srgbClr val="1A2638"/>
+                </a:solidFill>
+              </a:rPr>
+              <a:t>09</a:t>
+            </a:r>
+            <a:endParaRPr sz="850" dirty="0"/>
           </a:p>
         </p:txBody>
       </p:sp>
@@ -8061,14 +8141,38 @@
               <a:buNone/>
             </a:pPr>
             <a:r>
-              <a:rPr sz="850">
+              <a:rPr sz="850" dirty="0">
                 <a:solidFill>
                   <a:srgbClr val="1A2638"/>
                 </a:solidFill>
               </a:rPr>
-              <a:t>RMSE: 0.111  -&gt;  0.111</a:t>
-            </a:r>
-            <a:endParaRPr sz="850"/>
+              <a:t>RMSE: 0.11</a:t>
+            </a:r>
+            <a:r>
+              <a:rPr lang="en-US" sz="850" dirty="0">
+                <a:solidFill>
+                  <a:srgbClr val="1A2638"/>
+                </a:solidFill>
+              </a:rPr>
+              <a:t>06</a:t>
+            </a:r>
+            <a:r>
+              <a:rPr sz="850" dirty="0">
+                <a:solidFill>
+                  <a:srgbClr val="1A2638"/>
+                </a:solidFill>
+              </a:rPr>
+              <a:t>  -&gt;  0.111</a:t>
+            </a:r>
+            <a:r>
+              <a:rPr lang="en-US" sz="850" dirty="0">
+                <a:solidFill>
+                  <a:srgbClr val="1A2638"/>
+                </a:solidFill>
+              </a:rPr>
+              <a:t>0</a:t>
+            </a:r>
+            <a:endParaRPr sz="850" dirty="0"/>
           </a:p>
         </p:txBody>
       </p:sp>
@@ -8180,14 +8284,50 @@
               <a:buNone/>
             </a:pPr>
             <a:r>
-              <a:rPr sz="850">
+              <a:rPr sz="850" dirty="0">
                 <a:solidFill>
                   <a:srgbClr val="1A2638"/>
                 </a:solidFill>
               </a:rPr>
-              <a:t>Capture@20%: 0.482  -&gt;  0.500</a:t>
-            </a:r>
-            <a:endParaRPr sz="850"/>
+              <a:t>Capture@20%: </a:t>
+            </a:r>
+            <a:r>
+              <a:rPr lang="en-US" sz="850" dirty="0">
+                <a:solidFill>
+                  <a:srgbClr val="1A2638"/>
+                </a:solidFill>
+              </a:rPr>
+              <a:t>40.2%</a:t>
+            </a:r>
+            <a:r>
+              <a:rPr sz="850" dirty="0">
+                <a:solidFill>
+                  <a:srgbClr val="1A2638"/>
+                </a:solidFill>
+              </a:rPr>
+              <a:t>  -&gt;  </a:t>
+            </a:r>
+            <a:r>
+              <a:rPr lang="en-US" sz="850" dirty="0">
+                <a:solidFill>
+                  <a:srgbClr val="1A2638"/>
+                </a:solidFill>
+              </a:rPr>
+              <a:t>57.2%</a:t>
+            </a:r>
+          </a:p>
+          <a:p>
+            <a:r>
+              <a:rPr lang="en-US" sz="700" i="1" dirty="0">
+                <a:solidFill>
+                  <a:schemeClr val="tx1">
+                    <a:lumMod val="50000"/>
+                    <a:lumOff val="50000"/>
+                  </a:schemeClr>
+                </a:solidFill>
+              </a:rPr>
+              <a:t>how much observed burned share occurred within the highest-ranked 20% of cells</a:t>
+            </a:r>
           </a:p>
         </p:txBody>
       </p:sp>
@@ -8283,7 +8423,7 @@
         </p:nvSpPr>
         <p:spPr>
           <a:xfrm>
-            <a:off x="713232" y="4187952"/>
+            <a:off x="713232" y="4165092"/>
             <a:ext cx="3611880" cy="347472"/>
           </a:xfrm>
           <a:prstGeom prst="rect">
@@ -8295,18 +8435,10 @@
           <a:bodyPr wrap="square" lIns="0" tIns="0" rIns="0" bIns="0" anchor="ctr"/>
           <a:lstStyle/>
           <a:p>
-            <a:pPr marL="0" indent="0">
-              <a:buNone/>
-            </a:pPr>
-            <a:r>
-              <a:rPr sz="850">
-                <a:solidFill>
-                  <a:srgbClr val="1A2638"/>
-                </a:solidFill>
-              </a:rPr>
-              <a:t>Final temporal test: T=2022–2024; outcomes in T+1.</a:t>
-            </a:r>
-            <a:endParaRPr sz="850"/>
+            <a:r>
+              <a:rPr lang="en-US" sz="800" dirty="0"/>
+              <a:t>Final test: predictor years T=2022–2024; outcomes T+1=2023–2025</a:t>
+            </a:r>
           </a:p>
         </p:txBody>
       </p:sp>
@@ -8901,14 +9033,14 @@
               <a:buNone/>
             </a:pPr>
             <a:r>
-              <a:rPr sz="750" b="1">
+              <a:rPr sz="750" b="1" dirty="0">
                 <a:solidFill>
                   <a:srgbClr val="E8A020"/>
                 </a:solidFill>
               </a:rPr>
               <a:t>It is a ranking diagnostic, not a buyer threshold.</a:t>
             </a:r>
-            <a:endParaRPr sz="750"/>
+            <a:endParaRPr sz="750" dirty="0"/>
           </a:p>
         </p:txBody>
       </p:sp>
@@ -9890,14 +10022,14 @@
               <a:buNone/>
             </a:pPr>
             <a:r>
-              <a:rPr sz="2000" b="1">
+              <a:rPr lang="en-US" sz="2000" b="1" dirty="0">
                 <a:solidFill>
                   <a:srgbClr val="E8A020"/>
                 </a:solidFill>
               </a:rPr>
-              <a:t>→</a:t>
-            </a:r>
-            <a:endParaRPr sz="2000"/>
+              <a:t>-&gt;</a:t>
+            </a:r>
+            <a:endParaRPr sz="2000" dirty="0"/>
           </a:p>
         </p:txBody>
       </p:sp>
@@ -10297,14 +10429,14 @@
               <a:buNone/>
             </a:pPr>
             <a:r>
-              <a:rPr sz="2000" b="1">
+              <a:rPr lang="en-US" sz="2000" b="1" dirty="0">
                 <a:solidFill>
                   <a:srgbClr val="E8A020"/>
                 </a:solidFill>
               </a:rPr>
-              <a:t>→</a:t>
-            </a:r>
-            <a:endParaRPr sz="2000"/>
+              <a:t>-&gt;</a:t>
+            </a:r>
+            <a:endParaRPr sz="2000" dirty="0"/>
           </a:p>
         </p:txBody>
       </p:sp>
@@ -13634,14 +13766,14 @@
               <a:buNone/>
             </a:pPr>
             <a:r>
-              <a:rPr sz="2000" b="1">
+              <a:rPr lang="en-US" sz="2000" b="1" dirty="0">
                 <a:solidFill>
                   <a:srgbClr val="E8A020"/>
                 </a:solidFill>
               </a:rPr>
-              <a:t>→</a:t>
-            </a:r>
-            <a:endParaRPr sz="2000"/>
+              <a:t>-&gt;</a:t>
+            </a:r>
+            <a:endParaRPr sz="2000" dirty="0"/>
           </a:p>
         </p:txBody>
       </p:sp>
@@ -14041,14 +14173,14 @@
               <a:buNone/>
             </a:pPr>
             <a:r>
-              <a:rPr sz="2000" b="1">
+              <a:rPr lang="en-US" sz="2000" b="1" dirty="0">
                 <a:solidFill>
                   <a:srgbClr val="E8A020"/>
                 </a:solidFill>
               </a:rPr>
-              <a:t>→</a:t>
-            </a:r>
-            <a:endParaRPr sz="2000"/>
+              <a:t>-&gt;</a:t>
+            </a:r>
+            <a:endParaRPr sz="2000" dirty="0"/>
           </a:p>
         </p:txBody>
       </p:sp>

--- a/reports/presentation/wildfire_exposure_screening_capstone_final.pptx
+++ b/reports/presentation/wildfire_exposure_screening_capstone_final.pptx
@@ -338,71 +338,32 @@
           <a:lstStyle/>
           <a:p>
             <a:r>
-              <a:rPr lang="en-US" dirty="0"/>
-              <a:t>This project combines validated wildfire history, landscape, terrain, climate, GIS, and machine learning to compare broad areas of mainland Portugal, helping a user narrow a location search before conducting local and property-specific checks.</a:t>
-            </a:r>
-            <a:br>
-              <a:rPr lang="en-US" dirty="0"/>
-            </a:br>
-            <a:endParaRPr lang="en-US" dirty="0"/>
-          </a:p>
-          <a:p>
-            <a:r>
-              <a:rPr lang="en-US" b="1" dirty="0"/>
-              <a:t>Main message:</a:t>
-            </a:r>
-            <a:r>
-              <a:rPr lang="en-US" dirty="0"/>
-              <a:t> The project helps </a:t>
-            </a:r>
-            <a:r>
-              <a:rPr lang="en-US" dirty="0" err="1"/>
-              <a:t>organise</a:t>
-            </a:r>
-            <a:r>
-              <a:rPr lang="en-US" dirty="0"/>
-              <a:t> broad location research; it does not decide whether to buy a property.</a:t>
-            </a:r>
-          </a:p>
-          <a:p>
-            <a:endParaRPr lang="en-US" dirty="0"/>
-          </a:p>
-          <a:p>
-            <a:r>
-              <a:rPr lang="en-US" b="1" dirty="0"/>
+              <a:rPr dirty="0"/>
+              <a:t>Main message: This capstone uses reproducible wildfire-exposure evidence to help narrow broad location-search areas in mainland Portugal.</a:t>
+            </a:r>
+          </a:p>
+          <a:p>
+            <a:endParaRPr dirty="0"/>
+          </a:p>
+          <a:p>
+            <a:r>
+              <a:rPr b="1" dirty="0"/>
               <a:t>What to say:</a:t>
             </a:r>
-            <a:endParaRPr lang="en-US" dirty="0"/>
-          </a:p>
-          <a:p>
-            <a:r>
-              <a:rPr lang="en-US" dirty="0"/>
-              <a:t>“People considering locations across mainland Portugal face a very broad search problem. Wildfire exposure is one factor that may matter, but it is difficult to compare areas fairly using isolated past fire events.</a:t>
-            </a:r>
-          </a:p>
-          <a:p>
-            <a:r>
-              <a:rPr lang="en-US" dirty="0"/>
-              <a:t>This capstone creates a reproducible GIS and machine-learning workflow for that first screening stage. It combines observed wildfire history, landscape, terrain, and climate information to compare 1 km areas across mainland Portugal.</a:t>
-            </a:r>
-          </a:p>
-          <a:p>
-            <a:r>
-              <a:rPr lang="en-US" dirty="0"/>
-              <a:t>The output is not a statement that an area is safe or unsafe, and it is not a buy-or-do-not-buy recommendation. Its purpose is to narrow a national search to areas that deserve more detailed local investigation.”</a:t>
-            </a:r>
-          </a:p>
-          <a:p>
-            <a:endParaRPr lang="en-US" dirty="0"/>
-          </a:p>
-          <a:p>
-            <a:r>
-              <a:rPr lang="en-US" b="1" dirty="0"/>
-              <a:t>Transition:</a:t>
-            </a:r>
-            <a:r>
-              <a:rPr lang="en-US" dirty="0"/>
-              <a:t> “To make those comparisons fair, I first needed one consistent unit of analysis and clearly defined source roles.”</a:t>
+          </a:p>
+          <a:p>
+            <a:r>
+              <a:rPr b="0" dirty="0"/>
+              <a:t>“The project does not identify a safe property or tell someone to buy or not buy. It combines observed wildfire history, landscape, terrain, climate, machine learning and GIS to compare broad areas consistently. The practical output is a shortlist for deeper local research before a property decision.”</a:t>
+            </a:r>
+          </a:p>
+          <a:p>
+            <a:endParaRPr dirty="0"/>
+          </a:p>
+          <a:p>
+            <a:r>
+              <a:rPr dirty="0"/>
+              <a:t>Transition: “Next, I will show what one consistent national record represents and how the source data are used.”</a:t>
             </a:r>
           </a:p>
           <a:p>
@@ -416,8 +377,8 @@
           </a:p>
           <a:p>
             <a:r>
-              <a:rPr dirty="0"/>
-              <a:t>Project README; docs/project_brief.md</a:t>
+              <a:rPr b="0" dirty="0"/>
+              <a:t>README.md; docs/project_brief.md; docs/data_dictionary.md</a:t>
             </a:r>
           </a:p>
         </p:txBody>
@@ -494,66 +455,66 @@
           <a:lstStyle/>
           <a:p>
             <a:r>
-              <a:rPr lang="en-US" b="1" dirty="0"/>
+              <a:rPr b="1" dirty="0"/>
               <a:t>Main message:</a:t>
             </a:r>
             <a:r>
-              <a:rPr lang="en-US" dirty="0"/>
+              <a:rPr dirty="0"/>
               <a:t> Every record has the same geographical meaning: one 1 km mainland cell in one predictor year.</a:t>
             </a:r>
             <a:br>
-              <a:rPr lang="en-US" dirty="0"/>
+              <a:rPr dirty="0"/>
             </a:br>
-            <a:endParaRPr lang="en-US" dirty="0"/>
-          </a:p>
-          <a:p>
-            <a:r>
-              <a:rPr lang="en-US" b="1" dirty="0"/>
+            <a:endParaRPr dirty="0"/>
+          </a:p>
+          <a:p>
+            <a:r>
+              <a:rPr b="1" dirty="0"/>
               <a:t>What to say:</a:t>
             </a:r>
-            <a:endParaRPr lang="en-US" dirty="0"/>
-          </a:p>
-          <a:p>
-            <a:r>
-              <a:rPr lang="en-US" dirty="0"/>
+            <a:endParaRPr dirty="0"/>
+          </a:p>
+          <a:p>
+            <a:r>
+              <a:rPr dirty="0"/>
               <a:t>“Each row in the analytical dataset represents one 1 km by 1 km mainland Portugal cell in a predictor year, T. This makes it possible to compare the same geographical unit over time.</a:t>
             </a:r>
           </a:p>
           <a:p>
             <a:r>
-              <a:rPr lang="en-US" dirty="0"/>
+              <a:rPr dirty="0"/>
               <a:t>ICNF annual burned-area data provides two roles: historical fire recurrence and the observed next-year outcome. The outcome is continuous burned share: the proportion of the cell’s land area that burned in the following year.</a:t>
             </a:r>
           </a:p>
           <a:p>
             <a:r>
-              <a:rPr lang="en-US" dirty="0"/>
+              <a:rPr dirty="0"/>
               <a:t>CLC land cover and Copernicus DEM provide landscape and terrain context. ERA5-Land provides warm-season temperature, precipitation, and shallow soil-water conditions from the predictor year only.</a:t>
             </a:r>
           </a:p>
           <a:p>
             <a:r>
-              <a:rPr lang="en-US" dirty="0"/>
+              <a:rPr dirty="0"/>
               <a:t>The 2 km area is not a second grid. It is an outward context buffer around each 1 km cell, used to measure nearby forest/shrub, slope, and historical fire recurrence.”</a:t>
             </a:r>
             <a:br>
-              <a:rPr lang="en-US" dirty="0"/>
+              <a:rPr dirty="0"/>
             </a:br>
-            <a:endParaRPr lang="en-US" dirty="0"/>
-          </a:p>
-          <a:p>
-            <a:r>
-              <a:rPr lang="en-US" b="1" dirty="0"/>
+            <a:endParaRPr dirty="0"/>
+          </a:p>
+          <a:p>
+            <a:r>
+              <a:rPr b="1" dirty="0"/>
               <a:t>Transition:</a:t>
             </a:r>
             <a:r>
-              <a:rPr lang="en-US" dirty="0"/>
+              <a:rPr dirty="0"/>
               <a:t> “With that common structure, the first result is that wildfire history is not evenly distributed across the country.”</a:t>
             </a:r>
             <a:br>
-              <a:rPr lang="en-US" dirty="0"/>
+              <a:rPr dirty="0"/>
             </a:br>
-            <a:endParaRPr lang="en-US" dirty="0"/>
+            <a:endParaRPr dirty="0"/>
           </a:p>
           <a:p>
             <a:r>
@@ -642,98 +603,72 @@
           <a:lstStyle/>
           <a:p>
             <a:r>
-              <a:rPr lang="en-US" b="1" dirty="0"/>
+              <a:rPr b="1"/>
               <a:t>Main message:</a:t>
             </a:r>
             <a:r>
-              <a:rPr lang="en-US" dirty="0"/>
               <a:t> Wildfire exposure patterns vary geographically, so a national location search can be narrowed using comparative evidence.</a:t>
             </a:r>
-            <a:endParaRPr dirty="0"/>
-          </a:p>
-          <a:p>
-            <a:r>
-              <a:rPr dirty="0"/>
+          </a:p>
+          <a:p>
+            <a:r>
               <a:t>These layers provide different types of evidence and should not be added together or interpreted as one score. The comparison helps identify broad areas for further investigation; it does not certify a location.</a:t>
             </a:r>
-            <a:br>
-              <a:rPr lang="en-US" dirty="0"/>
-            </a:br>
-            <a:br>
-              <a:rPr lang="en-US" dirty="0"/>
-            </a:br>
-            <a:r>
-              <a:rPr lang="en-US" b="1" dirty="0"/>
+            <a:br/>
+            <a:br/>
+            <a:r>
+              <a:rPr b="1"/>
               <a:t>What to say:</a:t>
             </a:r>
-            <a:endParaRPr lang="en-US" dirty="0"/>
-          </a:p>
-          <a:p>
-            <a:r>
-              <a:rPr lang="en-US" dirty="0"/>
+            <a:endParaRPr/>
+          </a:p>
+          <a:p>
+            <a:r>
               <a:t>“This slide shows three different views of the same national geography.</a:t>
             </a:r>
           </a:p>
           <a:p>
             <a:r>
-              <a:rPr lang="en-US" dirty="0"/>
               <a:t>The first map shows observed historical recurrence: how many distinct years had burned-area evidence between 2016 and 2025 within the 2 km context around each 1 km cell.</a:t>
             </a:r>
           </a:p>
           <a:p>
             <a:r>
-              <a:rPr lang="en-US" dirty="0"/>
               <a:t>The second map is the ICNF and official Portuguese government map showing where the landscape has more or less underlying potential to support severe wildfire conditions. It describes persistent landscape hazard conditions rather than what burned in one particular year.</a:t>
             </a:r>
           </a:p>
           <a:p>
             <a:r>
-              <a:rPr lang="en-US" dirty="0"/>
               <a:t>The third map is the project’s 2026 comparative estimate. It uses information available through 2025 to rank 1 km cells by estimated next-year burned share.</a:t>
             </a:r>
           </a:p>
           <a:p>
             <a:r>
-              <a:rPr lang="en-US" dirty="0"/>
               <a:t>These maps should not be added together into one score. They provide different evidence for comparing broad areas and deciding where additional research is worthwhile.”</a:t>
             </a:r>
           </a:p>
           <a:p>
-            <a:endParaRPr lang="en-US" dirty="0"/>
-          </a:p>
-          <a:p>
-            <a:r>
-              <a:rPr lang="en-US" b="1" dirty="0"/>
+            <a:endParaRPr/>
+          </a:p>
+          <a:p>
+            <a:r>
+              <a:rPr b="1"/>
               <a:t>Transition:</a:t>
             </a:r>
             <a:r>
-              <a:rPr lang="en-US" dirty="0"/>
               <a:t> “Because historical recurrence and official structural hazard measure different things, the next question is why it is useful to compare them.”</a:t>
             </a:r>
-            <a:endParaRPr dirty="0"/>
-          </a:p>
-          <a:p>
-            <a:endParaRPr dirty="0"/>
-          </a:p>
-          <a:p>
-            <a:r>
-              <a:rPr dirty="0"/>
+          </a:p>
+          <a:p>
+            <a:endParaRPr/>
+          </a:p>
+          <a:p>
+            <a:r>
               <a:t>[Sources]</a:t>
             </a:r>
-            <a:br>
-              <a:rPr dirty="0"/>
-            </a:br>
-            <a:r>
-              <a:rPr dirty="0"/>
-              <a:t>reports/figures/historical_wildfire_exposure_screening_mainland_portugal.png; reports/validation/historical_exposure_screening_and_icnf_comparison.md; </a:t>
-            </a:r>
-            <a:r>
-              <a:rPr dirty="0" err="1"/>
-              <a:t>qgis</a:t>
-            </a:r>
-            <a:r>
-              <a:rPr dirty="0"/>
-              <a:t>/README.md; reports/validation/operational_forecast_2026_validation.md</a:t>
+            <a:br/>
+            <a:r>
+              <a:t>reports/figures/historical_wildfire_exposure_screening_mainland_portugal.png; reports/validation/historical_exposure_screening_and_icnf_comparison.md; qgis/README.md; reports/validation/operational_forecast_2026_validation.md</a:t>
             </a:r>
           </a:p>
         </p:txBody>
@@ -810,79 +745,65 @@
           <a:lstStyle/>
           <a:p>
             <a:r>
-              <a:rPr lang="en-US" b="1" dirty="0"/>
+              <a:rPr b="1"/>
               <a:t>Main message:</a:t>
             </a:r>
             <a:r>
-              <a:rPr lang="en-US" dirty="0"/>
               <a:t> Observed recurrence and official structural hazard are complementary, not competing, evidence layers.</a:t>
             </a:r>
           </a:p>
           <a:p>
-            <a:endParaRPr lang="en-US" dirty="0"/>
-          </a:p>
-          <a:p>
-            <a:r>
-              <a:rPr lang="en-US" b="1" dirty="0"/>
+            <a:endParaRPr/>
+          </a:p>
+          <a:p>
+            <a:r>
+              <a:rPr b="1"/>
               <a:t>What to say:</a:t>
             </a:r>
-            <a:endParaRPr lang="en-US" dirty="0"/>
-          </a:p>
-          <a:p>
-            <a:r>
-              <a:rPr lang="en-US" dirty="0"/>
+            <a:endParaRPr/>
+          </a:p>
+          <a:p>
+            <a:r>
               <a:t>“Historical recurrence answers: ‘What burned repeatedly in the observed 2016–2025 period?’ It is based on annual burned-area records.</a:t>
             </a:r>
           </a:p>
           <a:p>
             <a:r>
-              <a:rPr lang="en-US" dirty="0"/>
               <a:t>Official ICNF structural hazard answers a different question: ‘What persistent landscape conditions are associated with wildfire hazard?’ Its source is an official 25 m classification, summarized here to the predominant class for each 1 km cell.</a:t>
             </a:r>
           </a:p>
           <a:p>
             <a:r>
-              <a:rPr lang="en-US" dirty="0"/>
               <a:t>Where the layers agree, they provide consistent broad-area context. Where they differ, they identify areas where the historical record and structural landscape conditions tell a more nuanced story.</a:t>
             </a:r>
           </a:p>
           <a:p>
             <a:r>
-              <a:rPr lang="en-US" dirty="0"/>
               <a:t>This comparison is descriptive. It is not a model-accuracy test, and neither layer is a threshold for deciding whether a particular property is acceptable.”</a:t>
             </a:r>
           </a:p>
           <a:p>
-            <a:endParaRPr lang="en-US" dirty="0"/>
-          </a:p>
-          <a:p>
-            <a:r>
-              <a:rPr lang="en-US" b="1" dirty="0"/>
+            <a:endParaRPr/>
+          </a:p>
+          <a:p>
+            <a:r>
+              <a:rPr b="1"/>
               <a:t>Transition:</a:t>
             </a:r>
             <a:r>
-              <a:rPr lang="en-US" dirty="0"/>
               <a:t> “Historical context is useful, but I also tested whether a data-driven model could improve next-year comparative estimates.”</a:t>
             </a:r>
           </a:p>
           <a:p>
-            <a:endParaRPr dirty="0"/>
-          </a:p>
-          <a:p>
-            <a:r>
-              <a:rPr dirty="0"/>
+            <a:endParaRPr/>
+          </a:p>
+          <a:p>
+            <a:r>
               <a:t>[Sources]</a:t>
             </a:r>
-            <a:br>
-              <a:rPr dirty="0"/>
-            </a:br>
-            <a:r>
-              <a:rPr dirty="0" err="1"/>
-              <a:t>qgis</a:t>
-            </a:r>
-            <a:r>
-              <a:rPr dirty="0"/>
-              <a:t>/README.md; docs/data_dictionary.md; reports/figures/historical_exposure_by_icnf_structural_hazard_crosstab.png</a:t>
+            <a:br/>
+            <a:r>
+              <a:t>qgis/README.md; docs/data_dictionary.md; reports/figures/historical_exposure_by_icnf_structural_hazard_crosstab.png</a:t>
             </a:r>
           </a:p>
         </p:txBody>
@@ -959,231 +880,175 @@
           <a:lstStyle/>
           <a:p>
             <a:r>
-              <a:rPr lang="en-US" b="1" dirty="0"/>
+              <a:rPr b="1"/>
               <a:t>Main message:</a:t>
             </a:r>
             <a:r>
-              <a:rPr lang="en-US" dirty="0"/>
               <a:t> The nine-feature two-stage regression improves average comparative error and burned-share ranking over historical recurrence alone, while extreme fire outcomes remain difficult.</a:t>
             </a:r>
           </a:p>
           <a:p>
-            <a:endParaRPr lang="en-US" b="1" dirty="0"/>
-          </a:p>
-          <a:p>
-            <a:r>
-              <a:rPr lang="en-US" b="1" dirty="0"/>
+            <a:endParaRPr b="1"/>
+          </a:p>
+          <a:p>
+            <a:r>
+              <a:rPr b="1"/>
               <a:t>What to say:</a:t>
             </a:r>
-            <a:br>
-              <a:rPr lang="en-US" dirty="0"/>
-            </a:br>
-            <a:r>
-              <a:rPr lang="en-US" dirty="0"/>
-              <a:t>“This slide compares two approaches using the held-out final period: predictor </a:t>
-            </a:r>
-            <a:r>
-              <a:rPr lang="en-US"/>
-              <a:t>years </a:t>
-            </a:r>
-            <a:r>
-              <a:rPr lang="en-US" b="1"/>
+            <a:br/>
+            <a:r>
+              <a:t>“This slide compares two approaches using the held-out final period: predictor years </a:t>
+            </a:r>
+            <a:r>
+              <a:rPr b="1"/>
               <a:t>2022 - 2024</a:t>
             </a:r>
             <a:r>
-              <a:rPr lang="en-US"/>
-              <a:t> </a:t>
-            </a:r>
-            <a:r>
-              <a:rPr lang="en-US" dirty="0"/>
-              <a:t>and observed outcomes </a:t>
-            </a:r>
-            <a:r>
-              <a:rPr lang="en-US" b="1" dirty="0"/>
-              <a:t>2023</a:t>
-            </a:r>
-            <a:r>
-              <a:rPr lang="ru-RU" b="1" dirty="0"/>
-              <a:t> - </a:t>
-            </a:r>
-            <a:r>
-              <a:rPr lang="en-US" b="1" dirty="0"/>
-              <a:t>2025</a:t>
-            </a:r>
-            <a:r>
-              <a:rPr lang="en-US" dirty="0"/>
+              <a:t> and observed outcomes </a:t>
+            </a:r>
+            <a:r>
+              <a:rPr b="1"/>
+              <a:t>2023 - 2025</a:t>
+            </a:r>
+            <a:r>
               <a:t>.</a:t>
             </a:r>
           </a:p>
           <a:p>
             <a:r>
-              <a:rPr lang="en-US" dirty="0"/>
               <a:t>The historical-recurrence baseline is a transparent project benchmark. It groups training records by the number of previously burned years in the 2 km context and uses the training-period average next-year burned share for each group. It is an empirical project benchmark, not a library model.</a:t>
             </a:r>
           </a:p>
           <a:p>
             <a:r>
-              <a:rPr lang="en-US" dirty="0"/>
-              <a:t>The nine-feature Model V2 uses two </a:t>
-            </a:r>
-            <a:r>
-              <a:rPr lang="en-US" dirty="0" err="1"/>
-              <a:t>HistGradientBoosting</a:t>
-            </a:r>
-            <a:r>
-              <a:rPr lang="en-US" dirty="0"/>
-              <a:t> components. The first estimates whether burning is likely in a cell. The second estimates how much of the cell’s land area may burn when burning occurs. These two parts are combined into one continuous estimated burned share.</a:t>
-            </a:r>
-          </a:p>
-          <a:p>
-            <a:r>
-              <a:rPr lang="en-US" dirty="0"/>
+              <a:t>The nine-feature Model V2 uses two HistGradientBoosting components. The first estimates whether burning is likely in a cell. The second estimates how much of the cell’s land area may burn when burning occurs. These two parts are combined into one continuous estimated burned share.</a:t>
+            </a:r>
+          </a:p>
+          <a:p>
+            <a:r>
               <a:t>On the final test, Model V2 lowers MAE from </a:t>
             </a:r>
             <a:r>
-              <a:rPr lang="en-US" b="1" dirty="0"/>
+              <a:rPr b="1"/>
               <a:t>0.0292 to 0.0209</a:t>
             </a:r>
             <a:r>
-              <a:rPr lang="en-US" dirty="0"/>
               <a:t>. RMSE is almost unchanged but slightly higher, from </a:t>
             </a:r>
             <a:r>
-              <a:rPr lang="en-US" b="1" dirty="0"/>
+              <a:rPr b="1"/>
               <a:t>0.1106 to 0.1110</a:t>
             </a:r>
             <a:r>
-              <a:rPr lang="en-US" dirty="0"/>
               <a:t>, showing that larger and more extreme fire outcomes remain difficult.”</a:t>
             </a:r>
           </a:p>
           <a:p>
-            <a:endParaRPr lang="en-US" dirty="0"/>
-          </a:p>
-          <a:p>
-            <a:r>
-              <a:rPr lang="en-US" b="1" dirty="0"/>
+            <a:endParaRPr/>
+          </a:p>
+          <a:p>
+            <a:r>
+              <a:rPr b="1"/>
               <a:t>Capture@20% is a validation test of the ranking.</a:t>
             </a:r>
             <a:r>
-              <a:rPr lang="en-US" dirty="0"/>
               <a:t> For each predictor year, the model ranks cells using information from year </a:t>
             </a:r>
             <a:r>
-              <a:rPr lang="en-US" b="1" dirty="0"/>
+              <a:rPr b="1"/>
               <a:t>T</a:t>
             </a:r>
             <a:r>
-              <a:rPr lang="en-US" dirty="0"/>
               <a:t> and estimates burned share for </a:t>
             </a:r>
             <a:r>
-              <a:rPr lang="en-US" b="1" dirty="0"/>
+              <a:rPr b="1"/>
               <a:t>T+1</a:t>
             </a:r>
             <a:r>
-              <a:rPr lang="en-US" dirty="0"/>
               <a:t>. For example, for </a:t>
             </a:r>
             <a:r>
-              <a:rPr lang="en-US" b="1" dirty="0"/>
+              <a:rPr b="1"/>
               <a:t>2024 -&gt; 2025</a:t>
             </a:r>
             <a:r>
-              <a:rPr lang="en-US" dirty="0"/>
               <a:t>, it ranks cells using 2024 predictor data and is later checked against observed ICNF burned areas from 2025.</a:t>
             </a:r>
           </a:p>
           <a:p>
             <a:r>
-              <a:rPr lang="en-US" dirty="0"/>
               <a:t>The final evaluation covers </a:t>
             </a:r>
             <a:r>
-              <a:rPr lang="en-US" b="1" dirty="0"/>
+              <a:rPr b="1"/>
               <a:t>2022 -&gt; 2023, 2023 -&gt; 2024, and 2024 -&gt; 2025</a:t>
             </a:r>
             <a:r>
-              <a:rPr lang="en-US" dirty="0"/>
               <a:t>. We select the highest-scored 20% of cells and measure how much of the total observed burned-share mass occurred within those cells.</a:t>
             </a:r>
           </a:p>
           <a:p>
             <a:r>
-              <a:rPr lang="en-US" dirty="0"/>
               <a:t>Across the final test, the historical baseline captured </a:t>
             </a:r>
             <a:r>
-              <a:rPr lang="en-US" b="1" dirty="0"/>
+              <a:rPr b="1"/>
               <a:t>40.2%</a:t>
             </a:r>
             <a:r>
-              <a:rPr lang="en-US" dirty="0"/>
               <a:t> of observed burned-share mass in its top-ranked 20% of cells. Model V2 captured </a:t>
             </a:r>
             <a:r>
-              <a:rPr lang="en-US" b="1" dirty="0"/>
+              <a:rPr b="1"/>
               <a:t>57.2%</a:t>
             </a:r>
             <a:r>
-              <a:rPr lang="en-US" dirty="0"/>
               <a:t>.</a:t>
             </a:r>
           </a:p>
           <a:p>
             <a:r>
-              <a:rPr lang="en-US" dirty="0"/>
               <a:t>This does not mean that 20% of the land burned. It is a retrospective ranking diagnostic, not a buyer threshold or a property-level forecast. The same logic could later be applied to </a:t>
             </a:r>
             <a:r>
-              <a:rPr lang="en-US" b="1" dirty="0"/>
+              <a:rPr b="1"/>
               <a:t>2035 -&gt; 2036</a:t>
             </a:r>
             <a:r>
-              <a:rPr lang="en-US" dirty="0"/>
               <a:t>, but only after the 2036 outcome data become available.”</a:t>
             </a:r>
           </a:p>
           <a:p>
-            <a:endParaRPr lang="en-US" dirty="0"/>
-          </a:p>
-          <a:p>
-            <a:r>
-              <a:rPr lang="en-US" b="1" dirty="0"/>
+            <a:endParaRPr/>
+          </a:p>
+          <a:p>
+            <a:r>
+              <a:rPr b="1"/>
               <a:t>Transition:</a:t>
             </a:r>
             <a:r>
-              <a:rPr lang="en-US" dirty="0"/>
               <a:t> “The practical question is whether the model provides a useful ranking for broad-area screening.”</a:t>
             </a:r>
           </a:p>
           <a:p>
-            <a:endParaRPr lang="en-US" b="1" dirty="0"/>
-          </a:p>
-          <a:p>
-            <a:r>
-              <a:rPr lang="en-US" b="1" dirty="0"/>
+            <a:endParaRPr b="1"/>
+          </a:p>
+          <a:p>
+            <a:r>
+              <a:rPr b="1"/>
               <a:t>[Sources]</a:t>
             </a:r>
-            <a:br>
-              <a:rPr lang="en-US" dirty="0"/>
-            </a:br>
-            <a:r>
-              <a:rPr lang="en-US" dirty="0"/>
+            <a:br/>
+            <a:r>
               <a:t>reports/validation/model_final_decision.md</a:t>
             </a:r>
-            <a:br>
-              <a:rPr lang="en-US" dirty="0"/>
-            </a:br>
-            <a:r>
-              <a:rPr lang="en-US" dirty="0"/>
+            <a:br/>
+            <a:r>
               <a:t>reports/validation/final_temporal_test_2022_2024.md</a:t>
             </a:r>
-            <a:br>
-              <a:rPr lang="en-US" dirty="0"/>
-            </a:br>
-            <a:r>
-              <a:rPr lang="en-US" dirty="0"/>
+            <a:br/>
+            <a:r>
               <a:t>reports/figures/model_final_test_metric_comparison.png</a:t>
             </a:r>
           </a:p>
@@ -1261,80 +1126,61 @@
           <a:lstStyle/>
           <a:p>
             <a:r>
-              <a:rPr lang="en-US" b="1" dirty="0"/>
+              <a:rPr b="1"/>
               <a:t>Main message:</a:t>
             </a:r>
             <a:r>
-              <a:rPr lang="en-US" dirty="0"/>
               <a:t> The output supports shortlisting broad areas, not choosing a property.</a:t>
             </a:r>
           </a:p>
           <a:p>
-            <a:endParaRPr lang="en-US" dirty="0"/>
-          </a:p>
-          <a:p>
-            <a:r>
-              <a:rPr lang="en-US" b="1" dirty="0"/>
+            <a:endParaRPr/>
+          </a:p>
+          <a:p>
+            <a:r>
+              <a:rPr b="1"/>
               <a:t>What to say:</a:t>
             </a:r>
-            <a:endParaRPr lang="en-US" dirty="0"/>
-          </a:p>
-          <a:p>
-            <a:r>
-              <a:rPr lang="en-US" dirty="0"/>
+            <a:endParaRPr/>
+          </a:p>
+          <a:p>
+            <a:r>
               <a:t>“Imagine a buyer considering multiple regions across mainland Portugal.</a:t>
             </a:r>
           </a:p>
           <a:p>
             <a:r>
-              <a:rPr lang="en-US" dirty="0"/>
               <a:t>They begin with the 2026 comparative estimate to compare broad 1 km areas using 2025 predictor inputs. They then look alongside it at observed historical recurrence and the official ICNF structural-hazard layer.</a:t>
             </a:r>
           </a:p>
           <a:p>
             <a:r>
-              <a:rPr lang="en-US" dirty="0"/>
               <a:t>The result is not a chosen property. It is a smaller, more structured set of broad areas for further research, site visits, and local checks.”</a:t>
             </a:r>
           </a:p>
           <a:p>
-            <a:endParaRPr lang="en-US" dirty="0"/>
-          </a:p>
-          <a:p>
-            <a:r>
-              <a:rPr lang="en-US" b="1" dirty="0"/>
+            <a:endParaRPr/>
+          </a:p>
+          <a:p>
+            <a:r>
+              <a:rPr b="1"/>
               <a:t>Transition:</a:t>
             </a:r>
             <a:r>
-              <a:rPr lang="en-US" dirty="0"/>
               <a:t> “The next slide explains the two safeguards that keep this use case responsible.”</a:t>
             </a:r>
           </a:p>
           <a:p>
-            <a:endParaRPr dirty="0"/>
-          </a:p>
-          <a:p>
-            <a:r>
-              <a:rPr dirty="0"/>
+            <a:endParaRPr/>
+          </a:p>
+          <a:p>
+            <a:r>
               <a:t>[Sources]</a:t>
             </a:r>
           </a:p>
           <a:p>
             <a:r>
-              <a:rPr dirty="0" err="1"/>
-              <a:t>qgis</a:t>
-            </a:r>
-            <a:r>
-              <a:rPr dirty="0"/>
-              <a:t>/wildfire_exposure_screening_portugal_2026.qgz; </a:t>
-            </a:r>
-            <a:r>
-              <a:rPr dirty="0" err="1"/>
-              <a:t>qgis</a:t>
-            </a:r>
-            <a:r>
-              <a:rPr dirty="0"/>
-              <a:t>/README.md; reports/validation/operational_forecast_2026_validation.md</a:t>
+              <a:t>qgis/wildfire_exposure_screening_portugal_2026.qgz; qgis/README.md; reports/validation/operational_forecast_2026_validation.md</a:t>
             </a:r>
           </a:p>
         </p:txBody>
@@ -1411,72 +1257,61 @@
           <a:lstStyle/>
           <a:p>
             <a:r>
-              <a:rPr lang="en-US" b="1" dirty="0"/>
+              <a:rPr b="1"/>
               <a:t>Main message:</a:t>
             </a:r>
             <a:r>
-              <a:rPr lang="en-US" dirty="0"/>
               <a:t> Compare layers first; then replace broad evidence with local evidence.</a:t>
             </a:r>
           </a:p>
           <a:p>
-            <a:endParaRPr lang="en-US" dirty="0"/>
-          </a:p>
-          <a:p>
-            <a:r>
-              <a:rPr lang="en-US" b="1" dirty="0"/>
+            <a:endParaRPr/>
+          </a:p>
+          <a:p>
+            <a:r>
+              <a:rPr b="1"/>
               <a:t>What to say:</a:t>
             </a:r>
-            <a:endParaRPr lang="en-US" dirty="0"/>
-          </a:p>
-          <a:p>
-            <a:r>
-              <a:rPr lang="en-US" dirty="0"/>
+            <a:endParaRPr/>
+          </a:p>
+          <a:p>
+            <a:r>
               <a:t>“The first recommendation is to compare the three layers separately: the 2026 comparative estimate, observed historical recurrence, and official ICNF structural hazard. They answer different questions, so they should not be merged into a single score.</a:t>
             </a:r>
           </a:p>
           <a:p>
             <a:r>
-              <a:rPr lang="en-US" dirty="0"/>
               <a:t>The second recommendation is local verification. Once an area is shortlisted, the decision should use planning restrictions, access and evacuation conditions, insurance, vegetation management, terrain, infrastructure, and property-specific information.</a:t>
             </a:r>
           </a:p>
           <a:p>
             <a:r>
-              <a:rPr lang="en-US" dirty="0"/>
               <a:t>The model helps direct research effort. It does not replace local investigation or certify a location.”</a:t>
             </a:r>
           </a:p>
           <a:p>
-            <a:endParaRPr lang="en-US" dirty="0"/>
-          </a:p>
-          <a:p>
-            <a:r>
-              <a:rPr lang="en-US" b="1" dirty="0"/>
+            <a:endParaRPr/>
+          </a:p>
+          <a:p>
+            <a:r>
+              <a:rPr b="1"/>
               <a:t>Transition:</a:t>
             </a:r>
             <a:r>
-              <a:rPr lang="en-US" dirty="0"/>
               <a:t> “Finally, the value of the project is not only one 2026 map -it is a repeatable annual workflow.”</a:t>
             </a:r>
           </a:p>
           <a:p>
-            <a:endParaRPr dirty="0"/>
-          </a:p>
-          <a:p>
-            <a:r>
-              <a:rPr dirty="0"/>
+            <a:endParaRPr/>
+          </a:p>
+          <a:p>
+            <a:r>
               <a:t>[Sources]</a:t>
             </a:r>
           </a:p>
           <a:p>
             <a:r>
-              <a:rPr dirty="0" err="1"/>
-              <a:t>qgis</a:t>
-            </a:r>
-            <a:r>
-              <a:rPr dirty="0"/>
-              <a:t>/README.md; docs/data_dictionary.md; reports/validation/historical_exposure_screening_and_icnf_comparison.md</a:t>
+              <a:t>qgis/README.md; docs/data_dictionary.md; reports/validation/historical_exposure_screening_and_icnf_comparison.md</a:t>
             </a:r>
           </a:p>
         </p:txBody>
@@ -1553,60 +1388,53 @@
           <a:lstStyle/>
           <a:p>
             <a:r>
-              <a:rPr lang="en-US" b="1" dirty="0"/>
+              <a:rPr b="1"/>
               <a:t>Main message:</a:t>
             </a:r>
             <a:r>
-              <a:rPr lang="en-US" dirty="0"/>
               <a:t> The project is successful as a reproducible comparative screening workflow with explicit limitations and an annual refresh path.</a:t>
             </a:r>
           </a:p>
           <a:p>
-            <a:endParaRPr lang="en-US" dirty="0"/>
-          </a:p>
-          <a:p>
-            <a:r>
-              <a:rPr lang="en-US" b="1" dirty="0"/>
+            <a:endParaRPr/>
+          </a:p>
+          <a:p>
+            <a:r>
+              <a:rPr b="1"/>
               <a:t>What to say:</a:t>
             </a:r>
-            <a:endParaRPr lang="en-US" dirty="0"/>
-          </a:p>
-          <a:p>
-            <a:r>
-              <a:rPr lang="en-US" dirty="0"/>
+            <a:endParaRPr/>
+          </a:p>
+          <a:p>
+            <a:r>
               <a:t>“This project delivered a reproducible national workflow: validated source data, a consistent 1 km grid, GIS outputs, historical evidence layers, and a tested nine-feature machine-learning model.</a:t>
             </a:r>
           </a:p>
           <a:p>
             <a:r>
-              <a:rPr lang="en-US" dirty="0"/>
               <a:t>The model provides a modest improvement over historical recurrence alone for selected comparative diagnostics. At the same time, the evaluation shows that extreme fire outcomes remain difficult, so the output must remain a cautious broad-area estimate.</a:t>
             </a:r>
           </a:p>
           <a:p>
             <a:r>
-              <a:rPr lang="en-US" dirty="0"/>
               <a:t>The practical result is a more focused location search. The annual next step is straightforward: when completed-year source data and the observed outcome for the prior estimate become available, rerun the fixed workflow, evaluate that estimate, and produce the next annual comparative layer.</a:t>
             </a:r>
           </a:p>
           <a:p>
             <a:r>
-              <a:rPr lang="en-US" dirty="0"/>
               <a:t>The project therefore provides a repeatable evidence process—not a final property decision.”</a:t>
             </a:r>
           </a:p>
           <a:p>
-            <a:endParaRPr dirty="0"/>
-          </a:p>
-          <a:p>
-            <a:r>
-              <a:rPr dirty="0"/>
+            <a:endParaRPr/>
+          </a:p>
+          <a:p>
+            <a:r>
               <a:t>[Sources]</a:t>
             </a:r>
           </a:p>
           <a:p>
             <a:r>
-              <a:rPr dirty="0"/>
               <a:t>README.md; reports/validation/model_final_decision.md; reports/validation/operational_forecast_readiness.md</a:t>
             </a:r>
           </a:p>
@@ -2143,7 +1971,7 @@
                   <a:srgbClr val="E1E8EF"/>
                 </a:solidFill>
               </a:rPr>
-              <a:t>DATA SCIENCE &amp; ML CAPSTONE</a:t>
+              <a:t>DATA SCIENCE · ML · GIS</a:t>
             </a:r>
             <a:endParaRPr sz="750"/>
           </a:p>
@@ -2319,7 +2147,7 @@
                   <a:srgbClr val="FFFFFF"/>
                 </a:solidFill>
               </a:rPr>
-              <a:t>Screening</a:t>
+              <a:t>Location Screening</a:t>
             </a:r>
             <a:endParaRPr sz="5200"/>
           </a:p>
@@ -3498,14 +3326,14 @@
               <a:buNone/>
             </a:pPr>
             <a:r>
-              <a:rPr lang="en-US" sz="2000" b="1" dirty="0">
+              <a:rPr sz="2000" b="1">
                 <a:solidFill>
                   <a:srgbClr val="E8A020"/>
                 </a:solidFill>
               </a:rPr>
               <a:t>-&gt;</a:t>
             </a:r>
-            <a:endParaRPr sz="2000" dirty="0"/>
+            <a:endParaRPr sz="2000"/>
           </a:p>
         </p:txBody>
       </p:sp>
@@ -3905,14 +3733,14 @@
               <a:buNone/>
             </a:pPr>
             <a:r>
-              <a:rPr lang="en-US" sz="2000" b="1" dirty="0">
+              <a:rPr sz="2000" b="1">
                 <a:solidFill>
                   <a:srgbClr val="E8A020"/>
                 </a:solidFill>
               </a:rPr>
               <a:t>-&gt;</a:t>
             </a:r>
-            <a:endParaRPr sz="2000" dirty="0"/>
+            <a:endParaRPr sz="2000"/>
           </a:p>
         </p:txBody>
       </p:sp>
@@ -4593,52 +4421,26 @@
               <a:buNone/>
             </a:pPr>
             <a:r>
-              <a:rPr sz="1100" b="1" dirty="0">
+              <a:rPr sz="1100" b="1">
                 <a:solidFill>
                   <a:srgbClr val="E8A020"/>
                 </a:solidFill>
               </a:rPr>
-              <a:t>KEY </a:t>
-            </a:r>
-            <a:r>
-              <a:rPr lang="en-US" sz="1100" b="1" dirty="0">
-                <a:solidFill>
-                  <a:srgbClr val="E8A020"/>
-                </a:solidFill>
-              </a:rPr>
-              <a:t>FINDING</a:t>
-            </a:r>
-            <a:r>
-              <a:rPr sz="1100" b="1" dirty="0">
-                <a:solidFill>
-                  <a:srgbClr val="E8A020"/>
-                </a:solidFill>
-              </a:rPr>
-              <a:t> 1</a:t>
-            </a:r>
-            <a:endParaRPr lang="en-US" sz="1100" b="1" dirty="0">
-              <a:solidFill>
-                <a:srgbClr val="E8A020"/>
-              </a:solidFill>
-            </a:endParaRPr>
+              <a:t>KEY FINDING 1</a:t>
+            </a:r>
           </a:p>
           <a:p>
             <a:pPr marL="0" indent="0">
               <a:buNone/>
             </a:pPr>
             <a:r>
-              <a:rPr lang="en-US" sz="1000" dirty="0">
+              <a:rPr sz="1000">
                 <a:solidFill>
                   <a:schemeClr val="accent6"/>
                 </a:solidFill>
               </a:rPr>
               <a:t>observed history and 2026 comparative estimate</a:t>
             </a:r>
-            <a:endParaRPr sz="1000" dirty="0">
-              <a:solidFill>
-                <a:schemeClr val="accent6"/>
-              </a:solidFill>
-            </a:endParaRPr>
           </a:p>
         </p:txBody>
       </p:sp>
@@ -4806,26 +4608,14 @@
       </p:sp>
       <p:pic>
         <p:nvPicPr>
-          <p:cNvPr id="9" name="Picture 8">
-            <a:extLst>
-              <a:ext uri="{FF2B5EF4-FFF2-40B4-BE49-F238E27FC236}">
-                <a16:creationId xmlns:a16="http://schemas.microsoft.com/office/drawing/2014/main" id="{8DB38B7C-228F-B2AA-92AC-419C3B16224E}"/>
-              </a:ext>
-            </a:extLst>
-          </p:cNvPr>
+          <p:cNvPr id="44" name="Picture 8"/>
           <p:cNvPicPr>
             <a:picLocks noChangeAspect="1"/>
           </p:cNvPicPr>
           <p:nvPr/>
         </p:nvPicPr>
         <p:blipFill>
-          <a:blip r:embed="rId3">
-            <a:extLst>
-              <a:ext uri="{28A0092B-C50C-407E-A947-70E740481C1C}">
-                <a14:useLocalDpi xmlns:a14="http://schemas.microsoft.com/office/drawing/2010/main" val="0"/>
-              </a:ext>
-            </a:extLst>
-          </a:blip>
+          <a:blip r:embed="rId3"/>
           <a:stretch>
             <a:fillRect/>
           </a:stretch>
@@ -4972,7 +4762,7 @@
           <a:bodyPr/>
           <a:lstStyle/>
           <a:p>
-            <a:endParaRPr lang="en-US" dirty="0"/>
+            <a:endParaRPr/>
           </a:p>
         </p:txBody>
       </p:sp>
@@ -5008,36 +4798,26 @@
               <a:buNone/>
             </a:pPr>
             <a:r>
-              <a:rPr sz="1100" b="1" dirty="0">
+              <a:rPr sz="1100" b="1">
                 <a:solidFill>
                   <a:srgbClr val="E8A020"/>
                 </a:solidFill>
               </a:rPr>
               <a:t>KEY FINDING 2</a:t>
             </a:r>
-            <a:endParaRPr lang="en-US" sz="1100" b="1" dirty="0">
-              <a:solidFill>
-                <a:srgbClr val="E8A020"/>
-              </a:solidFill>
-            </a:endParaRPr>
           </a:p>
           <a:p>
             <a:pPr marL="0" indent="0">
               <a:buNone/>
             </a:pPr>
             <a:r>
-              <a:rPr lang="en-US" sz="1000" dirty="0">
+              <a:rPr sz="1000">
                 <a:solidFill>
                   <a:schemeClr val="accent6"/>
                 </a:solidFill>
               </a:rPr>
               <a:t>complementary context</a:t>
             </a:r>
-            <a:endParaRPr sz="1000" dirty="0">
-              <a:solidFill>
-                <a:schemeClr val="accent6"/>
-              </a:solidFill>
-            </a:endParaRPr>
           </a:p>
         </p:txBody>
       </p:sp>
@@ -7162,36 +6942,26 @@
               <a:buNone/>
             </a:pPr>
             <a:r>
-              <a:rPr sz="1100" b="1" dirty="0">
+              <a:rPr sz="1100" b="1">
                 <a:solidFill>
                   <a:srgbClr val="E8A020"/>
                 </a:solidFill>
               </a:rPr>
               <a:t>KEY FINDING 3 — MODEL</a:t>
             </a:r>
-            <a:endParaRPr lang="en-US" sz="1100" b="1" dirty="0">
-              <a:solidFill>
-                <a:srgbClr val="E8A020"/>
-              </a:solidFill>
-            </a:endParaRPr>
           </a:p>
           <a:p>
             <a:pPr marL="0" indent="0">
               <a:buNone/>
             </a:pPr>
             <a:r>
-              <a:rPr lang="en-US" sz="1000" dirty="0">
+              <a:rPr sz="1000">
                 <a:solidFill>
                   <a:schemeClr val="accent6"/>
                 </a:solidFill>
               </a:rPr>
               <a:t>model comparison</a:t>
             </a:r>
-            <a:endParaRPr sz="1000" dirty="0">
-              <a:solidFill>
-                <a:schemeClr val="accent6"/>
-              </a:solidFill>
-            </a:endParaRPr>
           </a:p>
         </p:txBody>
       </p:sp>
@@ -7324,7 +7094,7 @@
           <a:bodyPr/>
           <a:lstStyle/>
           <a:p>
-            <a:endParaRPr dirty="0"/>
+            <a:endParaRPr/>
           </a:p>
         </p:txBody>
       </p:sp>
@@ -7509,19 +7279,19 @@
           <a:lstStyle/>
           <a:p>
             <a:r>
-              <a:rPr lang="en-US" sz="800" dirty="0"/>
+              <a:rPr sz="800"/>
               <a:t>Historical </a:t>
             </a:r>
             <a:r>
-              <a:rPr lang="en-US" sz="800" b="1" dirty="0"/>
+              <a:rPr sz="800" b="1"/>
               <a:t>recurrence</a:t>
             </a:r>
             <a:r>
-              <a:rPr lang="en-US" sz="800" dirty="0"/>
+              <a:rPr sz="800"/>
               <a:t> benchmark </a:t>
             </a:r>
             <a:r>
-              <a:rPr sz="850" dirty="0">
+              <a:rPr sz="850">
                 <a:solidFill>
                   <a:srgbClr val="1A2638"/>
                 </a:solidFill>
@@ -7529,11 +7299,11 @@
               <a:t> -&gt; </a:t>
             </a:r>
             <a:r>
-              <a:rPr lang="en-US" sz="800" b="1" dirty="0"/>
+              <a:rPr sz="800" b="1"/>
               <a:t>Nine-feature</a:t>
             </a:r>
             <a:r>
-              <a:rPr lang="en-US" sz="800" dirty="0"/>
+              <a:rPr sz="800"/>
               <a:t> Model</a:t>
             </a:r>
           </a:p>
@@ -7647,22 +7417,17 @@
               <a:buNone/>
             </a:pPr>
             <a:r>
-              <a:rPr sz="850" dirty="0">
+              <a:rPr sz="850">
                 <a:solidFill>
                   <a:srgbClr val="1A2638"/>
                 </a:solidFill>
               </a:rPr>
               <a:t>Historical recurrence baseline</a:t>
             </a:r>
-            <a:endParaRPr lang="en-US" sz="850" dirty="0">
-              <a:solidFill>
-                <a:srgbClr val="1A2638"/>
-              </a:solidFill>
-            </a:endParaRPr>
-          </a:p>
-          <a:p>
-            <a:r>
-              <a:rPr lang="en-US" sz="700" i="1" dirty="0">
+          </a:p>
+          <a:p>
+            <a:r>
+              <a:rPr sz="700" i="1">
                 <a:solidFill>
                   <a:schemeClr val="tx1">
                     <a:lumMod val="50000"/>
@@ -7780,45 +7545,21 @@
           <a:lstStyle/>
           <a:p>
             <a:r>
-              <a:rPr sz="850" dirty="0">
+              <a:rPr sz="850">
                 <a:solidFill>
                   <a:srgbClr val="1A2638"/>
                 </a:solidFill>
               </a:rPr>
-              <a:t>Nine-feature </a:t>
-            </a:r>
-            <a:r>
-              <a:rPr lang="en-US" sz="850" dirty="0">
-                <a:solidFill>
-                  <a:srgbClr val="1A2638"/>
-                </a:solidFill>
-              </a:rPr>
-              <a:t>two-stage regression</a:t>
-            </a:r>
-            <a:r>
-              <a:rPr sz="850" dirty="0">
-                <a:solidFill>
-                  <a:srgbClr val="1A2638"/>
-                </a:solidFill>
-              </a:rPr>
-              <a:t> model</a:t>
-            </a:r>
-            <a:r>
-              <a:rPr lang="en-US" sz="850" dirty="0">
-                <a:solidFill>
-                  <a:srgbClr val="1A2638"/>
-                </a:solidFill>
-              </a:rPr>
-              <a:t>:</a:t>
+              <a:t>Nine-feature two-stage regression model:</a:t>
             </a:r>
           </a:p>
           <a:p>
             <a:pPr marL="171450" indent="-171450">
-              <a:buFont typeface="Arial" panose="020B0604020202020204" pitchFamily="34" charset="0"/>
+              <a:buFont typeface="Arial"/>
               <a:buChar char="•"/>
             </a:pPr>
             <a:r>
-              <a:rPr lang="en-US" sz="700" b="1" i="1" dirty="0" err="1">
+              <a:rPr sz="700" b="1" i="1">
                 <a:solidFill>
                   <a:schemeClr val="tx1">
                     <a:lumMod val="50000"/>
@@ -7829,7 +7570,7 @@
               <a:t>HistGradientBoostingClassifier</a:t>
             </a:r>
             <a:r>
-              <a:rPr lang="en-US" sz="700" i="1" dirty="0">
+              <a:rPr sz="700" i="1">
                 <a:solidFill>
                   <a:schemeClr val="tx1">
                     <a:lumMod val="50000"/>
@@ -7842,11 +7583,11 @@
           </a:p>
           <a:p>
             <a:pPr marL="171450" indent="-171450">
-              <a:buFont typeface="Arial" panose="020B0604020202020204" pitchFamily="34" charset="0"/>
+              <a:buFont typeface="Arial"/>
               <a:buChar char="•"/>
             </a:pPr>
             <a:r>
-              <a:rPr lang="en-US" sz="700" b="1" i="1" dirty="0" err="1">
+              <a:rPr sz="700" b="1" i="1">
                 <a:solidFill>
                   <a:schemeClr val="tx1">
                     <a:lumMod val="50000"/>
@@ -7857,7 +7598,7 @@
               <a:t>HistGradientBoostingRegressor</a:t>
             </a:r>
             <a:r>
-              <a:rPr lang="en-US" sz="700" i="1" dirty="0">
+              <a:rPr sz="700" i="1">
                 <a:solidFill>
                   <a:schemeClr val="tx1">
                     <a:lumMod val="50000"/>
@@ -7870,7 +7611,7 @@
           </a:p>
           <a:p>
             <a:r>
-              <a:rPr lang="en-US" sz="700" i="1" dirty="0">
+              <a:rPr sz="700" i="1">
                 <a:solidFill>
                   <a:schemeClr val="tx1">
                     <a:lumMod val="50000"/>
@@ -7880,13 +7621,13 @@
               </a:rPr>
               <a:t>the accepted model using fire history, land cover, terrain, and climate predictors</a:t>
             </a:r>
-            <a:endParaRPr lang="en-US" sz="800" dirty="0"/>
+            <a:endParaRPr sz="800"/>
           </a:p>
           <a:p>
             <a:pPr marL="0" indent="0">
               <a:buNone/>
             </a:pPr>
-            <a:endParaRPr sz="850" b="1" dirty="0"/>
+            <a:endParaRPr sz="850" b="1"/>
           </a:p>
         </p:txBody>
       </p:sp>
@@ -7998,38 +7739,14 @@
               <a:buNone/>
             </a:pPr>
             <a:r>
-              <a:rPr sz="850" dirty="0">
+              <a:rPr sz="850">
                 <a:solidFill>
                   <a:srgbClr val="1A2638"/>
                 </a:solidFill>
               </a:rPr>
-              <a:t>MAE: 0.029</a:t>
-            </a:r>
-            <a:r>
-              <a:rPr lang="en-US" sz="850" dirty="0">
-                <a:solidFill>
-                  <a:srgbClr val="1A2638"/>
-                </a:solidFill>
-              </a:rPr>
-              <a:t>2</a:t>
-            </a:r>
-            <a:r>
-              <a:rPr sz="850" dirty="0">
-                <a:solidFill>
-                  <a:srgbClr val="1A2638"/>
-                </a:solidFill>
-              </a:rPr>
-              <a:t>  -&gt;  0.02</a:t>
-            </a:r>
-            <a:r>
-              <a:rPr lang="en-US" sz="850" dirty="0">
-                <a:solidFill>
-                  <a:srgbClr val="1A2638"/>
-                </a:solidFill>
-              </a:rPr>
-              <a:t>09</a:t>
-            </a:r>
-            <a:endParaRPr sz="850" dirty="0"/>
+              <a:t>MAE: 0.0292  -&gt;  0.0209</a:t>
+            </a:r>
+            <a:endParaRPr sz="850"/>
           </a:p>
         </p:txBody>
       </p:sp>
@@ -8141,38 +7858,14 @@
               <a:buNone/>
             </a:pPr>
             <a:r>
-              <a:rPr sz="850" dirty="0">
+              <a:rPr sz="850">
                 <a:solidFill>
                   <a:srgbClr val="1A2638"/>
                 </a:solidFill>
               </a:rPr>
-              <a:t>RMSE: 0.11</a:t>
-            </a:r>
-            <a:r>
-              <a:rPr lang="en-US" sz="850" dirty="0">
-                <a:solidFill>
-                  <a:srgbClr val="1A2638"/>
-                </a:solidFill>
-              </a:rPr>
-              <a:t>06</a:t>
-            </a:r>
-            <a:r>
-              <a:rPr sz="850" dirty="0">
-                <a:solidFill>
-                  <a:srgbClr val="1A2638"/>
-                </a:solidFill>
-              </a:rPr>
-              <a:t>  -&gt;  0.111</a:t>
-            </a:r>
-            <a:r>
-              <a:rPr lang="en-US" sz="850" dirty="0">
-                <a:solidFill>
-                  <a:srgbClr val="1A2638"/>
-                </a:solidFill>
-              </a:rPr>
-              <a:t>0</a:t>
-            </a:r>
-            <a:endParaRPr sz="850" dirty="0"/>
+              <a:t>RMSE: 0.1106  -&gt;  0.1110</a:t>
+            </a:r>
+            <a:endParaRPr sz="850"/>
           </a:p>
         </p:txBody>
       </p:sp>
@@ -8284,41 +7977,17 @@
               <a:buNone/>
             </a:pPr>
             <a:r>
-              <a:rPr sz="850" dirty="0">
+              <a:rPr sz="850">
                 <a:solidFill>
                   <a:srgbClr val="1A2638"/>
                 </a:solidFill>
               </a:rPr>
-              <a:t>Capture@20%: </a:t>
-            </a:r>
-            <a:r>
-              <a:rPr lang="en-US" sz="850" dirty="0">
-                <a:solidFill>
-                  <a:srgbClr val="1A2638"/>
-                </a:solidFill>
-              </a:rPr>
-              <a:t>40.2%</a:t>
-            </a:r>
-            <a:r>
-              <a:rPr sz="850" dirty="0">
-                <a:solidFill>
-                  <a:srgbClr val="1A2638"/>
-                </a:solidFill>
-              </a:rPr>
-              <a:t>  -&gt;  </a:t>
-            </a:r>
-            <a:r>
-              <a:rPr lang="en-US" sz="850" dirty="0">
-                <a:solidFill>
-                  <a:srgbClr val="1A2638"/>
-                </a:solidFill>
-              </a:rPr>
-              <a:t>57.2%</a:t>
-            </a:r>
-          </a:p>
-          <a:p>
-            <a:r>
-              <a:rPr lang="en-US" sz="700" i="1" dirty="0">
+              <a:t>Capture@20%: 40.2%  -&gt;  57.2%</a:t>
+            </a:r>
+          </a:p>
+          <a:p>
+            <a:r>
+              <a:rPr sz="700" i="1">
                 <a:solidFill>
                   <a:schemeClr val="tx1">
                     <a:lumMod val="50000"/>
@@ -8436,7 +8105,7 @@
           <a:lstStyle/>
           <a:p>
             <a:r>
-              <a:rPr lang="en-US" sz="800" dirty="0"/>
+              <a:rPr sz="800"/>
               <a:t>Final test: predictor years T=2022–2024; outcomes T+1=2023–2025</a:t>
             </a:r>
           </a:p>
@@ -9033,14 +8702,14 @@
               <a:buNone/>
             </a:pPr>
             <a:r>
-              <a:rPr sz="750" b="1" dirty="0">
+              <a:rPr sz="750" b="1">
                 <a:solidFill>
                   <a:srgbClr val="E8A020"/>
                 </a:solidFill>
               </a:rPr>
               <a:t>It is a ranking diagnostic, not a buyer threshold.</a:t>
             </a:r>
-            <a:endParaRPr sz="750" dirty="0"/>
+            <a:endParaRPr sz="750"/>
           </a:p>
         </p:txBody>
       </p:sp>
@@ -10022,14 +9691,14 @@
               <a:buNone/>
             </a:pPr>
             <a:r>
-              <a:rPr lang="en-US" sz="2000" b="1" dirty="0">
+              <a:rPr sz="2000" b="1">
                 <a:solidFill>
                   <a:srgbClr val="E8A020"/>
                 </a:solidFill>
               </a:rPr>
               <a:t>-&gt;</a:t>
             </a:r>
-            <a:endParaRPr sz="2000" dirty="0"/>
+            <a:endParaRPr sz="2000"/>
           </a:p>
         </p:txBody>
       </p:sp>
@@ -10429,14 +10098,14 @@
               <a:buNone/>
             </a:pPr>
             <a:r>
-              <a:rPr lang="en-US" sz="2000" b="1" dirty="0">
+              <a:rPr sz="2000" b="1">
                 <a:solidFill>
                   <a:srgbClr val="E8A020"/>
                 </a:solidFill>
               </a:rPr>
               <a:t>-&gt;</a:t>
             </a:r>
-            <a:endParaRPr sz="2000" dirty="0"/>
+            <a:endParaRPr sz="2000"/>
           </a:p>
         </p:txBody>
       </p:sp>
@@ -10457,7 +10126,7 @@
         <p:spPr>
           <a:xfrm>
             <a:off x="6345936" y="1371600"/>
-            <a:ext cx="2651760" cy="2834640"/>
+            <a:ext cx="2514600" cy="2834640"/>
           </a:xfrm>
           <a:prstGeom prst="rect">
             <a:avLst/>
@@ -10497,7 +10166,7 @@
         <p:spPr>
           <a:xfrm>
             <a:off x="6345936" y="1371600"/>
-            <a:ext cx="2651760" cy="384048"/>
+            <a:ext cx="2514600" cy="384048"/>
           </a:xfrm>
           <a:prstGeom prst="rect">
             <a:avLst/>
@@ -10616,7 +10285,7 @@
         <p:spPr>
           <a:xfrm>
             <a:off x="6437376" y="2048256"/>
-            <a:ext cx="2468880" cy="502920"/>
+            <a:ext cx="2341179" cy="502920"/>
           </a:xfrm>
           <a:prstGeom prst="rect">
             <a:avLst/>
@@ -10659,7 +10328,7 @@
         <p:spPr>
           <a:xfrm>
             <a:off x="6437376" y="2578608"/>
-            <a:ext cx="2468880" cy="502920"/>
+            <a:ext cx="2341179" cy="502920"/>
           </a:xfrm>
           <a:prstGeom prst="rect">
             <a:avLst/>
@@ -13766,14 +13435,14 @@
               <a:buNone/>
             </a:pPr>
             <a:r>
-              <a:rPr lang="en-US" sz="2000" b="1" dirty="0">
+              <a:rPr sz="2000" b="1">
                 <a:solidFill>
                   <a:srgbClr val="E8A020"/>
                 </a:solidFill>
               </a:rPr>
               <a:t>-&gt;</a:t>
             </a:r>
-            <a:endParaRPr sz="2000" dirty="0"/>
+            <a:endParaRPr sz="2000"/>
           </a:p>
         </p:txBody>
       </p:sp>
@@ -14173,14 +13842,14 @@
               <a:buNone/>
             </a:pPr>
             <a:r>
-              <a:rPr lang="en-US" sz="2000" b="1" dirty="0">
+              <a:rPr sz="2000" b="1">
                 <a:solidFill>
                   <a:srgbClr val="E8A020"/>
                 </a:solidFill>
               </a:rPr>
               <a:t>-&gt;</a:t>
             </a:r>
-            <a:endParaRPr sz="2000" dirty="0"/>
+            <a:endParaRPr sz="2000"/>
           </a:p>
         </p:txBody>
       </p:sp>
@@ -14201,7 +13870,7 @@
         <p:spPr>
           <a:xfrm>
             <a:off x="6345936" y="1371600"/>
-            <a:ext cx="2651760" cy="2834640"/>
+            <a:ext cx="2514600" cy="2834640"/>
           </a:xfrm>
           <a:prstGeom prst="rect">
             <a:avLst/>
@@ -14241,7 +13910,7 @@
         <p:spPr>
           <a:xfrm>
             <a:off x="6345936" y="1371600"/>
-            <a:ext cx="2651760" cy="384048"/>
+            <a:ext cx="2523744" cy="384048"/>
           </a:xfrm>
           <a:prstGeom prst="rect">
             <a:avLst/>
@@ -14360,7 +14029,7 @@
         <p:spPr>
           <a:xfrm>
             <a:off x="6437376" y="2048256"/>
-            <a:ext cx="2468880" cy="502920"/>
+            <a:ext cx="2340864" cy="502920"/>
           </a:xfrm>
           <a:prstGeom prst="rect">
             <a:avLst/>
@@ -14375,14 +14044,14 @@
               <a:buNone/>
             </a:pPr>
             <a:r>
-              <a:rPr sz="850">
+              <a:rPr sz="850" dirty="0">
                 <a:solidFill>
                   <a:srgbClr val="1A2638"/>
                 </a:solidFill>
               </a:rPr>
               <a:t>When new completed-year data and the 2026 outcome are available, rerun the fixed workflow and evaluate the 2026 estimate.</a:t>
             </a:r>
-            <a:endParaRPr sz="850"/>
+            <a:endParaRPr sz="850" dirty="0"/>
           </a:p>
         </p:txBody>
       </p:sp>
@@ -14403,7 +14072,7 @@
         <p:spPr>
           <a:xfrm>
             <a:off x="6437376" y="2578608"/>
-            <a:ext cx="2468880" cy="502920"/>
+            <a:ext cx="2340864" cy="502920"/>
           </a:xfrm>
           <a:prstGeom prst="rect">
             <a:avLst/>

--- a/reports/presentation/wildfire_exposure_screening_capstone_final.pptx
+++ b/reports/presentation/wildfire_exposure_screening_capstone_final.pptx
@@ -2,21 +2,21 @@
 <file path=ppt/presentation.xml><?xml version="1.0" encoding="utf-8"?>
 <p:presentation xmlns:p="http://schemas.openxmlformats.org/presentationml/2006/main">
   <p:sldMasterIdLst>
-    <p:sldMasterId xmlns:r="http://schemas.openxmlformats.org/officeDocument/2006/relationships" id="2147483648" r:id="R6a850674f28b41bd"/>
+    <p:sldMasterId xmlns:r="http://schemas.openxmlformats.org/officeDocument/2006/relationships" id="2147483648" r:id="Re4bbadf8fee84872"/>
   </p:sldMasterIdLst>
   <p:notesMasterIdLst>
-    <p:notesMasterId xmlns:r="http://schemas.openxmlformats.org/officeDocument/2006/relationships" r:id="R828ffdde7a3f4a46"/>
+    <p:notesMasterId xmlns:r="http://schemas.openxmlformats.org/officeDocument/2006/relationships" r:id="R0aff1b2607dd4085"/>
   </p:notesMasterIdLst>
   <p:sldIdLst>
-    <p:sldId xmlns:r="http://schemas.openxmlformats.org/officeDocument/2006/relationships" id="256" r:id="Rb6160a0e36e74486"/>
-    <p:sldId xmlns:r="http://schemas.openxmlformats.org/officeDocument/2006/relationships" id="257" r:id="Rd7bf4c9e5eba43e8"/>
-    <p:sldId xmlns:r="http://schemas.openxmlformats.org/officeDocument/2006/relationships" id="258" r:id="R641a2101a7af434f"/>
-    <p:sldId xmlns:r="http://schemas.openxmlformats.org/officeDocument/2006/relationships" id="259" r:id="R9d612d399ebd4651"/>
-    <p:sldId xmlns:r="http://schemas.openxmlformats.org/officeDocument/2006/relationships" id="260" r:id="R8ca9ab63b6d242c4"/>
-    <p:sldId xmlns:r="http://schemas.openxmlformats.org/officeDocument/2006/relationships" id="261" r:id="Ra5af360aade74f54"/>
-    <p:sldId xmlns:r="http://schemas.openxmlformats.org/officeDocument/2006/relationships" id="262" r:id="Rb7c59d1378024732"/>
-    <p:sldId xmlns:r="http://schemas.openxmlformats.org/officeDocument/2006/relationships" id="263" r:id="R5350da04be4f4385"/>
-    <p:sldId xmlns:r="http://schemas.openxmlformats.org/officeDocument/2006/relationships" id="264" r:id="Re4377d5b80564fa6"/>
+    <p:sldId xmlns:r="http://schemas.openxmlformats.org/officeDocument/2006/relationships" id="256" r:id="Rcad490e820d441b8"/>
+    <p:sldId xmlns:r="http://schemas.openxmlformats.org/officeDocument/2006/relationships" id="257" r:id="R088d2814a5b84d32"/>
+    <p:sldId xmlns:r="http://schemas.openxmlformats.org/officeDocument/2006/relationships" id="258" r:id="R2224af1b8499482a"/>
+    <p:sldId xmlns:r="http://schemas.openxmlformats.org/officeDocument/2006/relationships" id="259" r:id="Rc928aa4d4918417b"/>
+    <p:sldId xmlns:r="http://schemas.openxmlformats.org/officeDocument/2006/relationships" id="260" r:id="R70e430d44022412e"/>
+    <p:sldId xmlns:r="http://schemas.openxmlformats.org/officeDocument/2006/relationships" id="261" r:id="R0d3bee12749b4e10"/>
+    <p:sldId xmlns:r="http://schemas.openxmlformats.org/officeDocument/2006/relationships" id="262" r:id="R884088e941bb45aa"/>
+    <p:sldId xmlns:r="http://schemas.openxmlformats.org/officeDocument/2006/relationships" id="263" r:id="R51923257f72c4092"/>
+    <p:sldId xmlns:r="http://schemas.openxmlformats.org/officeDocument/2006/relationships" id="264" r:id="R5be5145a01b44216"/>
   </p:sldIdLst>
   <p:sldSz cx="9144000" cy="5143500"/>
   <p:notesSz cx="6858000" cy="9144000"/>
@@ -626,16 +626,21 @@
           </a:p>
           <a:p xmlns:a="http://schemas.openxmlformats.org/drawingml/2006/main">
             <a:r>
+              <a:t>The 2000–2025 range shown on this slide is ICNF source archive coverage. It is not one training or evaluation period. Earlier ICNF years supply the ten-year pre-T fire-history windows, while later years also supply observed T+1 outcomes.</a:t>
+            </a:r>
+            <a:endParaRPr/>
+          </a:p>
+          <a:p xmlns:a="http://schemas.openxmlformats.org/drawingml/2006/main">
+            <a:r>
+              <a:rPr b="1"/>
               <a:t>CLC land cover and Copernicus DEM provide landscape and terrain context. ERA5-Land provides warm-season temperature, precipitation, and shallow soil-water conditions from the predictor year only.</a:t>
             </a:r>
             <a:endParaRPr/>
           </a:p>
           <a:p xmlns:a="http://schemas.openxmlformats.org/drawingml/2006/main">
             <a:r>
-              <a:rPr b="1"/>
               <a:t>The 2 km area is not a second grid. It is an outward context buffer around each 1 km cell, used to measure nearby forest/shrub, slope, and historical fire recurrence.”</a:t>
             </a:r>
-            <a:endParaRPr/>
           </a:p>
           <a:p xmlns:a="http://schemas.openxmlformats.org/drawingml/2006/main">
             <a:r>
@@ -644,7 +649,7 @@
           </a:p>
           <a:p xmlns:a="http://schemas.openxmlformats.org/drawingml/2006/main">
             <a:r>
-              <a:t>Transition: “Next, I will show how these historical rows were separated for training, validation, final temporal evaluation, and the current 2026 estimate.”</a:t>
+              <a:t>Transition: “Next, I will show the exact training, validation, final-evaluation, refit, and current-estimate periods.”</a:t>
             </a:r>
           </a:p>
           <a:p xmlns:a="http://schemas.openxmlformats.org/drawingml/2006/main">
@@ -659,7 +664,7 @@
           </a:p>
           <a:p xmlns:a="http://schemas.openxmlformats.org/drawingml/2006/main">
             <a:r>
-              <a:t>docs/data_dictionary.md; reports/validation/canonical_full_scope_readiness.md</a:t>
+              <a:t>docs/data_dictionary.md; docs/source_plan.md</a:t>
             </a:r>
           </a:p>
         </p:txBody>
@@ -730,7 +735,7 @@
           <a:p xmlns:a="http://schemas.openxmlformats.org/drawingml/2006/main">
             <a:r>
               <a:rPr b="1"/>
-              <a:t>Main message: Historical data are separated in time before the current 2026 estimate is produced.</a:t>
+              <a:t>Main message: Every model period uses the same rule: predictors from year T are compared with the observed burned-share outcome in T+1.</a:t>
             </a:r>
             <a:endParaRPr/>
           </a:p>
@@ -748,24 +753,24 @@
           </a:p>
           <a:p xmlns:a="http://schemas.openxmlformats.org/drawingml/2006/main">
             <a:r>
-              <a:t>“Each analytical row is one mainland Portugal 1 km cell in predictor year T. Nine predictors describe earlier fire recurrence, land cover, terrain, and June-to-September climate. The target is the proportion of that cell’s land area that burned in T+1.</a:t>
-            </a:r>
-          </a:p>
-          <a:p xmlns:a="http://schemas.openxmlformats.org/drawingml/2006/main">
-            <a:r>
-              <a:t>Candidate models were fitted on T=2010–2019 and selected using validation years T=2020–2021. After the specification was frozen, it was evaluated once on T=2022–2024; those results were not used to tune the model.</a:t>
-            </a:r>
-          </a:p>
-          <a:p xmlns:a="http://schemas.openxmlformats.org/drawingml/2006/main">
-            <a:r>
-              <a:t>The selected specification was then refitted on all completed labelled rows through T=2024 and applied to T=2025 predictors to estimate 2026. The 2026 layer is target-free and can be evaluated only after ICNF publishes the observed 2026 burned areas.</a:t>
+              <a:t>“The date ranges have different roles and do not overlap during model selection.</a:t>
+            </a:r>
+          </a:p>
+          <a:p xmlns:a="http://schemas.openxmlformats.org/drawingml/2006/main">
+            <a:r>
+              <a:t>Model fitting uses predictor years T=2010–2019 and observed outcomes 2011–2020. Development validation uses T=2020–2021 and outcomes 2021–2022 to select the specification. The frozen specification is then evaluated once using T=2022–2024 and outcomes 2023–2025. Those final-evaluation results do not tune the model.</a:t>
+            </a:r>
+          </a:p>
+          <a:p xmlns:a="http://schemas.openxmlformats.org/drawingml/2006/main">
+            <a:r>
+              <a:t>For the operational 2026 estimate, the selected specification is refitted using all labelled predictor years T=2010–2024, whose outcomes cover 2011–2025. It is then applied to T=2025 predictors to estimate 2026. No observed 2026 outcome is available or used.</a:t>
             </a:r>
             <a:endParaRPr/>
           </a:p>
           <a:p xmlns:a="http://schemas.openxmlformats.org/drawingml/2006/main">
             <a:r>
               <a:rPr b="1"/>
-              <a:t>The temporal safeguard is simple: information from T+1 is used only as a historical target, never as a predictor.”</a:t>
+              <a:t>The temporal safeguard is that T+1 information is always a historical target, never a predictor.”</a:t>
             </a:r>
             <a:endParaRPr/>
           </a:p>
@@ -776,7 +781,7 @@
           </a:p>
           <a:p xmlns:a="http://schemas.openxmlformats.org/drawingml/2006/main">
             <a:r>
-              <a:t>Transition: “With the temporal separation clear, the next slides present the geographical evidence and model results.”</a:t>
+              <a:t>Transition: “The next slides separate the descriptive historical screen, the official reference layer, and the model estimate.”</a:t>
             </a:r>
           </a:p>
           <a:p xmlns:a="http://schemas.openxmlformats.org/drawingml/2006/main">
@@ -862,69 +867,74 @@
           <a:p xmlns:a="http://schemas.openxmlformats.org/drawingml/2006/main">
             <a:r>
               <a:rPr b="1"/>
-              <a:t>Main message:</a:t>
-            </a:r>
-            <a:r>
-              <a:t> Wildfire exposure patterns vary geographically, so a national location search can be narrowed using comparative evidence.</a:t>
+              <a:t>Main message: Wildfire exposure patterns vary geographically, so a national location search can be narrowed using comparative evidence.</a:t>
             </a:r>
           </a:p>
           <a:p xmlns:a="http://schemas.openxmlformats.org/drawingml/2006/main">
             <a:r>
               <a:t>These layers provide different types of evidence and should not be added together or interpreted as one score. The comparison helps identify broad areas for further investigation; it does not certify a location.</a:t>
             </a:r>
-            <a:br/>
-            <a:br/>
+            <a:endParaRPr/>
+          </a:p>
+          <a:p xmlns:a="http://schemas.openxmlformats.org/drawingml/2006/main">
+            <a:r>
+              <a:t/>
+            </a:r>
+          </a:p>
+          <a:p xmlns:a="http://schemas.openxmlformats.org/drawingml/2006/main">
+            <a:r>
+              <a:t>What to say:</a:t>
+            </a:r>
+          </a:p>
+          <a:p xmlns:a="http://schemas.openxmlformats.org/drawingml/2006/main">
+            <a:r>
+              <a:t>“This slide shows three different views of the same national geography.</a:t>
+            </a:r>
+          </a:p>
+          <a:p xmlns:a="http://schemas.openxmlformats.org/drawingml/2006/main">
+            <a:r>
+              <a:t>The first map shows observed historical recurrence: how many distinct years had burned-area evidence between 2016 and 2025 within the 2 km context around each 1 km cell. This 2016–2025 window is a separate descriptive screening period, not the model training period.</a:t>
+            </a:r>
+          </a:p>
+          <a:p xmlns:a="http://schemas.openxmlformats.org/drawingml/2006/main">
+            <a:r>
+              <a:t>The second map is the official ICNF structural-hazard classification. It describes persistent landscape conditions rather than what burned in one particular year.</a:t>
+            </a:r>
+          </a:p>
+          <a:p xmlns:a="http://schemas.openxmlformats.org/drawingml/2006/main">
+            <a:r>
+              <a:t>The third map is the project’s target-free 2026 comparative estimate. It uses T=2025 predictor inputs and does not use an observed 2026 outcome.</a:t>
+            </a:r>
+            <a:endParaRPr/>
+          </a:p>
+          <a:p xmlns:a="http://schemas.openxmlformats.org/drawingml/2006/main">
             <a:r>
               <a:rPr b="1"/>
-              <a:t>What to say:</a:t>
+              <a:t>These maps should not be added together into one score. They provide different evidence for comparing broad areas and deciding where additional research is worthwhile.”</a:t>
+            </a:r>
+          </a:p>
+          <a:p xmlns:a="http://schemas.openxmlformats.org/drawingml/2006/main">
+            <a:r>
+              <a:t/>
             </a:r>
             <a:endParaRPr/>
           </a:p>
           <a:p xmlns:a="http://schemas.openxmlformats.org/drawingml/2006/main">
             <a:r>
-              <a:t>“This slide shows three different views of the same national geography.</a:t>
-            </a:r>
-          </a:p>
-          <a:p xmlns:a="http://schemas.openxmlformats.org/drawingml/2006/main">
-            <a:r>
-              <a:t>The first map shows observed historical recurrence: how many distinct years had burned-area evidence between 2016 and 2025 within the 2 km context around each 1 km cell.</a:t>
-            </a:r>
-          </a:p>
-          <a:p xmlns:a="http://schemas.openxmlformats.org/drawingml/2006/main">
-            <a:r>
-              <a:t>The second map is the ICNF and official Portuguese government map showing where the landscape has more or less underlying potential to support severe wildfire conditions. It describes persistent landscape hazard conditions rather than what burned in one particular year.</a:t>
-            </a:r>
-          </a:p>
-          <a:p xmlns:a="http://schemas.openxmlformats.org/drawingml/2006/main">
-            <a:r>
-              <a:t>The third map is the project’s 2026 comparative estimate. It uses information available through 2025 to rank 1 km cells by estimated next-year burned share.</a:t>
-            </a:r>
-          </a:p>
-          <a:p xmlns:a="http://schemas.openxmlformats.org/drawingml/2006/main">
-            <a:r>
-              <a:t>These maps should not be added together into one score. They provide different evidence for comparing broad areas and deciding where additional research is worthwhile.”</a:t>
-            </a:r>
-          </a:p>
-          <a:p xmlns:a="http://schemas.openxmlformats.org/drawingml/2006/main">
-            <a:endParaRPr/>
-          </a:p>
-          <a:p xmlns:a="http://schemas.openxmlformats.org/drawingml/2006/main">
-            <a:r>
-              <a:rPr b="1"/>
-              <a:t>Transition:</a:t>
-            </a:r>
-            <a:r>
-              <a:t> “Because historical recurrence and official structural hazard measure different things, the next question is why it is useful to compare them.”</a:t>
-            </a:r>
-          </a:p>
-          <a:p xmlns:a="http://schemas.openxmlformats.org/drawingml/2006/main">
-            <a:endParaRPr/>
+              <a:t>Transition: “Because historical recurrence and official structural hazard measure different things, the next question is why it is useful to compare them.”</a:t>
+            </a:r>
+          </a:p>
+          <a:p xmlns:a="http://schemas.openxmlformats.org/drawingml/2006/main">
+            <a:r>
+              <a:t/>
+            </a:r>
           </a:p>
           <a:p xmlns:a="http://schemas.openxmlformats.org/drawingml/2006/main">
             <a:r>
               <a:t>[Sources]</a:t>
             </a:r>
-            <a:br/>
+          </a:p>
+          <a:p xmlns:a="http://schemas.openxmlformats.org/drawingml/2006/main">
             <a:r>
               <a:t>reports/figures/historical_wildfire_exposure_screening_mainland_portugal.png; reports/validation/historical_exposure_screening_and_icnf_comparison.md; qgis/README.md; reports/validation/operational_forecast_2026_validation.md</a:t>
             </a:r>
@@ -1125,13 +1135,13 @@
           <a:p xmlns:a="http://schemas.openxmlformats.org/drawingml/2006/main">
             <a:r>
               <a:rPr b="1"/>
-              <a:t>Main message:</a:t>
-            </a:r>
-            <a:r>
-              <a:t> The nine-feature two-stage regression improves average comparative error and burned-share ranking over historical recurrence alone, while extreme fire outcomes remain difficult.</a:t>
-            </a:r>
-          </a:p>
-          <a:p xmlns:a="http://schemas.openxmlformats.org/drawingml/2006/main">
+              <a:t>Main message: The nine-feature two-stage regression improves average comparative error and burned-share ranking over historical recurrence alone, while extreme fire outcomes remain difficult.</a:t>
+            </a:r>
+          </a:p>
+          <a:p xmlns:a="http://schemas.openxmlformats.org/drawingml/2006/main">
+            <a:r>
+              <a:t/>
+            </a:r>
             <a:endParaRPr b="1"/>
           </a:p>
           <a:p xmlns:a="http://schemas.openxmlformats.org/drawingml/2006/main">
@@ -1139,161 +1149,71 @@
               <a:rPr b="1"/>
               <a:t>What to say:</a:t>
             </a:r>
-            <a:br/>
-            <a:r>
-              <a:t>“This slide compares two approaches using the held-out final period: predictor years </a:t>
-            </a:r>
+          </a:p>
+          <a:p xmlns:a="http://schemas.openxmlformats.org/drawingml/2006/main">
+            <a:r>
+              <a:t>“This slide compares two approaches using the final temporal evaluation: predictor years T=2022–2024 and observed outcomes 2023–2025.</a:t>
+            </a:r>
+          </a:p>
+          <a:p xmlns:a="http://schemas.openxmlformats.org/drawingml/2006/main">
+            <a:r>
+              <a:t>The historical-recurrence baseline is a transparent project benchmark. It groups training records by the number of previously burned years in the 2 km context and uses the training-period average next-year burned share for each group. It is an empirical project benchmark, not a library model.</a:t>
+            </a:r>
+          </a:p>
+          <a:p xmlns:a="http://schemas.openxmlformats.org/drawingml/2006/main">
+            <a:r>
+              <a:t>The nine-feature model uses two HistGradientBoosting components. The first estimates whether burning occurs in a cell. The second estimates the positive burned share when burning occurs. Their outputs are combined into one continuous estimated burned share.</a:t>
+            </a:r>
+          </a:p>
+          <a:p xmlns:a="http://schemas.openxmlformats.org/drawingml/2006/main">
+            <a:r>
+              <a:t>In the final temporal evaluation, the model lowers MAE from 0.0292 to 0.0209. RMSE is almost unchanged but slightly higher, from 0.1106 to 0.1110, showing that larger and more extreme outcomes remain difficult.”</a:t>
+            </a:r>
+            <a:endParaRPr/>
+          </a:p>
+          <a:p xmlns:a="http://schemas.openxmlformats.org/drawingml/2006/main">
             <a:r>
               <a:rPr b="1"/>
-              <a:t>2022 - 2024</a:t>
-            </a:r>
-            <a:r>
-              <a:t> and observed outcomes </a:t>
-            </a:r>
+              <a:t/>
+            </a:r>
+          </a:p>
+          <a:p xmlns:a="http://schemas.openxmlformats.org/drawingml/2006/main">
+            <a:r>
+              <a:t>Capture@20% checks the ranking retrospectively. For each pair—T=2022 → outcome 2023, T=2023 → outcome 2024, and T=2024 → outcome 2025—the model ranks cells using T-only predictors. We then measure how much of the observed burned-share mass occurred within the highest-scored 20% of cells.</a:t>
+            </a:r>
+          </a:p>
+          <a:p xmlns:a="http://schemas.openxmlformats.org/drawingml/2006/main">
+            <a:r>
+              <a:t>Across this final evaluation, the historical baseline captured 40.2% of observed burned-share mass in its top-ranked 20%; the nine-feature model captured 57.2%. This does not mean that 20% of the land burned. It is a ranking diagnostic, not a buyer threshold or a property-level forecast.</a:t>
+            </a:r>
+          </a:p>
+          <a:p xmlns:a="http://schemas.openxmlformats.org/drawingml/2006/main">
+            <a:r>
+              <a:t/>
+            </a:r>
+          </a:p>
+          <a:p xmlns:a="http://schemas.openxmlformats.org/drawingml/2006/main">
+            <a:r>
+              <a:t>Transition: “The practical question is how this comparative estimate can help organise broad-area research.”</a:t>
+            </a:r>
+            <a:endParaRPr/>
+          </a:p>
+          <a:p xmlns:a="http://schemas.openxmlformats.org/drawingml/2006/main">
             <a:r>
               <a:rPr b="1"/>
-              <a:t>2023 - 2025</a:t>
-            </a:r>
-            <a:r>
-              <a:t>.</a:t>
-            </a:r>
-          </a:p>
-          <a:p xmlns:a="http://schemas.openxmlformats.org/drawingml/2006/main">
-            <a:r>
-              <a:t>The historical-recurrence baseline is a transparent project benchmark. It groups training records by the number of previously burned years in the 2 km context and uses the training-period average next-year burned share for each group. It is an empirical project benchmark, not a library model.</a:t>
-            </a:r>
-          </a:p>
-          <a:p xmlns:a="http://schemas.openxmlformats.org/drawingml/2006/main">
-            <a:r>
-              <a:t>The nine-feature Model V2 uses two HistGradientBoosting components. The first estimates whether burning is likely in a cell. The second estimates how much of the cell’s land area may burn when burning occurs. These two parts are combined into one continuous estimated burned share.</a:t>
-            </a:r>
-          </a:p>
-          <a:p xmlns:a="http://schemas.openxmlformats.org/drawingml/2006/main">
-            <a:r>
-              <a:t>On the final test, Model V2 lowers MAE from </a:t>
-            </a:r>
+              <a:t/>
+            </a:r>
+          </a:p>
+          <a:p xmlns:a="http://schemas.openxmlformats.org/drawingml/2006/main">
+            <a:r>
+              <a:t>[Sources]</a:t>
+            </a:r>
+            <a:endParaRPr b="1"/>
+          </a:p>
+          <a:p xmlns:a="http://schemas.openxmlformats.org/drawingml/2006/main">
             <a:r>
               <a:rPr b="1"/>
-              <a:t>0.0292 to 0.0209</a:t>
-            </a:r>
-            <a:r>
-              <a:t>. RMSE is almost unchanged but slightly higher, from </a:t>
-            </a:r>
-            <a:r>
-              <a:rPr b="1"/>
-              <a:t>0.1106 to 0.1110</a:t>
-            </a:r>
-            <a:r>
-              <a:t>, showing that larger and more extreme fire outcomes remain difficult.”</a:t>
-            </a:r>
-          </a:p>
-          <a:p xmlns:a="http://schemas.openxmlformats.org/drawingml/2006/main">
-            <a:endParaRPr/>
-          </a:p>
-          <a:p xmlns:a="http://schemas.openxmlformats.org/drawingml/2006/main">
-            <a:r>
-              <a:rPr b="1"/>
-              <a:t>Capture@20% is a validation test of the ranking.</a:t>
-            </a:r>
-            <a:r>
-              <a:t> For each predictor year, the model ranks cells using information from year </a:t>
-            </a:r>
-            <a:r>
-              <a:rPr b="1"/>
-              <a:t>T</a:t>
-            </a:r>
-            <a:r>
-              <a:t> and estimates burned share for </a:t>
-            </a:r>
-            <a:r>
-              <a:rPr b="1"/>
-              <a:t>T+1</a:t>
-            </a:r>
-            <a:r>
-              <a:t>. For example, for </a:t>
-            </a:r>
-            <a:r>
-              <a:rPr b="1"/>
-              <a:t>2024 -&gt; 2025</a:t>
-            </a:r>
-            <a:r>
-              <a:t>, it ranks cells using 2024 predictor data and is later checked against observed ICNF burned areas from 2025.</a:t>
-            </a:r>
-          </a:p>
-          <a:p xmlns:a="http://schemas.openxmlformats.org/drawingml/2006/main">
-            <a:r>
-              <a:t>The final evaluation covers </a:t>
-            </a:r>
-            <a:r>
-              <a:rPr b="1"/>
-              <a:t>2022 -&gt; 2023, 2023 -&gt; 2024, and 2024 -&gt; 2025</a:t>
-            </a:r>
-            <a:r>
-              <a:t>. We select the highest-scored 20% of cells and measure how much of the total observed burned-share mass occurred within those cells.</a:t>
-            </a:r>
-          </a:p>
-          <a:p xmlns:a="http://schemas.openxmlformats.org/drawingml/2006/main">
-            <a:r>
-              <a:t>Across the final test, the historical baseline captured </a:t>
-            </a:r>
-            <a:r>
-              <a:rPr b="1"/>
-              <a:t>40.2%</a:t>
-            </a:r>
-            <a:r>
-              <a:t> of observed burned-share mass in its top-ranked 20% of cells. Model V2 captured </a:t>
-            </a:r>
-            <a:r>
-              <a:rPr b="1"/>
-              <a:t>57.2%</a:t>
-            </a:r>
-            <a:r>
-              <a:t>.</a:t>
-            </a:r>
-          </a:p>
-          <a:p xmlns:a="http://schemas.openxmlformats.org/drawingml/2006/main">
-            <a:r>
-              <a:t>This does not mean that 20% of the land burned. It is a retrospective ranking diagnostic, not a buyer threshold or a property-level forecast. The same logic could later be applied to </a:t>
-            </a:r>
-            <a:r>
-              <a:rPr b="1"/>
-              <a:t>2035 -&gt; 2036</a:t>
-            </a:r>
-            <a:r>
-              <a:t>, but only after the 2036 outcome data become available.”</a:t>
-            </a:r>
-          </a:p>
-          <a:p xmlns:a="http://schemas.openxmlformats.org/drawingml/2006/main">
-            <a:endParaRPr/>
-          </a:p>
-          <a:p xmlns:a="http://schemas.openxmlformats.org/drawingml/2006/main">
-            <a:r>
-              <a:rPr b="1"/>
-              <a:t>Transition:</a:t>
-            </a:r>
-            <a:r>
-              <a:t> “The practical question is whether the model provides a useful ranking for broad-area screening.”</a:t>
-            </a:r>
-          </a:p>
-          <a:p xmlns:a="http://schemas.openxmlformats.org/drawingml/2006/main">
-            <a:endParaRPr b="1"/>
-          </a:p>
-          <a:p xmlns:a="http://schemas.openxmlformats.org/drawingml/2006/main">
-            <a:r>
-              <a:rPr b="1"/>
-              <a:t>[Sources]</a:t>
-            </a:r>
-            <a:br/>
-            <a:r>
-              <a:t>reports/validation/model_final_decision.md</a:t>
-            </a:r>
-            <a:br/>
-            <a:r>
-              <a:t>reports/validation/final_temporal_test_2022_2024.md</a:t>
-            </a:r>
-            <a:br/>
-            <a:r>
-              <a:t>reports/figures/model_final_test_metric_comparison.png</a:t>
+              <a:t>reports/validation/model_final_decision.md; reports/validation/final_temporal_test_2022_2024.md; reports/figures/model_final_test_metric_comparison.png</a:t>
             </a:r>
           </a:p>
         </p:txBody>
@@ -1731,7 +1651,7 @@
   </p:cSld>
   <p:clrMap bg1="lt1" tx1="dk1" bg2="lt2" tx2="dk2" accent1="accent1" accent2="accent2" accent3="accent3" accent4="accent4" accent5="accent5" accent6="accent6" hlink="hlink" folHlink="folHlink"/>
   <p:sldLayoutIdLst>
-    <p:sldLayoutId xmlns:r="http://schemas.openxmlformats.org/officeDocument/2006/relationships" id="2147483649" r:id="R9368d52527814e51"/>
+    <p:sldLayoutId xmlns:r="http://schemas.openxmlformats.org/officeDocument/2006/relationships" id="2147483649" r:id="R2e44dcc9c4524121"/>
   </p:sldLayoutIdLst>
   <p:hf sldNum="0" hdr="0" ftr="0" dt="0"/>
   <p:txStyles>
@@ -3682,7 +3602,7 @@
                   <a:srgbClr val="1A2638"/>
                 </a:solidFill>
               </a:rPr>
-              <a:t>2000–2025 coverage</a:t>
+              <a:t>ICNF source coverage: 2000–2025</a:t>
             </a:r>
             <a:endParaRPr sz="800"/>
           </a:p>
@@ -5593,7 +5513,7 @@
                   <a:srgbClr val="1A2638"/>
                 </a:solidFill>
               </a:rPr>
-              <a:t>Training T=2010–2019; observed outcomes 2011–2020.</a:t>
+              <a:t>Training: T=2010–2019 → outcomes 2011–2020.</a:t>
             </a:r>
             <a:endParaRPr sz="850"/>
           </a:p>
@@ -5957,7 +5877,7 @@
                   <a:srgbClr val="2A9D61"/>
                 </a:solidFill>
               </a:rPr>
-              <a:t>Use later years in sequence</a:t>
+              <a:t>Validation and final evaluation</a:t>
             </a:r>
             <a:endParaRPr sz="800"/>
           </a:p>
@@ -6000,7 +5920,7 @@
                   <a:srgbClr val="1A2638"/>
                 </a:solidFill>
               </a:rPr>
-              <a:t>Validation T=2020–2021 selects the model; final evaluation T=2022–2024 checks it once.</a:t>
+              <a:t>Validation: T=2020–2021 → outcomes 2021–2022.</a:t>
             </a:r>
             <a:endParaRPr sz="850"/>
           </a:p>
@@ -6076,7 +5996,7 @@
                   <a:srgbClr val="1A2638"/>
                 </a:solidFill>
               </a:rPr>
-              <a:t>Freeze before final evaluation</a:t>
+              <a:t>Final: T=2022–2024 → outcomes 2023–2025</a:t>
             </a:r>
             <a:endParaRPr sz="800"/>
           </a:p>
@@ -6119,7 +6039,7 @@
                   <a:srgbClr val="2A9D61"/>
                 </a:solidFill>
               </a:rPr>
-              <a:t>Outcomes 2021–2022, then 2023–2025</a:t>
+              <a:t>Select on validation; evaluate final once</a:t>
             </a:r>
             <a:endParaRPr sz="750"/>
           </a:p>
@@ -6238,7 +6158,7 @@
                   <a:srgbClr val="E8A020"/>
                 </a:solidFill>
               </a:rPr>
-              <a:t>REFIT + ESTIMATE 2026 | Refit on labelled T=2010–2024; apply T=2025 predictors. 2026 outcome pending.</a:t>
+              <a:t>REFIT + 2026 ESTIMATE | T=2010–2024 → outcomes 2011–2025; T=2025 inputs → 2026 estimate (outcome pending).</a:t>
             </a:r>
             <a:endParaRPr sz="850"/>
           </a:p>
@@ -6667,7 +6587,7 @@
           <p:nvPr/>
         </p:nvPicPr>
         <p:blipFill>
-          <a:blip xmlns:r="http://schemas.openxmlformats.org/officeDocument/2006/relationships" xmlns:a="http://schemas.openxmlformats.org/drawingml/2006/main" r:embed="R260cfa5ea9ca4002"/>
+          <a:blip xmlns:r="http://schemas.openxmlformats.org/officeDocument/2006/relationships" xmlns:a="http://schemas.openxmlformats.org/drawingml/2006/main" r:embed="R267747eb6fa64a2b"/>
           <a:stretch xmlns:a="http://schemas.openxmlformats.org/drawingml/2006/main">
             <a:fillRect l="0" t="0" r="0" b="0"/>
           </a:stretch>
@@ -10142,7 +10062,7 @@
           <a:p xmlns:a="http://schemas.openxmlformats.org/drawingml/2006/main">
             <a:r>
               <a:rPr sz="800"/>
-              <a:t>Final test: predictor years T=2022–2024; outcomes T+1=2023–2025</a:t>
+              <a:t>Final temporal evaluation: T=2022–2024 → observed outcomes 2023–2025</a:t>
             </a:r>
           </a:p>
         </p:txBody>
@@ -10915,7 +10835,7 @@
                   <a:srgbClr val="E8A020"/>
                 </a:solidFill>
               </a:rPr>
-              <a:t>No final-test result is used to claim a property-level forecast.</a:t>
+              <a:t>No final-evaluation result is used to claim a property-level forecast.</a:t>
             </a:r>
             <a:endParaRPr sz="750"/>
           </a:p>

--- a/reports/presentation/wildfire_exposure_screening_capstone_final.pptx
+++ b/reports/presentation/wildfire_exposure_screening_capstone_final.pptx
@@ -498,10 +498,7 @@
               <a:rPr lang="en-US" dirty="0"/>
               <a:t>Every analytical record represents the same unit: one mainland Portugal 1 km cell in one predictor year.</a:t>
             </a:r>
-            <a:r>
-              <a:rPr b="0" dirty="0"/>
-              <a:t>.</a:t>
-            </a:r>
+            <a:endParaRPr b="0" dirty="0"/>
           </a:p>
           <a:p>
             <a:endParaRPr dirty="0"/>
@@ -585,7 +582,7 @@
           <a:p>
             <a:r>
               <a:rPr lang="en-US" dirty="0"/>
-              <a:t>Next, I will show the exact training, validation, final-evaluation, refit, and current-estimate periods.</a:t>
+              <a:t>Next, I will show how these records are used to train, select and evaluate the model before producing the 2026 estimate.</a:t>
             </a:r>
           </a:p>
           <a:p>
@@ -762,7 +759,7 @@
           <a:p>
             <a:r>
               <a:rPr lang="en-US" dirty="0"/>
-              <a:t>The next slides compare the observed historical evidence, the official ICNF reference, and the separate model estimate for 2026.</a:t>
+              <a:t>The next slide compares the observed historical evidence, the official ICNF reference, and the separate model estimate for 2026.</a:t>
             </a:r>
           </a:p>
           <a:p>
@@ -1158,21 +1155,13 @@
           <a:p>
             <a:r>
               <a:rPr lang="en-US" dirty="0"/>
-              <a:t>The next slide compares the nine-feature model with a separate recurrence-only benchmark used for model </a:t>
-            </a:r>
-            <a:r>
-              <a:rPr lang="en-US"/>
-              <a:t>evaluation.</a:t>
-            </a:r>
-          </a:p>
-          <a:p>
-            <a:r>
-              <a:rPr lang="en-US"/>
-              <a:t>That </a:t>
-            </a:r>
+              <a:t>The next slide compares the nine-feature model with a separate recurrence-only benchmark used for model evaluation.</a:t>
+            </a:r>
+          </a:p>
+          <a:p>
             <a:r>
               <a:rPr lang="en-US" dirty="0"/>
-              <a:t>benchmark uses a rolling ten-year fire-history feature and is not the fixed 2016–2025 map shown here.</a:t>
+              <a:t>That benchmark uses a rolling ten-year fire-history feature and is not the fixed 2016–2025 map shown here.</a:t>
             </a:r>
           </a:p>
           <a:p>
@@ -1180,20 +1169,21 @@
           </a:p>
           <a:p>
             <a:r>
-              <a:rPr dirty="0"/>
+              <a:rPr lang="en-US" dirty="0"/>
               <a:t>[Sources]</a:t>
             </a:r>
             <a:br>
-              <a:rPr dirty="0"/>
+              <a:rPr lang="en-US" dirty="0"/>
             </a:br>
             <a:r>
-              <a:rPr dirty="0" err="1"/>
+              <a:rPr lang="en-US" dirty="0" err="1"/>
               <a:t>qgis</a:t>
             </a:r>
             <a:r>
-              <a:rPr dirty="0"/>
+              <a:rPr lang="en-US" dirty="0"/>
               <a:t>/README.md; docs/data_dictionary.md; reports/figures/historical_exposure_by_icnf_structural_hazard_crosstab.png</a:t>
             </a:r>
+            <a:endParaRPr dirty="0"/>
           </a:p>
         </p:txBody>
       </p:sp>
@@ -1282,7 +1272,7 @@
             <a:endParaRPr lang="en-US" b="1" dirty="0"/>
           </a:p>
           <a:p>
-            <a:endParaRPr b="1" dirty="0"/>
+            <a:endParaRPr lang="en-US" b="1" dirty="0"/>
           </a:p>
           <a:p>
             <a:r>
@@ -1293,96 +1283,98 @@
           <a:p>
             <a:r>
               <a:rPr lang="en-US" dirty="0"/>
-              <a:t>This slide compares the nine-feature model with a deliberately simple recurrence-only reference.</a:t>
-            </a:r>
+              <a:t>This slide compares the nine-feature model with a deliberately simple recurrence-only reference using the final temporal evaluation: predictor years 2022-2024 and their observed outcomes from 2023-2025.</a:t>
+            </a:r>
+          </a:p>
+          <a:p>
+            <a:endParaRPr lang="en-US" dirty="0"/>
           </a:p>
           <a:p>
             <a:r>
               <a:rPr lang="en-US" dirty="0"/>
-              <a:t>The reference is important because it establishes the minimum performance that a more complex model should beat. It also tests whether land cover, terrain, and climate add useful information beyond previous fire history.</a:t>
-            </a:r>
-          </a:p>
-          <a:p>
+              <a:t>The recurrence-only reference establishes the minimum performance that a more complex model should beat. It uses one predictor: the number of years with burned-area evidence during the previous ten years in the 2 km context.</a:t>
+            </a:r>
+          </a:p>
+          <a:p>
+            <a:r>
+              <a:rPr lang="en-US" dirty="0"/>
+              <a:t>The nine-feature model tests whether land cover, terrain and climate add useful information beyond this fire history.</a:t>
+            </a:r>
+          </a:p>
+          <a:p>
+            <a:endParaRPr lang="en-US" dirty="0"/>
+          </a:p>
+          <a:p>
+            <a:r>
+              <a:rPr lang="en-US" dirty="0"/>
+              <a:t>Because most cell-year outcomes are zero, the nine-feature model uses two gradient-boosting components. One estimates whether the following-year burned share is non-zero.</a:t>
+            </a:r>
+          </a:p>
+          <a:p>
+            <a:r>
+              <a:rPr lang="en-US" dirty="0"/>
+              <a:t>The other estimates its size for positive outcomes. Their results are combined into one continuous burned-share estimate.</a:t>
+            </a:r>
+          </a:p>
+          <a:p>
+            <a:endParaRPr lang="en-US" dirty="0"/>
+          </a:p>
+          <a:p>
+            <a:r>
+              <a:rPr lang="en-US" dirty="0"/>
+              <a:t>MAE decreased from 0.0292 to 0.0209, approximately a 28% reduction in average absolute error.</a:t>
+            </a:r>
+          </a:p>
+          <a:p>
+            <a:r>
+              <a:rPr lang="en-US" dirty="0"/>
+              <a:t>RMSE was almost unchanged and slightly higher, moving from 0.1106 to 0.1110. This means that the model improved typical estimates but did not improve errors associated with the largest outcomes.</a:t>
+            </a:r>
+          </a:p>
+          <a:p>
+            <a:endParaRPr lang="en-US" dirty="0"/>
+          </a:p>
+          <a:p>
+            <a:r>
+              <a:rPr lang="en-US" dirty="0"/>
+              <a:t>Capture@20% increased from 40.2% to 57.2%. For this diagnostic, all final-evaluation cell-year records are ranked by their estimated burned share. </a:t>
+            </a:r>
+          </a:p>
+          <a:p>
+            <a:r>
+              <a:rPr lang="en-US" dirty="0"/>
+              <a:t>The metric measures how much of the total observed burned share occurred within the highest-ranked 20% of those records.</a:t>
+            </a:r>
+          </a:p>
+          <a:p>
+            <a:r>
+              <a:rPr lang="en-US" dirty="0"/>
+              <a:t>This result supports the model only partially. It improves average error and broad-area ranking, but large fire outcomes remain difficult.</a:t>
+            </a:r>
+          </a:p>
+          <a:p>
+            <a:r>
+              <a:rPr lang="en-US" dirty="0"/>
+              <a:t>Capture@20% is not the percentage of Portugal that burned, a buyer threshold, or a property-level forecast.</a:t>
+            </a:r>
+          </a:p>
+          <a:p>
+            <a:endParaRPr lang="en-US" dirty="0"/>
+          </a:p>
+          <a:p>
+            <a:r>
+              <a:rPr lang="en-US" b="1" dirty="0"/>
+              <a:t>Transition:</a:t>
+            </a:r>
             <a:br>
               <a:rPr lang="en-US" dirty="0"/>
             </a:br>
             <a:r>
               <a:rPr lang="en-US" dirty="0"/>
-              <a:t>The reference uses one input: how many of the previous ten years had burned-area evidence within the 2 km context. The nine-feature model combines this fire-history information with land cover, terrain, and climate.</a:t>
-            </a:r>
-            <a:br>
-              <a:rPr lang="en-US" dirty="0"/>
-            </a:br>
-            <a:br>
-              <a:rPr lang="en-US" dirty="0"/>
-            </a:br>
-            <a:r>
-              <a:rPr lang="en-US" dirty="0"/>
-              <a:t>The target contains many zero values, so the nine-feature model uses two gradient-boosting components. One estimates whether the next-year outcome is non-zero, and the other estimates the burned share for positive outcomes. These are combined into one continuous burned-share estimate.</a:t>
-            </a:r>
-            <a:br>
-              <a:rPr lang="en-US" dirty="0"/>
-            </a:br>
-            <a:br>
-              <a:rPr lang="en-US" dirty="0"/>
-            </a:br>
-            <a:r>
-              <a:rPr lang="en-US" b="1" dirty="0"/>
-              <a:t>In the final temporal evaluation, MAE decreased from 0.0292 to 0.0209. This is approximately a 28% reduction in average absolute error.</a:t>
-            </a:r>
-            <a:br>
-              <a:rPr lang="en-US" dirty="0"/>
-            </a:br>
-            <a:br>
-              <a:rPr lang="en-US" dirty="0"/>
-            </a:br>
-            <a:r>
-              <a:rPr lang="en-US" dirty="0"/>
-              <a:t>RMSE remained almost unchanged and was slightly higher. This tells us that the model improved typical estimates but did not solve the problem of rare, large-fire outcomes.</a:t>
-            </a:r>
-            <a:br>
-              <a:rPr lang="en-US" dirty="0"/>
-            </a:br>
-            <a:br>
-              <a:rPr lang="en-US" dirty="0"/>
-            </a:br>
-            <a:r>
-              <a:rPr lang="en-US" dirty="0"/>
-              <a:t>Capture@20% also improved from 40.2% to 57.2%. This means that the highest-ranked one-fifth of cell-year records contained a larger share of the burned area that was later observed.</a:t>
-            </a:r>
-            <a:br>
-              <a:rPr lang="en-US" dirty="0"/>
-            </a:br>
-            <a:endParaRPr dirty="0"/>
-          </a:p>
-          <a:p>
-            <a:r>
-              <a:rPr dirty="0"/>
-              <a:t>Transition: </a:t>
-            </a:r>
-            <a:r>
-              <a:rPr lang="en-US" dirty="0"/>
-              <a:t>The next slide explains how the 2026 comparative estimate can be used to narrow broad areas for further research.</a:t>
-            </a:r>
-            <a:br>
-              <a:rPr lang="en-US" dirty="0"/>
-            </a:br>
-            <a:br>
-              <a:rPr lang="en-US" dirty="0"/>
-            </a:br>
-            <a:r>
-              <a:rPr lang="en-US" b="1" dirty="0"/>
-              <a:t>The result therefore provides partial support for the model.</a:t>
-            </a:r>
-          </a:p>
-          <a:p>
-            <a:r>
-              <a:rPr lang="en-US" b="1" dirty="0"/>
-              <a:t>It improves average error and broad-area ranking, but it is not a precise local forecast and remains uncertain during extreme fire years.</a:t>
-            </a:r>
-            <a:br>
-              <a:rPr lang="en-US" dirty="0"/>
-            </a:br>
+              <a:t>The next slide shows how the 2026 comparative estimate can be used to narrow broad areas for further research.</a:t>
+            </a:r>
+          </a:p>
+          <a:p>
             <a:endParaRPr dirty="0"/>
           </a:p>
           <a:p>
@@ -1908,7 +1900,15 @@
           <a:p>
             <a:r>
               <a:rPr lang="en-US" dirty="0"/>
-              <a:t>However, it did not improve errors for large and extreme fire outcomes.</a:t>
+              <a:t>However, </a:t>
+            </a:r>
+            <a:r>
+              <a:rPr lang="en-US" b="1" dirty="0"/>
+              <a:t>RMSE</a:t>
+            </a:r>
+            <a:r>
+              <a:rPr lang="en-US" dirty="0"/>
+              <a:t> did not improve, showing that large and extreme fire outcomes remain difficult.</a:t>
             </a:r>
           </a:p>
           <a:p>
@@ -1935,7 +1935,7 @@
           <a:p>
             <a:r>
               <a:rPr lang="en-US" dirty="0"/>
-              <a:t>After the required 2026 predictor data are validated, the same selected model can be updated with the new completed evidence and used to produce the next annual estimate.</a:t>
+              <a:t>After the required 2026 predictor data and observed outcome are validated, the same selected model can be rebuilt with the new completed evidence and used to produce the 2027 comparative estimate.</a:t>
             </a:r>
           </a:p>
           <a:p>
@@ -7341,14 +7341,22 @@
               <a:buNone/>
             </a:pPr>
             <a:r>
-              <a:rPr sz="850">
+              <a:rPr lang="en-US" sz="850" dirty="0">
                 <a:solidFill>
                   <a:srgbClr val="1A2638"/>
                 </a:solidFill>
               </a:rPr>
-              <a:t>Counts 2016–2025 burned years in the 2 km context around each 1 km cell.</a:t>
-            </a:r>
-            <a:endParaRPr sz="850"/>
+              <a:t>Counts distinct years with burned-area evidence from 2016-2025 in the 2 km context around each 1 km cell</a:t>
+            </a:r>
+            <a:r>
+              <a:rPr sz="850" dirty="0">
+                <a:solidFill>
+                  <a:srgbClr val="1A2638"/>
+                </a:solidFill>
+              </a:rPr>
+              <a:t>.</a:t>
+            </a:r>
+            <a:endParaRPr sz="850" dirty="0"/>
           </a:p>
         </p:txBody>
       </p:sp>
@@ -10868,14 +10876,30 @@
               <a:buNone/>
             </a:pPr>
             <a:r>
-              <a:rPr sz="800">
+              <a:rPr sz="800" dirty="0">
                 <a:solidFill>
                   <a:srgbClr val="1A2638"/>
                 </a:solidFill>
               </a:rPr>
-              <a:t>Capture@20% is the share of observed burned share found among the 20% highest-scored cells.</a:t>
-            </a:r>
-            <a:endParaRPr sz="800"/>
+              <a:t>Capture@20% is the share of observed burned share found among the 20% highest-scored </a:t>
+            </a:r>
+            <a:r>
+              <a:rPr lang="en-US" sz="800" dirty="0">
+                <a:solidFill>
+                  <a:srgbClr val="1A2638"/>
+                </a:solidFill>
+              </a:rPr>
+              <a:t>records</a:t>
+            </a:r>
+            <a:r>
+              <a:rPr sz="800" dirty="0">
+                <a:solidFill>
+                  <a:srgbClr val="1A2638"/>
+                </a:solidFill>
+              </a:rPr>
+              <a:t>.</a:t>
+            </a:r>
+            <a:endParaRPr sz="800" dirty="0"/>
           </a:p>
         </p:txBody>
       </p:sp>

--- a/reports/presentation/wildfire_exposure_screening_capstone_final.pptx
+++ b/reports/presentation/wildfire_exposure_screening_capstone_final.pptx
@@ -542,7 +542,14 @@
           <a:p>
             <a:r>
               <a:rPr lang="en-US" dirty="0"/>
-              <a:t>The ICNF archive covers 2000–2025. This is the complete source coverage, not one training period. Earlier years are needed to calculate the previous ten years of fire history.</a:t>
+              <a:t>The project’s validated local ICNF archive set covers 2000–2025. Earlier records are needed to calculate the rolling previous-ten-year fire-history feature.</a:t>
+            </a:r>
+            <a:endParaRPr lang="ru-RU" dirty="0"/>
+          </a:p>
+          <a:p>
+            <a:r>
+              <a:rPr lang="en-US" dirty="0"/>
+              <a:t>This is the complete source coverage, not one training period. Earlier years are needed to calculate the previous ten years of fire history.</a:t>
             </a:r>
           </a:p>
           <a:p>
@@ -891,10 +898,12 @@
           <a:p>
             <a:r>
               <a:rPr lang="en-US" dirty="0"/>
-              <a:t>Higher recurrence is concentrated mainly across northern and central Portugal, while much of the south shows lower recurrence during this particular period.</a:t>
-            </a:r>
-          </a:p>
-          <a:p>
+              <a:t>Visually, the map shows more higher-recurrence cells across northern and central Portugal, while many southern cells fall into the lower-recurrence band for this 2016–2025 </a:t>
+            </a:r>
+            <a:r>
+              <a:rPr lang="en-US"/>
+              <a:t>period.</a:t>
+            </a:r>
             <a:endParaRPr lang="en-US" b="1" dirty="0"/>
           </a:p>
           <a:p>
@@ -1328,7 +1337,19 @@
           <a:p>
             <a:r>
               <a:rPr lang="en-US" dirty="0"/>
-              <a:t>RMSE was almost unchanged and slightly higher, moving from 0.1106 to 0.1110. This means that the model improved typical estimates but did not improve errors associated with the largest outcomes.</a:t>
+              <a:t>RMSE was almost unchanged and slightly higher, moving from 0.1106 to 0.1110. </a:t>
+            </a:r>
+          </a:p>
+          <a:p>
+            <a:r>
+              <a:rPr lang="en-US" dirty="0"/>
+              <a:t>Across the final evaluation, all 267,336 cell-year records were ranked by estimated burned share.</a:t>
+            </a:r>
+          </a:p>
+          <a:p>
+            <a:r>
+              <a:rPr lang="en-US" dirty="0"/>
+              <a:t>The highest-ranked 20% contained 40.2% of the summed observed burned-share target for the recurrence baseline and 57.2% for the nine-feature model.</a:t>
             </a:r>
           </a:p>
           <a:p>
@@ -1900,15 +1921,7 @@
           <a:p>
             <a:r>
               <a:rPr lang="en-US" dirty="0"/>
-              <a:t>However, </a:t>
-            </a:r>
-            <a:r>
-              <a:rPr lang="en-US" b="1" dirty="0"/>
-              <a:t>RMSE</a:t>
-            </a:r>
-            <a:r>
-              <a:rPr lang="en-US" dirty="0"/>
-              <a:t> did not improve, showing that large and extreme fire outcomes remain difficult.</a:t>
+              <a:t>However, RMSE was almost unchanged and slightly higher, showing that errors associated with large burned-share outcomes remain difficult.</a:t>
             </a:r>
           </a:p>
           <a:p>
@@ -1929,14 +1942,11 @@
           <a:p>
             <a:r>
               <a:rPr lang="en-US" dirty="0"/>
-              <a:t>When the observed ICNF burned areas for 2026 become available, the existing 2026 estimate can be evaluated.</a:t>
-            </a:r>
-          </a:p>
-          <a:p>
-            <a:r>
-              <a:rPr lang="en-US" dirty="0"/>
-              <a:t>After the required 2026 predictor data and observed outcome are validated, the same selected model can be rebuilt with the new completed evidence and used to produce the 2027 comparative estimate.</a:t>
-            </a:r>
+              <a:t>When the observed 2026 burned areas and the required 2026 predictor data become available, the project can evaluate the existing 2026 estimate, rebuild the unchanged selected model with the new completed evidence, and produce the 2027 comparative estimate.</a:t>
+            </a:r>
+          </a:p>
+          <a:p>
+            <a:endParaRPr lang="en-US" dirty="0"/>
           </a:p>
           <a:p>
             <a:r>
@@ -3739,14 +3749,14 @@
               <a:buNone/>
             </a:pPr>
             <a:r>
-              <a:rPr sz="800" i="1">
+              <a:rPr lang="en-US" sz="800" i="1" dirty="0">
                 <a:solidFill>
                   <a:srgbClr val="1A2638"/>
                 </a:solidFill>
               </a:rPr>
-              <a:t>ICNF source coverage: 2000–2025</a:t>
-            </a:r>
-            <a:endParaRPr sz="800"/>
+              <a:t>Local ICNF archive coverage used: 2000–2025</a:t>
+            </a:r>
+            <a:endParaRPr sz="800" dirty="0"/>
           </a:p>
         </p:txBody>
       </p:sp>
@@ -9991,14 +10001,30 @@
               <a:buNone/>
             </a:pPr>
             <a:r>
-              <a:rPr sz="850">
+              <a:rPr sz="850" dirty="0">
                 <a:solidFill>
                   <a:srgbClr val="1A2638"/>
                 </a:solidFill>
               </a:rPr>
-              <a:t>MAE: 0.0292  -&gt;  0.0209</a:t>
-            </a:r>
-            <a:endParaRPr sz="850"/>
+              <a:t>MAE: 0.029</a:t>
+            </a:r>
+            <a:r>
+              <a:rPr lang="en-US" sz="850" dirty="0">
+                <a:solidFill>
+                  <a:srgbClr val="1A2638"/>
+                </a:solidFill>
+              </a:rPr>
+              <a:t>2</a:t>
+            </a:r>
+            <a:r>
+              <a:rPr sz="850" dirty="0">
+                <a:solidFill>
+                  <a:srgbClr val="1A2638"/>
+                </a:solidFill>
+              </a:rPr>
+              <a:t>  -&gt;  0.0209</a:t>
+            </a:r>
+            <a:endParaRPr sz="850" dirty="0"/>
           </a:p>
         </p:txBody>
       </p:sp>
@@ -10110,14 +10136,38 @@
               <a:buNone/>
             </a:pPr>
             <a:r>
-              <a:rPr sz="850">
+              <a:rPr sz="850" dirty="0">
                 <a:solidFill>
                   <a:srgbClr val="1A2638"/>
                 </a:solidFill>
               </a:rPr>
-              <a:t>RMSE: 0.1106  -&gt;  0.1110</a:t>
-            </a:r>
-            <a:endParaRPr sz="850"/>
+              <a:t>RMSE: 0.110</a:t>
+            </a:r>
+            <a:r>
+              <a:rPr lang="en-US" sz="850" dirty="0">
+                <a:solidFill>
+                  <a:srgbClr val="1A2638"/>
+                </a:solidFill>
+              </a:rPr>
+              <a:t>6</a:t>
+            </a:r>
+            <a:r>
+              <a:rPr sz="850" dirty="0">
+                <a:solidFill>
+                  <a:srgbClr val="1A2638"/>
+                </a:solidFill>
+              </a:rPr>
+              <a:t>  -&gt;  0.11</a:t>
+            </a:r>
+            <a:r>
+              <a:rPr lang="en-US" sz="850" dirty="0">
+                <a:solidFill>
+                  <a:srgbClr val="1A2638"/>
+                </a:solidFill>
+              </a:rPr>
+              <a:t>10</a:t>
+            </a:r>
+            <a:endParaRPr sz="850" dirty="0"/>
           </a:p>
         </p:txBody>
       </p:sp>
@@ -10229,17 +10279,33 @@
               <a:buNone/>
             </a:pPr>
             <a:r>
-              <a:rPr sz="850">
+              <a:rPr sz="850" dirty="0">
                 <a:solidFill>
                   <a:srgbClr val="1A2638"/>
                 </a:solidFill>
               </a:rPr>
-              <a:t>Capture@20%: 40.2%  -&gt;  57.2%</a:t>
-            </a:r>
-          </a:p>
-          <a:p>
-            <a:r>
-              <a:rPr sz="700" i="1">
+              <a:t>Capture@20%: 40.</a:t>
+            </a:r>
+            <a:r>
+              <a:rPr lang="en-US" sz="850" dirty="0">
+                <a:solidFill>
+                  <a:srgbClr val="1A2638"/>
+                </a:solidFill>
+              </a:rPr>
+              <a:t>2</a:t>
+            </a:r>
+            <a:r>
+              <a:rPr sz="850" dirty="0">
+                <a:solidFill>
+                  <a:srgbClr val="1A2638"/>
+                </a:solidFill>
+              </a:rPr>
+              <a:t>%  -&gt;  57.2%</a:t>
+            </a:r>
+          </a:p>
+          <a:p>
+            <a:r>
+              <a:rPr lang="en-US" sz="700" i="1" dirty="0">
                 <a:solidFill>
                   <a:schemeClr val="tx1">
                     <a:lumMod val="50000"/>
@@ -10247,7 +10313,7 @@
                   </a:schemeClr>
                 </a:solidFill>
               </a:rPr>
-              <a:t>how much observed burned share occurred within the highest-ranked 20% of cells</a:t>
+              <a:t>how much of the observed burned-share total occurred within the highest-ranked 20% of final-evaluation cell-year records</a:t>
             </a:r>
           </a:p>
         </p:txBody>

--- a/reports/presentation/wildfire_exposure_screening_capstone_final.pptx
+++ b/reports/presentation/wildfire_exposure_screening_capstone_final.pptx
@@ -866,9 +866,8 @@
           <a:p>
             <a:r>
               <a:rPr lang="en-US" dirty="0"/>
-              <a:t>Historical recurrence is geographically uneven, while the three maps provide different and complementary evidence about the same 1 km cells.</a:t>
-            </a:r>
-            <a:endParaRPr lang="ru-RU" dirty="0"/>
+              <a:t>The three maps show different evidence for the same 1 km cells: observed fire history, official structural hazard and the project’s 2026 estimate.</a:t>
+            </a:r>
           </a:p>
           <a:p>
             <a:endParaRPr dirty="0"/>
@@ -882,7 +881,19 @@
           <a:p>
             <a:r>
               <a:rPr lang="en-US" dirty="0"/>
-              <a:t>This slide shows three different views of mainland Portugal.</a:t>
+              <a:t>The left map shows observed fire recurrence during 2016–2025.</a:t>
+            </a:r>
+          </a:p>
+          <a:p>
+            <a:r>
+              <a:rPr lang="en-US" dirty="0"/>
+              <a:t>Darker cells experienced burned-area evidence in more years within their 2 km context.</a:t>
+            </a:r>
+          </a:p>
+          <a:p>
+            <a:r>
+              <a:rPr lang="en-US" dirty="0"/>
+              <a:t>This is a fixed descriptive map, not the rolling fire-history feature used by the model.</a:t>
             </a:r>
           </a:p>
           <a:p>
@@ -891,61 +902,36 @@
           <a:p>
             <a:r>
               <a:rPr lang="en-US" dirty="0"/>
-              <a:t>The left map shows observed historical recurrence from 2016–2025. Darker areas experienced burned-area evidence in more years within the 2 km context.</a:t>
-            </a:r>
-            <a:endParaRPr lang="ru-RU" dirty="0"/>
+              <a:t>The middle map shows the official ICNF structural-hazard classification, summarized from 25 m pixels to each 1 km cell.</a:t>
+            </a:r>
+          </a:p>
+          <a:p>
+            <a:endParaRPr lang="en-US" dirty="0"/>
           </a:p>
           <a:p>
             <a:r>
               <a:rPr lang="en-US" dirty="0"/>
-              <a:t>Visually, the map shows more higher-recurrence cells across northern and central Portugal, while many southern cells fall into the lower-recurrence band for this 2016–2025 </a:t>
-            </a:r>
-            <a:r>
-              <a:rPr lang="en-US"/>
-              <a:t>period.</a:t>
-            </a:r>
-            <a:endParaRPr lang="en-US" b="1" dirty="0"/>
+              <a:t>The right map shows the project’s 2026 comparative estimate, calculated from 2025 predictors.</a:t>
+            </a:r>
           </a:p>
           <a:p>
             <a:r>
               <a:rPr lang="en-US" dirty="0"/>
-              <a:t>This fixed historical map is descriptive evidence. It is not the exact model input. The model uses a rolling ten-year fire-history period ending before each predictor year.</a:t>
-            </a:r>
-          </a:p>
-          <a:p>
+              <a:t>Its </a:t>
+            </a:r>
+            <a:r>
+              <a:rPr lang="en-US" dirty="0" err="1"/>
+              <a:t>colours</a:t>
+            </a:r>
             <a:r>
               <a:rPr lang="en-US" dirty="0"/>
-              <a:t>For the 2026 estimate, that model feature uses 2015–2024.</a:t>
-            </a:r>
-          </a:p>
-          <a:p>
-            <a:endParaRPr lang="en-US" dirty="0"/>
+              <a:t> represent each cell’s national rank, not a probability of fire.</a:t>
+            </a:r>
           </a:p>
           <a:p>
             <a:r>
               <a:rPr lang="en-US" dirty="0"/>
-              <a:t>The middle map shows the official ICNF structural-hazard classification. It describes underlying landscape conditions and is not this project’s prediction.</a:t>
-            </a:r>
-          </a:p>
-          <a:p>
-            <a:endParaRPr lang="en-US" dirty="0"/>
-          </a:p>
-          <a:p>
-            <a:r>
-              <a:rPr lang="en-US" dirty="0"/>
-              <a:t>The right map shows the project’s comparative estimate for 2026, produced from 2025 predictors. Its three bands represent national relative percentiles, not physical-risk thresholds.</a:t>
-            </a:r>
-          </a:p>
-          <a:p>
-            <a:r>
-              <a:rPr lang="en-US" dirty="0"/>
-              <a:t>The observed 2026 burned area is not yet available, so the estimate cannot yet be evaluated.</a:t>
-            </a:r>
-          </a:p>
-          <a:p>
-            <a:r>
-              <a:rPr lang="en-US" dirty="0"/>
-              <a:t>The maps answer different questions. They should be compared separately and not added together into one score.</a:t>
+              <a:t>The maps answer different questions and should be compared separately rather than combined into one score.</a:t>
             </a:r>
           </a:p>
           <a:p>
@@ -965,7 +951,7 @@
           <a:p>
             <a:r>
               <a:rPr lang="en-US" dirty="0"/>
-              <a:t>The next slide explains why observed historical recurrence and official structural hazard provide useful but different forms of context.</a:t>
+              <a:t>Next, I focus on why the observed history and official ICNF classification provide complementary context.</a:t>
             </a:r>
           </a:p>
           <a:p>
@@ -1073,11 +1059,11 @@
           <a:p>
             <a:r>
               <a:rPr lang="en-US" dirty="0"/>
-              <a:t>Observed recurrence and official structural hazard provide complementary - but different - evidence for broad-area screening.</a:t>
-            </a:r>
-          </a:p>
-          <a:p>
-            <a:endParaRPr dirty="0"/>
+              <a:t>Observed recurrence and official structural hazard can show similar or different patterns because they measure different aspects of wildfire exposure.</a:t>
+            </a:r>
+          </a:p>
+          <a:p>
+            <a:endParaRPr lang="en-US" dirty="0"/>
           </a:p>
           <a:p>
             <a:r>
@@ -1089,7 +1075,13 @@
           <a:p>
             <a:r>
               <a:rPr lang="en-US" dirty="0"/>
-              <a:t>This slide compares two evidence sources.</a:t>
+              <a:t>Observed recurrence tells us where fires were recorded repeatedly during 2016–2025.</a:t>
+            </a:r>
+          </a:p>
+          <a:p>
+            <a:r>
+              <a:rPr lang="en-US" dirty="0"/>
+              <a:t>The official ICNF layer provides a longer-term structural-hazard classification under its own official methodology.</a:t>
             </a:r>
           </a:p>
           <a:p>
@@ -1098,13 +1090,13 @@
           <a:p>
             <a:r>
               <a:rPr lang="en-US" dirty="0"/>
-              <a:t>Historical recurrence counts the distinct years from 2016 to 2025 in which burned-area evidence occurred within the 2 km context around each 1 km cell.</a:t>
+              <a:t>When both layers show higher values, the recent fire record and the official classification provide consistent broad-area evidence.</a:t>
             </a:r>
           </a:p>
           <a:p>
             <a:r>
               <a:rPr lang="en-US" dirty="0"/>
-              <a:t>It describes what was observed during this recent ten-year period.</a:t>
+              <a:t>When they differ, the location deserves closer investigation because recent events and the official classification are telling different stories.</a:t>
             </a:r>
           </a:p>
           <a:p>
@@ -1113,43 +1105,13 @@
           <a:p>
             <a:r>
               <a:rPr lang="en-US" dirty="0"/>
-              <a:t>Official ICNF structural hazard describes persistent landscape conditions associated with wildfire hazard.</a:t>
+              <a:t>This comparison does not test model accuracy and does not prove that either layer is correct for an individual property.</a:t>
             </a:r>
           </a:p>
           <a:p>
             <a:r>
               <a:rPr lang="en-US" dirty="0"/>
-              <a:t>The original official 25 m classification is summarized as the predominant valid class within each 1 km cell.</a:t>
-            </a:r>
-          </a:p>
-          <a:p>
-            <a:endParaRPr lang="en-US" dirty="0"/>
-          </a:p>
-          <a:p>
-            <a:r>
-              <a:rPr lang="en-US" dirty="0"/>
-              <a:t>The layers use different data, methods and time perspectives.</a:t>
-            </a:r>
-          </a:p>
-          <a:p>
-            <a:r>
-              <a:rPr lang="en-US" dirty="0"/>
-              <a:t>Where they show similar patterns, they provide consistent broad-area context.</a:t>
-            </a:r>
-          </a:p>
-          <a:p>
-            <a:r>
-              <a:rPr lang="en-US" dirty="0"/>
-              <a:t>Where they differ, they indicate locations that may require closer investigation. Agreement does not prove that either layer is correct, and this comparison is not a model-accuracy test.</a:t>
-            </a:r>
-          </a:p>
-          <a:p>
-            <a:endParaRPr lang="en-US" dirty="0"/>
-          </a:p>
-          <a:p>
-            <a:r>
-              <a:rPr lang="en-US" dirty="0"/>
-              <a:t>Neither layer is a buyer threshold or property certification. They support broad-area screening and must be followed by local verification.</a:t>
+              <a:t>Both are supporting evidence for broad-area screening.</a:t>
             </a:r>
           </a:p>
           <a:p>
@@ -1164,13 +1126,7 @@
           <a:p>
             <a:r>
               <a:rPr lang="en-US" dirty="0"/>
-              <a:t>The next slide compares the nine-feature model with a separate recurrence-only benchmark used for model evaluation.</a:t>
-            </a:r>
-          </a:p>
-          <a:p>
-            <a:r>
-              <a:rPr lang="en-US" dirty="0"/>
-              <a:t>That benchmark uses a rolling ten-year fire-history feature and is not the fixed 2016–2025 map shown here.</a:t>
+              <a:t>The next slide moves from descriptive GIS evidence to the evaluation of the machine-learning model against a separate recurrence-only benchmark.</a:t>
             </a:r>
           </a:p>
           <a:p>
@@ -1341,42 +1297,69 @@
             </a:r>
           </a:p>
           <a:p>
+            <a:endParaRPr lang="en-US" dirty="0"/>
+          </a:p>
+          <a:p>
             <a:r>
               <a:rPr lang="en-US" dirty="0"/>
-              <a:t>Across the final evaluation, all 267,336 cell-year records were ranked by estimated burned share.</a:t>
-            </a:r>
+              <a:t>If we inspect only the 20% of cell-year records that the model ranked highest, how much of the observed burning do we find there?</a:t>
+            </a:r>
+          </a:p>
+          <a:p>
+            <a:endParaRPr lang="en-US" dirty="0"/>
           </a:p>
           <a:p>
             <a:r>
               <a:rPr lang="en-US" dirty="0"/>
-              <a:t>The highest-ranked 20% contained 40.2% of the summed observed burned-share target for the recurrence baseline and 57.2% for the nine-feature model.</a:t>
-            </a:r>
-          </a:p>
-          <a:p>
-            <a:endParaRPr lang="en-US" dirty="0"/>
+              <a:t>Capture@20% checks whether the model puts important cells near the top of its ranking.</a:t>
+            </a:r>
           </a:p>
           <a:p>
             <a:r>
               <a:rPr lang="en-US" dirty="0"/>
-              <a:t>Capture@20% increased from 40.2% to 57.2%. For this diagnostic, all final-evaluation cell-year records are ranked by their estimated burned share. </a:t>
-            </a:r>
-          </a:p>
-          <a:p>
+              <a:t>We take the 20% of cells with the highest estimated exposure and check how much observed burning occurred there.</a:t>
+            </a:r>
+          </a:p>
+          <a:p>
+            <a:pPr>
+              <a:buFont typeface="Arial" panose="020B0604020202020204" pitchFamily="34" charset="0"/>
+              <a:buChar char="•"/>
+            </a:pPr>
             <a:r>
               <a:rPr lang="en-US" dirty="0"/>
-              <a:t>The metric measures how much of the total observed burned share occurred within the highest-ranked 20% of those records.</a:t>
-            </a:r>
-          </a:p>
-          <a:p>
+              <a:t>Recurrence baseline: 40.2%</a:t>
+            </a:r>
+          </a:p>
+          <a:p>
+            <a:pPr>
+              <a:buFont typeface="Arial" panose="020B0604020202020204" pitchFamily="34" charset="0"/>
+              <a:buChar char="•"/>
+            </a:pPr>
             <a:r>
               <a:rPr lang="en-US" dirty="0"/>
-              <a:t>This result supports the model only partially. It improves average error and broad-area ranking, but large fire outcomes remain difficult.</a:t>
+              <a:t>Nine-feature model: 57.2%</a:t>
             </a:r>
           </a:p>
           <a:p>
             <a:r>
               <a:rPr lang="en-US" dirty="0"/>
-              <a:t>Capture@20% is not the percentage of Portugal that burned, a buyer threshold, or a property-level forecast.</a:t>
+              <a:t>The nine-feature model therefore produced a better ranking</a:t>
+            </a:r>
+            <a:r>
+              <a:rPr lang="ru-RU" dirty="0"/>
+              <a:t> - </a:t>
+            </a:r>
+            <a:r>
+              <a:rPr lang="en-US" dirty="0"/>
+              <a:t>it is a technical evaluation measure</a:t>
+            </a:r>
+            <a:r>
+              <a:rPr lang="ru-RU" dirty="0"/>
+              <a:t>ю</a:t>
+            </a:r>
+            <a:r>
+              <a:rPr lang="en-US" dirty="0"/>
+              <a:t> However, this is not a fire probability or a buyer threshold.</a:t>
             </a:r>
           </a:p>
           <a:p>

--- a/reports/presentation/wildfire_exposure_screening_capstone_final.pptx
+++ b/reports/presentation/wildfire_exposure_screening_capstone_final.pptx
@@ -1351,15 +1351,23 @@
             </a:r>
             <a:r>
               <a:rPr lang="en-US" dirty="0"/>
-              <a:t>it is a technical evaluation measure</a:t>
-            </a:r>
-            <a:r>
-              <a:rPr lang="ru-RU" dirty="0"/>
-              <a:t>ю</a:t>
+              <a:t>it is a technical </a:t>
+            </a:r>
+            <a:r>
+              <a:rPr lang="en-US"/>
+              <a:t>evaluation measure</a:t>
             </a:r>
             <a:r>
               <a:rPr lang="en-US" dirty="0"/>
-              <a:t> However, this is not a fire probability or a buyer threshold.</a:t>
+              <a:t>.</a:t>
+            </a:r>
+            <a:r>
+              <a:rPr lang="en-US"/>
+              <a:t> </a:t>
+            </a:r>
+            <a:r>
+              <a:rPr lang="en-US" dirty="0"/>
+              <a:t>However, this is not a fire probability or a buyer threshold.</a:t>
             </a:r>
           </a:p>
           <a:p>
